--- a/docs/presentation/healthcare-case-study/federated-healthcare-use-case/dagents-federated-healthcare-use-case.pptx
+++ b/docs/presentation/healthcare-case-study/federated-healthcare-use-case/dagents-federated-healthcare-use-case.pptx
@@ -12,6 +12,8 @@
     <p:sldId id="257" r:id="rId3"/>
     <p:sldId id="258" r:id="rId4"/>
     <p:sldId id="259" r:id="rId5"/>
+    <p:sldId id="277" r:id="rId28"/>
+    <p:sldId id="278" r:id="rId29"/>
     <p:sldId id="260" r:id="rId6"/>
     <p:sldId id="261" r:id="rId7"/>
     <p:sldId id="262" r:id="rId8"/>
@@ -24,6 +26,13 @@
     <p:sldId id="269" r:id="rId15"/>
     <p:sldId id="270" r:id="rId16"/>
     <p:sldId id="271" r:id="rId17"/>
+    <p:sldId id="279" r:id="rId30"/>
+    <p:sldId id="280" r:id="rId31"/>
+    <p:sldId id="281" r:id="rId32"/>
+    <p:sldId id="282" r:id="rId33"/>
+    <p:sldId id="283" r:id="rId34"/>
+    <p:sldId id="284" r:id="rId35"/>
+    <p:sldId id="285" r:id="rId36"/>
     <p:sldId id="272" r:id="rId18"/>
     <p:sldId id="273" r:id="rId19"/>
     <p:sldId id="274" r:id="rId20"/>
@@ -5585,7 +5594,7 @@
                 <a:ea typeface="Aptos"/>
                 <a:cs typeface="Aptos"/>
               </a:rPr>
-              <a:t>Federation is a design family—not a single product or guarantee / 10</a:t>
+              <a:t>Federation is a design family—not a single product or guarantee / 12</a:t>
             </a:r>
           </a:p>
         </p:txBody>
@@ -7237,7 +7246,7 @@
                 <a:ea typeface="Aptos"/>
                 <a:cs typeface="Aptos"/>
               </a:rPr>
-              <a:t>Integrate NVIDIA FLARE or an equivalent runtime; keep Dagents as the reusable governance and orchestration layer / 12</a:t>
+              <a:t>Integrate NVIDIA FLARE or an equivalent runtime; keep Dagents as the reusable governance and orchestration layer / 14</a:t>
             </a:r>
           </a:p>
         </p:txBody>
@@ -8063,7 +8072,7 @@
                 <a:ea typeface="Aptos"/>
                 <a:cs typeface="Aptos"/>
               </a:rPr>
-              <a:t>Seed → bounded updates → verified candidate → immutable release → tested rollback / 13</a:t>
+              <a:t>Seed → bounded updates → verified candidate → immutable release → tested rollback / 15</a:t>
             </a:r>
           </a:p>
         </p:txBody>
@@ -9215,7 +9224,7 @@
                 <a:ea typeface="Aptos"/>
                 <a:cs typeface="Aptos"/>
               </a:rPr>
-              <a:t>Dagents federation component map / 14</a:t>
+              <a:t>Dagents federation component map / 16</a:t>
             </a:r>
           </a:p>
         </p:txBody>
@@ -10905,7 +10914,7 @@
                 <a:ea typeface="Aptos"/>
                 <a:cs typeface="Aptos"/>
               </a:rPr>
-              <a:t>Federated safety gates / 16</a:t>
+              <a:t>Federated safety gates / 18</a:t>
             </a:r>
           </a:p>
         </p:txBody>
@@ -12985,7 +12994,7 @@
                 <a:ea typeface="Aptos"/>
                 <a:cs typeface="Aptos"/>
               </a:rPr>
-              <a:t>Dagents wins on control, portability, and recoverability—not on lowest initial effort / 17</a:t>
+              <a:t>Dagents wins on control, portability, and recoverability—not on lowest initial effort / 26</a:t>
             </a:r>
           </a:p>
         </p:txBody>
@@ -15065,7 +15074,7 @@
                 <a:ea typeface="Aptos"/>
                 <a:cs typeface="Aptos"/>
               </a:rPr>
-              <a:t>Evidence—not calendar dates—advances the federation / 18</a:t>
+              <a:t>Evidence—not calendar dates—advances the federation / 27</a:t>
             </a:r>
           </a:p>
         </p:txBody>
@@ -15891,7 +15900,7 @@
                 <a:ea typeface="Aptos"/>
                 <a:cs typeface="Aptos"/>
               </a:rPr>
-              <a:t>Set measured baselines before targets; do not borrow NVIDIA study results as project goals / 19</a:t>
+              <a:t>Set measured baselines before targets; do not borrow NVIDIA study results as project goals / 28</a:t>
             </a:r>
           </a:p>
         </p:txBody>
@@ -17572,7 +17581,7 @@
                 <a:ea typeface="Aptos"/>
                 <a:cs typeface="Aptos"/>
               </a:rPr>
-              <a:t>Dagents Federated Healthcare / 20</a:t>
+              <a:t>Dagents Federated Healthcare / 29</a:t>
             </a:r>
           </a:p>
         </p:txBody>
@@ -19652,7 +19661,7 @@
                 <a:ea typeface="Aptos"/>
                 <a:cs typeface="Aptos"/>
               </a:rPr>
-              <a:t>Federated healthcare glossary / 21</a:t>
+              <a:t>Federated healthcare glossary / 30</a:t>
             </a:r>
           </a:p>
         </p:txBody>
@@ -19663,6 +19672,6691 @@
         <p14:creationId xmlns:p14="http://schemas.microsoft.com/office/powerpoint/2010/main" val="1134147268"/>
       </p:ext>
     </p:extLst>
+  </p:cSld>
+  <p:clrMapOvr>
+    <a:masterClrMapping/>
+  </p:clrMapOvr>
+</p:sld>
+</file>
+
+<file path=ppt/slides/slide22.xml><?xml version="1.0" encoding="utf-8"?>
+<p:sld xmlns:a="http://schemas.openxmlformats.org/drawingml/2006/main" xmlns:p="http://schemas.openxmlformats.org/presentationml/2006/main" xmlns:r="http://schemas.openxmlformats.org/officeDocument/2006/relationships">
+  <p:cSld>
+    <p:bg>
+      <p:bgPr>
+        <a:solidFill>
+          <a:srgbClr val="F7F3EA"/>
+        </a:solidFill>
+        <a:effectLst/>
+      </p:bgPr>
+    </p:bg>
+    <p:spTree>
+      <p:nvGrpSpPr>
+        <p:cNvPr id="1" name=""/>
+        <p:cNvGrpSpPr/>
+        <p:nvPr/>
+      </p:nvGrpSpPr>
+      <p:grpSpPr/>
+      <p:sp>
+        <p:nvSpPr>
+          <p:cNvPr id="2" name="TextBox 1"/>
+          <p:cNvSpPr txBox="1"/>
+          <p:nvPr/>
+        </p:nvSpPr>
+        <p:spPr>
+          <a:xfrm>
+            <a:off x="548640" y="320040"/>
+            <a:ext cx="2377440" cy="292608"/>
+          </a:xfrm>
+          <a:prstGeom prst="rect">
+            <a:avLst/>
+          </a:prstGeom>
+          <a:noFill/>
+        </p:spPr>
+        <p:txBody>
+          <a:bodyPr wrap="square">
+            <a:noAutofit/>
+          </a:bodyPr>
+          <a:lstStyle/>
+          <a:p>
+            <a:r>
+              <a:rPr sz="1300" b="1">
+                <a:solidFill>
+                  <a:srgbClr val="53635B"/>
+                </a:solidFill>
+                <a:latin typeface="Aptos"/>
+              </a:rPr>
+              <a:t>WALKTHROUGH</a:t>
+            </a:r>
+          </a:p>
+        </p:txBody>
+      </p:sp>
+      <p:sp>
+        <p:nvSpPr>
+          <p:cNvPr id="3" name="TextBox 2"/>
+          <p:cNvSpPr txBox="1"/>
+          <p:nvPr/>
+        </p:nvSpPr>
+        <p:spPr>
+          <a:xfrm>
+            <a:off x="548640" y="658368"/>
+            <a:ext cx="10424160" cy="594360"/>
+          </a:xfrm>
+          <a:prstGeom prst="rect">
+            <a:avLst/>
+          </a:prstGeom>
+          <a:noFill/>
+        </p:spPr>
+        <p:txBody>
+          <a:bodyPr wrap="square">
+            <a:noAutofit/>
+          </a:bodyPr>
+          <a:lstStyle/>
+          <a:p>
+            <a:r>
+              <a:rPr sz="2900" b="1">
+                <a:solidFill>
+                  <a:srgbClr val="15201B"/>
+                </a:solidFill>
+                <a:latin typeface="Aptos"/>
+              </a:rPr>
+              <a:t>What happens to one patient's record.</a:t>
+            </a:r>
+          </a:p>
+        </p:txBody>
+      </p:sp>
+      <p:sp>
+        <p:nvSpPr>
+          <p:cNvPr id="4" name="TextBox 3"/>
+          <p:cNvSpPr txBox="1"/>
+          <p:nvPr/>
+        </p:nvSpPr>
+        <p:spPr>
+          <a:xfrm>
+            <a:off x="566928" y="1225296"/>
+            <a:ext cx="9784080" cy="521207"/>
+          </a:xfrm>
+          <a:prstGeom prst="rect">
+            <a:avLst/>
+          </a:prstGeom>
+          <a:noFill/>
+        </p:spPr>
+        <p:txBody>
+          <a:bodyPr wrap="square">
+            <a:noAutofit/>
+          </a:bodyPr>
+          <a:lstStyle/>
+          <a:p>
+            <a:r>
+              <a:rPr sz="1400" b="0">
+                <a:solidFill>
+                  <a:srgbClr val="53635B"/>
+                </a:solidFill>
+                <a:latin typeface="Aptos"/>
+              </a:rPr>
+              <a:t>The record stays in the hospital. Only a number leaves.</a:t>
+            </a:r>
+          </a:p>
+        </p:txBody>
+      </p:sp>
+      <p:sp>
+        <p:nvSpPr>
+          <p:cNvPr id="5" name="Rounded Rectangle 4"/>
+          <p:cNvSpPr/>
+          <p:nvPr/>
+        </p:nvSpPr>
+        <p:spPr>
+          <a:xfrm>
+            <a:off x="685800" y="1874519"/>
+            <a:ext cx="2423160" cy="2560320"/>
+          </a:xfrm>
+          <a:prstGeom prst="roundRect">
+            <a:avLst/>
+          </a:prstGeom>
+          <a:solidFill>
+            <a:srgbClr val="DCEBE1"/>
+          </a:solidFill>
+          <a:ln w="12700">
+            <a:solidFill>
+              <a:srgbClr val="B9C2BB"/>
+            </a:solidFill>
+          </a:ln>
+          <a:effectLst/>
+        </p:spPr>
+        <p:style>
+          <a:lnRef idx="1">
+            <a:schemeClr val="accent1"/>
+          </a:lnRef>
+          <a:fillRef idx="3">
+            <a:schemeClr val="accent1"/>
+          </a:fillRef>
+          <a:effectRef idx="2">
+            <a:schemeClr val="accent1"/>
+          </a:effectRef>
+          <a:fontRef idx="minor">
+            <a:schemeClr val="lt1"/>
+          </a:fontRef>
+        </p:style>
+        <p:txBody>
+          <a:bodyPr rtlCol="0" anchor="ctr"/>
+          <a:lstStyle/>
+          <a:p/>
+        </p:txBody>
+      </p:sp>
+      <p:sp>
+        <p:nvSpPr>
+          <p:cNvPr id="6" name="TextBox 5"/>
+          <p:cNvSpPr txBox="1"/>
+          <p:nvPr/>
+        </p:nvSpPr>
+        <p:spPr>
+          <a:xfrm>
+            <a:off x="850392" y="2020824"/>
+            <a:ext cx="2103120" cy="320040"/>
+          </a:xfrm>
+          <a:prstGeom prst="rect">
+            <a:avLst/>
+          </a:prstGeom>
+          <a:noFill/>
+        </p:spPr>
+        <p:txBody>
+          <a:bodyPr wrap="square">
+            <a:noAutofit/>
+          </a:bodyPr>
+          <a:lstStyle/>
+          <a:p>
+            <a:r>
+              <a:rPr sz="1500" b="1">
+                <a:solidFill>
+                  <a:srgbClr val="15201B"/>
+                </a:solidFill>
+                <a:latin typeface="Aptos"/>
+              </a:rPr>
+              <a:t>ARRIVES</a:t>
+            </a:r>
+          </a:p>
+        </p:txBody>
+      </p:sp>
+      <p:sp>
+        <p:nvSpPr>
+          <p:cNvPr id="7" name="TextBox 6"/>
+          <p:cNvSpPr txBox="1"/>
+          <p:nvPr/>
+        </p:nvSpPr>
+        <p:spPr>
+          <a:xfrm>
+            <a:off x="850392" y="2404872"/>
+            <a:ext cx="2103120" cy="1901951"/>
+          </a:xfrm>
+          <a:prstGeom prst="rect">
+            <a:avLst/>
+          </a:prstGeom>
+          <a:noFill/>
+        </p:spPr>
+        <p:txBody>
+          <a:bodyPr wrap="square">
+            <a:noAutofit/>
+          </a:bodyPr>
+          <a:lstStyle/>
+          <a:p>
+            <a:r>
+              <a:rPr sz="1200" b="0">
+                <a:solidFill>
+                  <a:srgbClr val="53635B"/>
+                </a:solidFill>
+                <a:latin typeface="Aptos"/>
+              </a:rPr>
+              <a:t>A patient is admitted. Vital signs, laboratory results, and notes land in the hospital's own systems, exactly as they do today.</a:t>
+            </a:r>
+          </a:p>
+        </p:txBody>
+      </p:sp>
+      <p:sp>
+        <p:nvSpPr>
+          <p:cNvPr id="8" name="TextBox 7"/>
+          <p:cNvSpPr txBox="1"/>
+          <p:nvPr/>
+        </p:nvSpPr>
+        <p:spPr>
+          <a:xfrm>
+            <a:off x="3154679" y="2898648"/>
+            <a:ext cx="320040" cy="521207"/>
+          </a:xfrm>
+          <a:prstGeom prst="rect">
+            <a:avLst/>
+          </a:prstGeom>
+          <a:noFill/>
+        </p:spPr>
+        <p:txBody>
+          <a:bodyPr wrap="square">
+            <a:noAutofit/>
+          </a:bodyPr>
+          <a:lstStyle/>
+          <a:p>
+            <a:r>
+              <a:rPr sz="2800" b="1">
+                <a:solidFill>
+                  <a:srgbClr val="53635B"/>
+                </a:solidFill>
+                <a:latin typeface="Aptos"/>
+              </a:rPr>
+              <a:t>→</a:t>
+            </a:r>
+          </a:p>
+        </p:txBody>
+      </p:sp>
+      <p:sp>
+        <p:nvSpPr>
+          <p:cNvPr id="9" name="Rounded Rectangle 8"/>
+          <p:cNvSpPr/>
+          <p:nvPr/>
+        </p:nvSpPr>
+        <p:spPr>
+          <a:xfrm>
+            <a:off x="3474720" y="1874519"/>
+            <a:ext cx="2423160" cy="2560320"/>
+          </a:xfrm>
+          <a:prstGeom prst="roundRect">
+            <a:avLst/>
+          </a:prstGeom>
+          <a:solidFill>
+            <a:srgbClr val="DCE7F1"/>
+          </a:solidFill>
+          <a:ln w="12700">
+            <a:solidFill>
+              <a:srgbClr val="B9C2BB"/>
+            </a:solidFill>
+          </a:ln>
+          <a:effectLst/>
+        </p:spPr>
+        <p:style>
+          <a:lnRef idx="1">
+            <a:schemeClr val="accent1"/>
+          </a:lnRef>
+          <a:fillRef idx="3">
+            <a:schemeClr val="accent1"/>
+          </a:fillRef>
+          <a:effectRef idx="2">
+            <a:schemeClr val="accent1"/>
+          </a:effectRef>
+          <a:fontRef idx="minor">
+            <a:schemeClr val="lt1"/>
+          </a:fontRef>
+        </p:style>
+        <p:txBody>
+          <a:bodyPr rtlCol="0" anchor="ctr"/>
+          <a:lstStyle/>
+          <a:p/>
+        </p:txBody>
+      </p:sp>
+      <p:sp>
+        <p:nvSpPr>
+          <p:cNvPr id="10" name="TextBox 9"/>
+          <p:cNvSpPr txBox="1"/>
+          <p:nvPr/>
+        </p:nvSpPr>
+        <p:spPr>
+          <a:xfrm>
+            <a:off x="3639312" y="2020824"/>
+            <a:ext cx="2103120" cy="320040"/>
+          </a:xfrm>
+          <a:prstGeom prst="rect">
+            <a:avLst/>
+          </a:prstGeom>
+          <a:noFill/>
+        </p:spPr>
+        <p:txBody>
+          <a:bodyPr wrap="square">
+            <a:noAutofit/>
+          </a:bodyPr>
+          <a:lstStyle/>
+          <a:p>
+            <a:r>
+              <a:rPr sz="1500" b="1">
+                <a:solidFill>
+                  <a:srgbClr val="15201B"/>
+                </a:solidFill>
+                <a:latin typeface="Aptos"/>
+              </a:rPr>
+              <a:t>STAYS LOCAL</a:t>
+            </a:r>
+          </a:p>
+        </p:txBody>
+      </p:sp>
+      <p:sp>
+        <p:nvSpPr>
+          <p:cNvPr id="11" name="TextBox 10"/>
+          <p:cNvSpPr txBox="1"/>
+          <p:nvPr/>
+        </p:nvSpPr>
+        <p:spPr>
+          <a:xfrm>
+            <a:off x="3639312" y="2404872"/>
+            <a:ext cx="2103120" cy="1901951"/>
+          </a:xfrm>
+          <a:prstGeom prst="rect">
+            <a:avLst/>
+          </a:prstGeom>
+          <a:noFill/>
+        </p:spPr>
+        <p:txBody>
+          <a:bodyPr wrap="square">
+            <a:noAutofit/>
+          </a:bodyPr>
+          <a:lstStyle/>
+          <a:p>
+            <a:r>
+              <a:rPr sz="1200" b="0">
+                <a:solidFill>
+                  <a:srgbClr val="53635B"/>
+                </a:solidFill>
+                <a:latin typeface="Aptos"/>
+              </a:rPr>
+              <a:t>The LMA builds the approved features inside the hospital. Nothing is copied out, and the hospital can refuse the job.</a:t>
+            </a:r>
+          </a:p>
+        </p:txBody>
+      </p:sp>
+      <p:sp>
+        <p:nvSpPr>
+          <p:cNvPr id="12" name="TextBox 11"/>
+          <p:cNvSpPr txBox="1"/>
+          <p:nvPr/>
+        </p:nvSpPr>
+        <p:spPr>
+          <a:xfrm>
+            <a:off x="5943599" y="2898648"/>
+            <a:ext cx="320040" cy="521207"/>
+          </a:xfrm>
+          <a:prstGeom prst="rect">
+            <a:avLst/>
+          </a:prstGeom>
+          <a:noFill/>
+        </p:spPr>
+        <p:txBody>
+          <a:bodyPr wrap="square">
+            <a:noAutofit/>
+          </a:bodyPr>
+          <a:lstStyle/>
+          <a:p>
+            <a:r>
+              <a:rPr sz="2800" b="1">
+                <a:solidFill>
+                  <a:srgbClr val="53635B"/>
+                </a:solidFill>
+                <a:latin typeface="Aptos"/>
+              </a:rPr>
+              <a:t>→</a:t>
+            </a:r>
+          </a:p>
+        </p:txBody>
+      </p:sp>
+      <p:sp>
+        <p:nvSpPr>
+          <p:cNvPr id="13" name="Rounded Rectangle 12"/>
+          <p:cNvSpPr/>
+          <p:nvPr/>
+        </p:nvSpPr>
+        <p:spPr>
+          <a:xfrm>
+            <a:off x="6263640" y="1874519"/>
+            <a:ext cx="2423160" cy="2560320"/>
+          </a:xfrm>
+          <a:prstGeom prst="roundRect">
+            <a:avLst/>
+          </a:prstGeom>
+          <a:solidFill>
+            <a:srgbClr val="F4E8D0"/>
+          </a:solidFill>
+          <a:ln w="12700">
+            <a:solidFill>
+              <a:srgbClr val="B9C2BB"/>
+            </a:solidFill>
+          </a:ln>
+          <a:effectLst/>
+        </p:spPr>
+        <p:style>
+          <a:lnRef idx="1">
+            <a:schemeClr val="accent1"/>
+          </a:lnRef>
+          <a:fillRef idx="3">
+            <a:schemeClr val="accent1"/>
+          </a:fillRef>
+          <a:effectRef idx="2">
+            <a:schemeClr val="accent1"/>
+          </a:effectRef>
+          <a:fontRef idx="minor">
+            <a:schemeClr val="lt1"/>
+          </a:fontRef>
+        </p:style>
+        <p:txBody>
+          <a:bodyPr rtlCol="0" anchor="ctr"/>
+          <a:lstStyle/>
+          <a:p/>
+        </p:txBody>
+      </p:sp>
+      <p:sp>
+        <p:nvSpPr>
+          <p:cNvPr id="14" name="TextBox 13"/>
+          <p:cNvSpPr txBox="1"/>
+          <p:nvPr/>
+        </p:nvSpPr>
+        <p:spPr>
+          <a:xfrm>
+            <a:off x="6428231" y="2020824"/>
+            <a:ext cx="2103120" cy="320040"/>
+          </a:xfrm>
+          <a:prstGeom prst="rect">
+            <a:avLst/>
+          </a:prstGeom>
+          <a:noFill/>
+        </p:spPr>
+        <p:txBody>
+          <a:bodyPr wrap="square">
+            <a:noAutofit/>
+          </a:bodyPr>
+          <a:lstStyle/>
+          <a:p>
+            <a:r>
+              <a:rPr sz="1500" b="1">
+                <a:solidFill>
+                  <a:srgbClr val="15201B"/>
+                </a:solidFill>
+                <a:latin typeface="Aptos"/>
+              </a:rPr>
+              <a:t>BECOMES MATH</a:t>
+            </a:r>
+          </a:p>
+        </p:txBody>
+      </p:sp>
+      <p:sp>
+        <p:nvSpPr>
+          <p:cNvPr id="15" name="TextBox 14"/>
+          <p:cNvSpPr txBox="1"/>
+          <p:nvPr/>
+        </p:nvSpPr>
+        <p:spPr>
+          <a:xfrm>
+            <a:off x="6428231" y="2404872"/>
+            <a:ext cx="2103120" cy="1901951"/>
+          </a:xfrm>
+          <a:prstGeom prst="rect">
+            <a:avLst/>
+          </a:prstGeom>
+          <a:noFill/>
+        </p:spPr>
+        <p:txBody>
+          <a:bodyPr wrap="square">
+            <a:noAutofit/>
+          </a:bodyPr>
+          <a:lstStyle/>
+          <a:p>
+            <a:r>
+              <a:rPr sz="1200" b="0">
+                <a:solidFill>
+                  <a:srgbClr val="53635B"/>
+                </a:solidFill>
+                <a:latin typeface="Aptos"/>
+              </a:rPr>
+              <a:t>The local model trains or scores. This patient turns into part of a total, not a row anyone can read.</a:t>
+            </a:r>
+          </a:p>
+        </p:txBody>
+      </p:sp>
+      <p:sp>
+        <p:nvSpPr>
+          <p:cNvPr id="16" name="TextBox 15"/>
+          <p:cNvSpPr txBox="1"/>
+          <p:nvPr/>
+        </p:nvSpPr>
+        <p:spPr>
+          <a:xfrm>
+            <a:off x="8732520" y="2898648"/>
+            <a:ext cx="320040" cy="521207"/>
+          </a:xfrm>
+          <a:prstGeom prst="rect">
+            <a:avLst/>
+          </a:prstGeom>
+          <a:noFill/>
+        </p:spPr>
+        <p:txBody>
+          <a:bodyPr wrap="square">
+            <a:noAutofit/>
+          </a:bodyPr>
+          <a:lstStyle/>
+          <a:p>
+            <a:r>
+              <a:rPr sz="2800" b="1">
+                <a:solidFill>
+                  <a:srgbClr val="53635B"/>
+                </a:solidFill>
+                <a:latin typeface="Aptos"/>
+              </a:rPr>
+              <a:t>→</a:t>
+            </a:r>
+          </a:p>
+        </p:txBody>
+      </p:sp>
+      <p:sp>
+        <p:nvSpPr>
+          <p:cNvPr id="17" name="Rounded Rectangle 16"/>
+          <p:cNvSpPr/>
+          <p:nvPr/>
+        </p:nvSpPr>
+        <p:spPr>
+          <a:xfrm>
+            <a:off x="9052559" y="1874519"/>
+            <a:ext cx="2423160" cy="2560320"/>
+          </a:xfrm>
+          <a:prstGeom prst="roundRect">
+            <a:avLst/>
+          </a:prstGeom>
+          <a:solidFill>
+            <a:srgbClr val="E9E1FA"/>
+          </a:solidFill>
+          <a:ln w="12700">
+            <a:solidFill>
+              <a:srgbClr val="B9C2BB"/>
+            </a:solidFill>
+          </a:ln>
+          <a:effectLst/>
+        </p:spPr>
+        <p:style>
+          <a:lnRef idx="1">
+            <a:schemeClr val="accent1"/>
+          </a:lnRef>
+          <a:fillRef idx="3">
+            <a:schemeClr val="accent1"/>
+          </a:fillRef>
+          <a:effectRef idx="2">
+            <a:schemeClr val="accent1"/>
+          </a:effectRef>
+          <a:fontRef idx="minor">
+            <a:schemeClr val="lt1"/>
+          </a:fontRef>
+        </p:style>
+        <p:txBody>
+          <a:bodyPr rtlCol="0" anchor="ctr"/>
+          <a:lstStyle/>
+          <a:p/>
+        </p:txBody>
+      </p:sp>
+      <p:sp>
+        <p:nvSpPr>
+          <p:cNvPr id="18" name="TextBox 17"/>
+          <p:cNvSpPr txBox="1"/>
+          <p:nvPr/>
+        </p:nvSpPr>
+        <p:spPr>
+          <a:xfrm>
+            <a:off x="9217151" y="2020824"/>
+            <a:ext cx="2103120" cy="320040"/>
+          </a:xfrm>
+          <a:prstGeom prst="rect">
+            <a:avLst/>
+          </a:prstGeom>
+          <a:noFill/>
+        </p:spPr>
+        <p:txBody>
+          <a:bodyPr wrap="square">
+            <a:noAutofit/>
+          </a:bodyPr>
+          <a:lstStyle/>
+          <a:p>
+            <a:r>
+              <a:rPr sz="1500" b="1">
+                <a:solidFill>
+                  <a:srgbClr val="15201B"/>
+                </a:solidFill>
+                <a:latin typeface="Aptos"/>
+              </a:rPr>
+              <a:t>LEAVES SMALL</a:t>
+            </a:r>
+          </a:p>
+        </p:txBody>
+      </p:sp>
+      <p:sp>
+        <p:nvSpPr>
+          <p:cNvPr id="19" name="TextBox 18"/>
+          <p:cNvSpPr txBox="1"/>
+          <p:nvPr/>
+        </p:nvSpPr>
+        <p:spPr>
+          <a:xfrm>
+            <a:off x="9217151" y="2404872"/>
+            <a:ext cx="2103120" cy="1901951"/>
+          </a:xfrm>
+          <a:prstGeom prst="rect">
+            <a:avLst/>
+          </a:prstGeom>
+          <a:noFill/>
+        </p:spPr>
+        <p:txBody>
+          <a:bodyPr wrap="square">
+            <a:noAutofit/>
+          </a:bodyPr>
+          <a:lstStyle/>
+          <a:p>
+            <a:r>
+              <a:rPr sz="1200" b="0">
+                <a:solidFill>
+                  <a:srgbClr val="53635B"/>
+                </a:solidFill>
+                <a:latin typeface="Aptos"/>
+              </a:rPr>
+              <a:t>Only the protected update and the agreed counts leave. Nobody outside can rebuild the patient from them.</a:t>
+            </a:r>
+          </a:p>
+        </p:txBody>
+      </p:sp>
+      <p:sp>
+        <p:nvSpPr>
+          <p:cNvPr id="20" name="TextBox 19"/>
+          <p:cNvSpPr txBox="1"/>
+          <p:nvPr/>
+        </p:nvSpPr>
+        <p:spPr>
+          <a:xfrm>
+            <a:off x="914400" y="4800600"/>
+            <a:ext cx="9875520" cy="457200"/>
+          </a:xfrm>
+          <a:prstGeom prst="rect">
+            <a:avLst/>
+          </a:prstGeom>
+          <a:noFill/>
+        </p:spPr>
+        <p:txBody>
+          <a:bodyPr wrap="square">
+            <a:noAutofit/>
+          </a:bodyPr>
+          <a:lstStyle/>
+          <a:p>
+            <a:r>
+              <a:rPr sz="1200" b="1">
+                <a:solidFill>
+                  <a:srgbClr val="15201B"/>
+                </a:solidFill>
+                <a:latin typeface="Aptos"/>
+              </a:rPr>
+              <a:t>The record never moves. The learning does.</a:t>
+            </a:r>
+          </a:p>
+        </p:txBody>
+      </p:sp>
+      <p:sp>
+        <p:nvSpPr>
+          <p:cNvPr id="21" name="TextBox 20"/>
+          <p:cNvSpPr txBox="1"/>
+          <p:nvPr/>
+        </p:nvSpPr>
+        <p:spPr>
+          <a:xfrm>
+            <a:off x="566928" y="6355080"/>
+            <a:ext cx="5669280" cy="274320"/>
+          </a:xfrm>
+          <a:prstGeom prst="rect">
+            <a:avLst/>
+          </a:prstGeom>
+          <a:noFill/>
+        </p:spPr>
+        <p:txBody>
+          <a:bodyPr wrap="square">
+            <a:noAutofit/>
+          </a:bodyPr>
+          <a:lstStyle/>
+          <a:p>
+            <a:r>
+              <a:rPr sz="800" b="0">
+                <a:solidFill>
+                  <a:srgbClr val="53635B"/>
+                </a:solidFill>
+                <a:latin typeface="Aptos"/>
+              </a:rPr>
+              <a:t>One patient through one round / 05</a:t>
+            </a:r>
+          </a:p>
+        </p:txBody>
+      </p:sp>
+    </p:spTree>
+  </p:cSld>
+  <p:clrMapOvr>
+    <a:masterClrMapping/>
+  </p:clrMapOvr>
+</p:sld>
+</file>
+
+<file path=ppt/slides/slide23.xml><?xml version="1.0" encoding="utf-8"?>
+<p:sld xmlns:a="http://schemas.openxmlformats.org/drawingml/2006/main" xmlns:p="http://schemas.openxmlformats.org/presentationml/2006/main" xmlns:r="http://schemas.openxmlformats.org/officeDocument/2006/relationships">
+  <p:cSld>
+    <p:bg>
+      <p:bgPr>
+        <a:solidFill>
+          <a:srgbClr val="F7F3EA"/>
+        </a:solidFill>
+        <a:effectLst/>
+      </p:bgPr>
+    </p:bg>
+    <p:spTree>
+      <p:nvGrpSpPr>
+        <p:cNvPr id="1" name=""/>
+        <p:cNvGrpSpPr/>
+        <p:nvPr/>
+      </p:nvGrpSpPr>
+      <p:grpSpPr/>
+      <p:sp>
+        <p:nvSpPr>
+          <p:cNvPr id="2" name="TextBox 1"/>
+          <p:cNvSpPr txBox="1"/>
+          <p:nvPr/>
+        </p:nvSpPr>
+        <p:spPr>
+          <a:xfrm>
+            <a:off x="548640" y="320040"/>
+            <a:ext cx="2377440" cy="292608"/>
+          </a:xfrm>
+          <a:prstGeom prst="rect">
+            <a:avLst/>
+          </a:prstGeom>
+          <a:noFill/>
+        </p:spPr>
+        <p:txBody>
+          <a:bodyPr wrap="square">
+            <a:noAutofit/>
+          </a:bodyPr>
+          <a:lstStyle/>
+          <a:p>
+            <a:r>
+              <a:rPr sz="1300" b="1">
+                <a:solidFill>
+                  <a:srgbClr val="53635B"/>
+                </a:solidFill>
+                <a:latin typeface="Aptos"/>
+              </a:rPr>
+              <a:t>DATA BOUNDARY</a:t>
+            </a:r>
+          </a:p>
+        </p:txBody>
+      </p:sp>
+      <p:sp>
+        <p:nvSpPr>
+          <p:cNvPr id="3" name="TextBox 2"/>
+          <p:cNvSpPr txBox="1"/>
+          <p:nvPr/>
+        </p:nvSpPr>
+        <p:spPr>
+          <a:xfrm>
+            <a:off x="548640" y="658368"/>
+            <a:ext cx="10424160" cy="594360"/>
+          </a:xfrm>
+          <a:prstGeom prst="rect">
+            <a:avLst/>
+          </a:prstGeom>
+          <a:noFill/>
+        </p:spPr>
+        <p:txBody>
+          <a:bodyPr wrap="square">
+            <a:noAutofit/>
+          </a:bodyPr>
+          <a:lstStyle/>
+          <a:p>
+            <a:r>
+              <a:rPr sz="2900" b="1">
+                <a:solidFill>
+                  <a:srgbClr val="15201B"/>
+                </a:solidFill>
+                <a:latin typeface="Aptos"/>
+              </a:rPr>
+              <a:t>Exactly what crosses the hospital boundary.</a:t>
+            </a:r>
+          </a:p>
+        </p:txBody>
+      </p:sp>
+      <p:sp>
+        <p:nvSpPr>
+          <p:cNvPr id="4" name="TextBox 3"/>
+          <p:cNvSpPr txBox="1"/>
+          <p:nvPr/>
+        </p:nvSpPr>
+        <p:spPr>
+          <a:xfrm>
+            <a:off x="566928" y="1225296"/>
+            <a:ext cx="9784080" cy="521207"/>
+          </a:xfrm>
+          <a:prstGeom prst="rect">
+            <a:avLst/>
+          </a:prstGeom>
+          <a:noFill/>
+        </p:spPr>
+        <p:txBody>
+          <a:bodyPr wrap="square">
+            <a:noAutofit/>
+          </a:bodyPr>
+          <a:lstStyle/>
+          <a:p>
+            <a:r>
+              <a:rPr sz="1400" b="0">
+                <a:solidFill>
+                  <a:srgbClr val="53635B"/>
+                </a:solidFill>
+                <a:latin typeface="Aptos"/>
+              </a:rPr>
+              <a:t>If you can name every field that leaves, you can govern it. This is the whole list.</a:t>
+            </a:r>
+          </a:p>
+        </p:txBody>
+      </p:sp>
+      <p:sp>
+        <p:nvSpPr>
+          <p:cNvPr id="5" name="Rounded Rectangle 4"/>
+          <p:cNvSpPr/>
+          <p:nvPr/>
+        </p:nvSpPr>
+        <p:spPr>
+          <a:xfrm>
+            <a:off x="777240" y="1737360"/>
+            <a:ext cx="4892040" cy="2788920"/>
+          </a:xfrm>
+          <a:prstGeom prst="roundRect">
+            <a:avLst/>
+          </a:prstGeom>
+          <a:solidFill>
+            <a:srgbClr val="DCEBE1"/>
+          </a:solidFill>
+          <a:ln w="12700">
+            <a:solidFill>
+              <a:srgbClr val="B9C2BB"/>
+            </a:solidFill>
+          </a:ln>
+          <a:effectLst/>
+        </p:spPr>
+        <p:style>
+          <a:lnRef idx="1">
+            <a:schemeClr val="accent1"/>
+          </a:lnRef>
+          <a:fillRef idx="3">
+            <a:schemeClr val="accent1"/>
+          </a:fillRef>
+          <a:effectRef idx="2">
+            <a:schemeClr val="accent1"/>
+          </a:effectRef>
+          <a:fontRef idx="minor">
+            <a:schemeClr val="lt1"/>
+          </a:fontRef>
+        </p:style>
+        <p:txBody>
+          <a:bodyPr rtlCol="0" anchor="ctr"/>
+          <a:lstStyle/>
+          <a:p/>
+        </p:txBody>
+      </p:sp>
+      <p:sp>
+        <p:nvSpPr>
+          <p:cNvPr id="6" name="TextBox 5"/>
+          <p:cNvSpPr txBox="1"/>
+          <p:nvPr/>
+        </p:nvSpPr>
+        <p:spPr>
+          <a:xfrm>
+            <a:off x="941832" y="1883664"/>
+            <a:ext cx="4572000" cy="320040"/>
+          </a:xfrm>
+          <a:prstGeom prst="rect">
+            <a:avLst/>
+          </a:prstGeom>
+          <a:noFill/>
+        </p:spPr>
+        <p:txBody>
+          <a:bodyPr wrap="square">
+            <a:noAutofit/>
+          </a:bodyPr>
+          <a:lstStyle/>
+          <a:p>
+            <a:r>
+              <a:rPr sz="1500" b="1">
+                <a:solidFill>
+                  <a:srgbClr val="15201B"/>
+                </a:solidFill>
+                <a:latin typeface="Aptos"/>
+              </a:rPr>
+              <a:t>LEAVES THE HOSPITAL</a:t>
+            </a:r>
+          </a:p>
+        </p:txBody>
+      </p:sp>
+      <p:sp>
+        <p:nvSpPr>
+          <p:cNvPr id="7" name="TextBox 6"/>
+          <p:cNvSpPr txBox="1"/>
+          <p:nvPr/>
+        </p:nvSpPr>
+        <p:spPr>
+          <a:xfrm>
+            <a:off x="941832" y="2267712"/>
+            <a:ext cx="4572000" cy="2130551"/>
+          </a:xfrm>
+          <a:prstGeom prst="rect">
+            <a:avLst/>
+          </a:prstGeom>
+          <a:noFill/>
+        </p:spPr>
+        <p:txBody>
+          <a:bodyPr wrap="square">
+            <a:noAutofit/>
+          </a:bodyPr>
+          <a:lstStyle/>
+          <a:p>
+            <a:r>
+              <a:rPr sz="1200" b="0">
+                <a:solidFill>
+                  <a:srgbClr val="53635B"/>
+                </a:solidFill>
+                <a:latin typeface="Aptos"/>
+              </a:rPr>
+              <a:t>•  The protected model update
+•  Counts and scores that were agreed in advance
+•  Round number, model version, and status
+•  A pointer to evidence that stays at the hospital</a:t>
+            </a:r>
+          </a:p>
+        </p:txBody>
+      </p:sp>
+      <p:sp>
+        <p:nvSpPr>
+          <p:cNvPr id="8" name="Rounded Rectangle 7"/>
+          <p:cNvSpPr/>
+          <p:nvPr/>
+        </p:nvSpPr>
+        <p:spPr>
+          <a:xfrm>
+            <a:off x="6217920" y="1737360"/>
+            <a:ext cx="4892040" cy="2788920"/>
+          </a:xfrm>
+          <a:prstGeom prst="roundRect">
+            <a:avLst/>
+          </a:prstGeom>
+          <a:solidFill>
+            <a:srgbClr val="F4E8D0"/>
+          </a:solidFill>
+          <a:ln w="12700">
+            <a:solidFill>
+              <a:srgbClr val="B9C2BB"/>
+            </a:solidFill>
+          </a:ln>
+          <a:effectLst/>
+        </p:spPr>
+        <p:style>
+          <a:lnRef idx="1">
+            <a:schemeClr val="accent1"/>
+          </a:lnRef>
+          <a:fillRef idx="3">
+            <a:schemeClr val="accent1"/>
+          </a:fillRef>
+          <a:effectRef idx="2">
+            <a:schemeClr val="accent1"/>
+          </a:effectRef>
+          <a:fontRef idx="minor">
+            <a:schemeClr val="lt1"/>
+          </a:fontRef>
+        </p:style>
+        <p:txBody>
+          <a:bodyPr rtlCol="0" anchor="ctr"/>
+          <a:lstStyle/>
+          <a:p/>
+        </p:txBody>
+      </p:sp>
+      <p:sp>
+        <p:nvSpPr>
+          <p:cNvPr id="9" name="TextBox 8"/>
+          <p:cNvSpPr txBox="1"/>
+          <p:nvPr/>
+        </p:nvSpPr>
+        <p:spPr>
+          <a:xfrm>
+            <a:off x="6382512" y="1883664"/>
+            <a:ext cx="4572000" cy="320040"/>
+          </a:xfrm>
+          <a:prstGeom prst="rect">
+            <a:avLst/>
+          </a:prstGeom>
+          <a:noFill/>
+        </p:spPr>
+        <p:txBody>
+          <a:bodyPr wrap="square">
+            <a:noAutofit/>
+          </a:bodyPr>
+          <a:lstStyle/>
+          <a:p>
+            <a:r>
+              <a:rPr sz="1500" b="1">
+                <a:solidFill>
+                  <a:srgbClr val="15201B"/>
+                </a:solidFill>
+                <a:latin typeface="Aptos"/>
+              </a:rPr>
+              <a:t>NEVER LEAVES</a:t>
+            </a:r>
+          </a:p>
+        </p:txBody>
+      </p:sp>
+      <p:sp>
+        <p:nvSpPr>
+          <p:cNvPr id="10" name="TextBox 9"/>
+          <p:cNvSpPr txBox="1"/>
+          <p:nvPr/>
+        </p:nvSpPr>
+        <p:spPr>
+          <a:xfrm>
+            <a:off x="6382512" y="2267712"/>
+            <a:ext cx="4572000" cy="2130551"/>
+          </a:xfrm>
+          <a:prstGeom prst="rect">
+            <a:avLst/>
+          </a:prstGeom>
+          <a:noFill/>
+        </p:spPr>
+        <p:txBody>
+          <a:bodyPr wrap="square">
+            <a:noAutofit/>
+          </a:bodyPr>
+          <a:lstStyle/>
+          <a:p>
+            <a:r>
+              <a:rPr sz="1200" b="0">
+                <a:solidFill>
+                  <a:srgbClr val="53635B"/>
+                </a:solidFill>
+                <a:latin typeface="Aptos"/>
+              </a:rPr>
+              <a:t>•  Patient rows
+•  Names, identifiers, and dates of birth
+•  Results for any single patient
+•  Notes and images
+•  Anything not written into the contract</a:t>
+            </a:r>
+          </a:p>
+        </p:txBody>
+      </p:sp>
+      <p:sp>
+        <p:nvSpPr>
+          <p:cNvPr id="11" name="TextBox 10"/>
+          <p:cNvSpPr txBox="1"/>
+          <p:nvPr/>
+        </p:nvSpPr>
+        <p:spPr>
+          <a:xfrm>
+            <a:off x="914400" y="4846320"/>
+            <a:ext cx="9875520" cy="457200"/>
+          </a:xfrm>
+          <a:prstGeom prst="rect">
+            <a:avLst/>
+          </a:prstGeom>
+          <a:noFill/>
+        </p:spPr>
+        <p:txBody>
+          <a:bodyPr wrap="square">
+            <a:noAutofit/>
+          </a:bodyPr>
+          <a:lstStyle/>
+          <a:p>
+            <a:r>
+              <a:rPr sz="1200" b="1">
+                <a:solidFill>
+                  <a:srgbClr val="15201B"/>
+                </a:solidFill>
+                <a:latin typeface="Aptos"/>
+              </a:rPr>
+              <a:t>“We only send weights” is a claim. A named list plus a check that blocks everything else is a control.</a:t>
+            </a:r>
+          </a:p>
+        </p:txBody>
+      </p:sp>
+      <p:sp>
+        <p:nvSpPr>
+          <p:cNvPr id="12" name="TextBox 11"/>
+          <p:cNvSpPr txBox="1"/>
+          <p:nvPr/>
+        </p:nvSpPr>
+        <p:spPr>
+          <a:xfrm>
+            <a:off x="566928" y="6355080"/>
+            <a:ext cx="5669280" cy="274320"/>
+          </a:xfrm>
+          <a:prstGeom prst="rect">
+            <a:avLst/>
+          </a:prstGeom>
+          <a:noFill/>
+        </p:spPr>
+        <p:txBody>
+          <a:bodyPr wrap="square">
+            <a:noAutofit/>
+          </a:bodyPr>
+          <a:lstStyle/>
+          <a:p>
+            <a:r>
+              <a:rPr sz="800" b="0">
+                <a:solidFill>
+                  <a:srgbClr val="53635B"/>
+                </a:solidFill>
+                <a:latin typeface="Aptos"/>
+              </a:rPr>
+              <a:t>Egress contract / 06</a:t>
+            </a:r>
+          </a:p>
+        </p:txBody>
+      </p:sp>
+    </p:spTree>
+  </p:cSld>
+  <p:clrMapOvr>
+    <a:masterClrMapping/>
+  </p:clrMapOvr>
+</p:sld>
+</file>
+
+<file path=ppt/slides/slide24.xml><?xml version="1.0" encoding="utf-8"?>
+<p:sld xmlns:a="http://schemas.openxmlformats.org/drawingml/2006/main" xmlns:p="http://schemas.openxmlformats.org/presentationml/2006/main" xmlns:r="http://schemas.openxmlformats.org/officeDocument/2006/relationships">
+  <p:cSld>
+    <p:bg>
+      <p:bgPr>
+        <a:solidFill>
+          <a:srgbClr val="F7F3EA"/>
+        </a:solidFill>
+        <a:effectLst/>
+      </p:bgPr>
+    </p:bg>
+    <p:spTree>
+      <p:nvGrpSpPr>
+        <p:cNvPr id="1" name=""/>
+        <p:cNvGrpSpPr/>
+        <p:nvPr/>
+      </p:nvGrpSpPr>
+      <p:grpSpPr/>
+      <p:sp>
+        <p:nvSpPr>
+          <p:cNvPr id="2" name="TextBox 1"/>
+          <p:cNvSpPr txBox="1"/>
+          <p:nvPr/>
+        </p:nvSpPr>
+        <p:spPr>
+          <a:xfrm>
+            <a:off x="548640" y="320040"/>
+            <a:ext cx="2377440" cy="292608"/>
+          </a:xfrm>
+          <a:prstGeom prst="rect">
+            <a:avLst/>
+          </a:prstGeom>
+          <a:noFill/>
+        </p:spPr>
+        <p:txBody>
+          <a:bodyPr wrap="square">
+            <a:noAutofit/>
+          </a:bodyPr>
+          <a:lstStyle/>
+          <a:p>
+            <a:r>
+              <a:rPr sz="1300" b="1">
+                <a:solidFill>
+                  <a:srgbClr val="53635B"/>
+                </a:solidFill>
+                <a:latin typeface="Aptos"/>
+              </a:rPr>
+              <a:t>GRAILS</a:t>
+            </a:r>
+          </a:p>
+        </p:txBody>
+      </p:sp>
+      <p:sp>
+        <p:nvSpPr>
+          <p:cNvPr id="3" name="TextBox 2"/>
+          <p:cNvSpPr txBox="1"/>
+          <p:nvPr/>
+        </p:nvSpPr>
+        <p:spPr>
+          <a:xfrm>
+            <a:off x="548640" y="658368"/>
+            <a:ext cx="10424160" cy="594360"/>
+          </a:xfrm>
+          <a:prstGeom prst="rect">
+            <a:avLst/>
+          </a:prstGeom>
+          <a:noFill/>
+        </p:spPr>
+        <p:txBody>
+          <a:bodyPr wrap="square">
+            <a:noAutofit/>
+          </a:bodyPr>
+          <a:lstStyle/>
+          <a:p>
+            <a:r>
+              <a:rPr sz="2900" b="1">
+                <a:solidFill>
+                  <a:srgbClr val="15201B"/>
+                </a:solidFill>
+                <a:latin typeface="Aptos"/>
+              </a:rPr>
+              <a:t>A published way to decide who may see what.</a:t>
+            </a:r>
+          </a:p>
+        </p:txBody>
+      </p:sp>
+      <p:sp>
+        <p:nvSpPr>
+          <p:cNvPr id="4" name="TextBox 3"/>
+          <p:cNvSpPr txBox="1"/>
+          <p:nvPr/>
+        </p:nvSpPr>
+        <p:spPr>
+          <a:xfrm>
+            <a:off x="566928" y="1225296"/>
+            <a:ext cx="9784080" cy="521207"/>
+          </a:xfrm>
+          <a:prstGeom prst="rect">
+            <a:avLst/>
+          </a:prstGeom>
+          <a:noFill/>
+        </p:spPr>
+        <p:txBody>
+          <a:bodyPr wrap="square">
+            <a:noAutofit/>
+          </a:bodyPr>
+          <a:lstStyle/>
+          <a:p>
+            <a:r>
+              <a:rPr sz="1400" b="0">
+                <a:solidFill>
+                  <a:srgbClr val="53635B"/>
+                </a:solidFill>
+                <a:latin typeface="Aptos"/>
+              </a:rPr>
+              <a:t>GRAILS keeps the ethics rules out of the normal application code, so they can be changed without rewriting the app.</a:t>
+            </a:r>
+          </a:p>
+        </p:txBody>
+      </p:sp>
+      <p:sp>
+        <p:nvSpPr>
+          <p:cNvPr id="5" name="Rounded Rectangle 4"/>
+          <p:cNvSpPr/>
+          <p:nvPr/>
+        </p:nvSpPr>
+        <p:spPr>
+          <a:xfrm>
+            <a:off x="777240" y="1737360"/>
+            <a:ext cx="4892040" cy="1143000"/>
+          </a:xfrm>
+          <a:prstGeom prst="roundRect">
+            <a:avLst/>
+          </a:prstGeom>
+          <a:solidFill>
+            <a:srgbClr val="DCEBE1"/>
+          </a:solidFill>
+          <a:ln w="12700">
+            <a:solidFill>
+              <a:srgbClr val="B9C2BB"/>
+            </a:solidFill>
+          </a:ln>
+          <a:effectLst/>
+        </p:spPr>
+        <p:style>
+          <a:lnRef idx="1">
+            <a:schemeClr val="accent1"/>
+          </a:lnRef>
+          <a:fillRef idx="3">
+            <a:schemeClr val="accent1"/>
+          </a:fillRef>
+          <a:effectRef idx="2">
+            <a:schemeClr val="accent1"/>
+          </a:effectRef>
+          <a:fontRef idx="minor">
+            <a:schemeClr val="lt1"/>
+          </a:fontRef>
+        </p:style>
+        <p:txBody>
+          <a:bodyPr rtlCol="0" anchor="ctr"/>
+          <a:lstStyle/>
+          <a:p/>
+        </p:txBody>
+      </p:sp>
+      <p:sp>
+        <p:nvSpPr>
+          <p:cNvPr id="6" name="TextBox 5"/>
+          <p:cNvSpPr txBox="1"/>
+          <p:nvPr/>
+        </p:nvSpPr>
+        <p:spPr>
+          <a:xfrm>
+            <a:off x="941832" y="1883664"/>
+            <a:ext cx="4572000" cy="320040"/>
+          </a:xfrm>
+          <a:prstGeom prst="rect">
+            <a:avLst/>
+          </a:prstGeom>
+          <a:noFill/>
+        </p:spPr>
+        <p:txBody>
+          <a:bodyPr wrap="square">
+            <a:noAutofit/>
+          </a:bodyPr>
+          <a:lstStyle/>
+          <a:p>
+            <a:r>
+              <a:rPr sz="1500" b="1">
+                <a:solidFill>
+                  <a:srgbClr val="15201B"/>
+                </a:solidFill>
+                <a:latin typeface="Aptos"/>
+              </a:rPr>
+              <a:t>Two parts</a:t>
+            </a:r>
+          </a:p>
+        </p:txBody>
+      </p:sp>
+      <p:sp>
+        <p:nvSpPr>
+          <p:cNvPr id="7" name="TextBox 6"/>
+          <p:cNvSpPr txBox="1"/>
+          <p:nvPr/>
+        </p:nvSpPr>
+        <p:spPr>
+          <a:xfrm>
+            <a:off x="941832" y="2267712"/>
+            <a:ext cx="4572000" cy="484631"/>
+          </a:xfrm>
+          <a:prstGeom prst="rect">
+            <a:avLst/>
+          </a:prstGeom>
+          <a:noFill/>
+        </p:spPr>
+        <p:txBody>
+          <a:bodyPr wrap="square">
+            <a:noAutofit/>
+          </a:bodyPr>
+          <a:lstStyle/>
+          <a:p>
+            <a:r>
+              <a:rPr sz="1200" b="0">
+                <a:solidFill>
+                  <a:srgbClr val="53635B"/>
+                </a:solidFill>
+                <a:latin typeface="Aptos"/>
+              </a:rPr>
+              <a:t>The Rails work out what protection is needed. The Guard applies it. Deciding and enforcing stay separate.</a:t>
+            </a:r>
+          </a:p>
+        </p:txBody>
+      </p:sp>
+      <p:sp>
+        <p:nvSpPr>
+          <p:cNvPr id="8" name="Rounded Rectangle 7"/>
+          <p:cNvSpPr/>
+          <p:nvPr/>
+        </p:nvSpPr>
+        <p:spPr>
+          <a:xfrm>
+            <a:off x="6217920" y="1737360"/>
+            <a:ext cx="4892040" cy="1143000"/>
+          </a:xfrm>
+          <a:prstGeom prst="roundRect">
+            <a:avLst/>
+          </a:prstGeom>
+          <a:solidFill>
+            <a:srgbClr val="DCE7F1"/>
+          </a:solidFill>
+          <a:ln w="12700">
+            <a:solidFill>
+              <a:srgbClr val="B9C2BB"/>
+            </a:solidFill>
+          </a:ln>
+          <a:effectLst/>
+        </p:spPr>
+        <p:style>
+          <a:lnRef idx="1">
+            <a:schemeClr val="accent1"/>
+          </a:lnRef>
+          <a:fillRef idx="3">
+            <a:schemeClr val="accent1"/>
+          </a:fillRef>
+          <a:effectRef idx="2">
+            <a:schemeClr val="accent1"/>
+          </a:effectRef>
+          <a:fontRef idx="minor">
+            <a:schemeClr val="lt1"/>
+          </a:fontRef>
+        </p:style>
+        <p:txBody>
+          <a:bodyPr rtlCol="0" anchor="ctr"/>
+          <a:lstStyle/>
+          <a:p/>
+        </p:txBody>
+      </p:sp>
+      <p:sp>
+        <p:nvSpPr>
+          <p:cNvPr id="9" name="TextBox 8"/>
+          <p:cNvSpPr txBox="1"/>
+          <p:nvPr/>
+        </p:nvSpPr>
+        <p:spPr>
+          <a:xfrm>
+            <a:off x="6382512" y="1883664"/>
+            <a:ext cx="4572000" cy="320040"/>
+          </a:xfrm>
+          <a:prstGeom prst="rect">
+            <a:avLst/>
+          </a:prstGeom>
+          <a:noFill/>
+        </p:spPr>
+        <p:txBody>
+          <a:bodyPr wrap="square">
+            <a:noAutofit/>
+          </a:bodyPr>
+          <a:lstStyle/>
+          <a:p>
+            <a:r>
+              <a:rPr sz="1500" b="1">
+                <a:solidFill>
+                  <a:srgbClr val="15201B"/>
+                </a:solidFill>
+                <a:latin typeface="Aptos"/>
+              </a:rPr>
+              <a:t>Three questions</a:t>
+            </a:r>
+          </a:p>
+        </p:txBody>
+      </p:sp>
+      <p:sp>
+        <p:nvSpPr>
+          <p:cNvPr id="10" name="TextBox 9"/>
+          <p:cNvSpPr txBox="1"/>
+          <p:nvPr/>
+        </p:nvSpPr>
+        <p:spPr>
+          <a:xfrm>
+            <a:off x="6382512" y="2267712"/>
+            <a:ext cx="4572000" cy="484631"/>
+          </a:xfrm>
+          <a:prstGeom prst="rect">
+            <a:avLst/>
+          </a:prstGeom>
+          <a:noFill/>
+        </p:spPr>
+        <p:txBody>
+          <a:bodyPr wrap="square">
+            <a:noAutofit/>
+          </a:bodyPr>
+          <a:lstStyle/>
+          <a:p>
+            <a:r>
+              <a:rPr sz="1200" b="0">
+                <a:solidFill>
+                  <a:srgbClr val="53635B"/>
+                </a:solidFill>
+                <a:latin typeface="Aptos"/>
+              </a:rPr>
+              <a:t>How sensitive is the data? How far do we trust who is asking? How much are they asking for?</a:t>
+            </a:r>
+          </a:p>
+        </p:txBody>
+      </p:sp>
+      <p:sp>
+        <p:nvSpPr>
+          <p:cNvPr id="11" name="Rounded Rectangle 10"/>
+          <p:cNvSpPr/>
+          <p:nvPr/>
+        </p:nvSpPr>
+        <p:spPr>
+          <a:xfrm>
+            <a:off x="777240" y="3383280"/>
+            <a:ext cx="4892040" cy="1143000"/>
+          </a:xfrm>
+          <a:prstGeom prst="roundRect">
+            <a:avLst/>
+          </a:prstGeom>
+          <a:solidFill>
+            <a:srgbClr val="F4E8D0"/>
+          </a:solidFill>
+          <a:ln w="12700">
+            <a:solidFill>
+              <a:srgbClr val="B9C2BB"/>
+            </a:solidFill>
+          </a:ln>
+          <a:effectLst/>
+        </p:spPr>
+        <p:style>
+          <a:lnRef idx="1">
+            <a:schemeClr val="accent1"/>
+          </a:lnRef>
+          <a:fillRef idx="3">
+            <a:schemeClr val="accent1"/>
+          </a:fillRef>
+          <a:effectRef idx="2">
+            <a:schemeClr val="accent1"/>
+          </a:effectRef>
+          <a:fontRef idx="minor">
+            <a:schemeClr val="lt1"/>
+          </a:fontRef>
+        </p:style>
+        <p:txBody>
+          <a:bodyPr rtlCol="0" anchor="ctr"/>
+          <a:lstStyle/>
+          <a:p/>
+        </p:txBody>
+      </p:sp>
+      <p:sp>
+        <p:nvSpPr>
+          <p:cNvPr id="12" name="TextBox 11"/>
+          <p:cNvSpPr txBox="1"/>
+          <p:nvPr/>
+        </p:nvSpPr>
+        <p:spPr>
+          <a:xfrm>
+            <a:off x="941832" y="3529584"/>
+            <a:ext cx="4572000" cy="320040"/>
+          </a:xfrm>
+          <a:prstGeom prst="rect">
+            <a:avLst/>
+          </a:prstGeom>
+          <a:noFill/>
+        </p:spPr>
+        <p:txBody>
+          <a:bodyPr wrap="square">
+            <a:noAutofit/>
+          </a:bodyPr>
+          <a:lstStyle/>
+          <a:p>
+            <a:r>
+              <a:rPr sz="1500" b="1">
+                <a:solidFill>
+                  <a:srgbClr val="15201B"/>
+                </a:solidFill>
+                <a:latin typeface="Aptos"/>
+              </a:rPr>
+              <a:t>Added, not rebuilt</a:t>
+            </a:r>
+          </a:p>
+        </p:txBody>
+      </p:sp>
+      <p:sp>
+        <p:nvSpPr>
+          <p:cNvPr id="13" name="TextBox 12"/>
+          <p:cNvSpPr txBox="1"/>
+          <p:nvPr/>
+        </p:nvSpPr>
+        <p:spPr>
+          <a:xfrm>
+            <a:off x="941832" y="3913632"/>
+            <a:ext cx="4572000" cy="484631"/>
+          </a:xfrm>
+          <a:prstGeom prst="rect">
+            <a:avLst/>
+          </a:prstGeom>
+          <a:noFill/>
+        </p:spPr>
+        <p:txBody>
+          <a:bodyPr wrap="square">
+            <a:noAutofit/>
+          </a:bodyPr>
+          <a:lstStyle/>
+          <a:p>
+            <a:r>
+              <a:rPr sz="1200" b="0">
+                <a:solidFill>
+                  <a:srgbClr val="53635B"/>
+                </a:solidFill>
+                <a:latin typeface="Aptos"/>
+              </a:rPr>
+              <a:t>It is designed to plug into software that already exists. You do not redesign the app to add ethics to it.</a:t>
+            </a:r>
+          </a:p>
+        </p:txBody>
+      </p:sp>
+      <p:sp>
+        <p:nvSpPr>
+          <p:cNvPr id="14" name="Rounded Rectangle 13"/>
+          <p:cNvSpPr/>
+          <p:nvPr/>
+        </p:nvSpPr>
+        <p:spPr>
+          <a:xfrm>
+            <a:off x="6217920" y="3383280"/>
+            <a:ext cx="4892040" cy="1143000"/>
+          </a:xfrm>
+          <a:prstGeom prst="roundRect">
+            <a:avLst/>
+          </a:prstGeom>
+          <a:solidFill>
+            <a:srgbClr val="E9E1FA"/>
+          </a:solidFill>
+          <a:ln w="12700">
+            <a:solidFill>
+              <a:srgbClr val="B9C2BB"/>
+            </a:solidFill>
+          </a:ln>
+          <a:effectLst/>
+        </p:spPr>
+        <p:style>
+          <a:lnRef idx="1">
+            <a:schemeClr val="accent1"/>
+          </a:lnRef>
+          <a:fillRef idx="3">
+            <a:schemeClr val="accent1"/>
+          </a:fillRef>
+          <a:effectRef idx="2">
+            <a:schemeClr val="accent1"/>
+          </a:effectRef>
+          <a:fontRef idx="minor">
+            <a:schemeClr val="lt1"/>
+          </a:fontRef>
+        </p:style>
+        <p:txBody>
+          <a:bodyPr rtlCol="0" anchor="ctr"/>
+          <a:lstStyle/>
+          <a:p/>
+        </p:txBody>
+      </p:sp>
+      <p:sp>
+        <p:nvSpPr>
+          <p:cNvPr id="15" name="TextBox 14"/>
+          <p:cNvSpPr txBox="1"/>
+          <p:nvPr/>
+        </p:nvSpPr>
+        <p:spPr>
+          <a:xfrm>
+            <a:off x="6382512" y="3529584"/>
+            <a:ext cx="4572000" cy="320040"/>
+          </a:xfrm>
+          <a:prstGeom prst="rect">
+            <a:avLst/>
+          </a:prstGeom>
+          <a:noFill/>
+        </p:spPr>
+        <p:txBody>
+          <a:bodyPr wrap="square">
+            <a:noAutofit/>
+          </a:bodyPr>
+          <a:lstStyle/>
+          <a:p>
+            <a:r>
+              <a:rPr sz="1500" b="1">
+                <a:solidFill>
+                  <a:srgbClr val="15201B"/>
+                </a:solidFill>
+                <a:latin typeface="Aptos"/>
+              </a:rPr>
+              <a:t>Wider than privacy</a:t>
+            </a:r>
+          </a:p>
+        </p:txBody>
+      </p:sp>
+      <p:sp>
+        <p:nvSpPr>
+          <p:cNvPr id="16" name="TextBox 15"/>
+          <p:cNvSpPr txBox="1"/>
+          <p:nvPr/>
+        </p:nvSpPr>
+        <p:spPr>
+          <a:xfrm>
+            <a:off x="6382512" y="3913632"/>
+            <a:ext cx="4572000" cy="484631"/>
+          </a:xfrm>
+          <a:prstGeom prst="rect">
+            <a:avLst/>
+          </a:prstGeom>
+          <a:noFill/>
+        </p:spPr>
+        <p:txBody>
+          <a:bodyPr wrap="square">
+            <a:noAutofit/>
+          </a:bodyPr>
+          <a:lstStyle/>
+          <a:p>
+            <a:r>
+              <a:rPr sz="1200" b="0">
+                <a:solidFill>
+                  <a:srgbClr val="53635B"/>
+                </a:solidFill>
+                <a:latin typeface="Aptos"/>
+              </a:rPr>
+              <a:t>Privacy is the worked example in the paper. The same shape is meant to extend to fairness, transparency, and security.</a:t>
+            </a:r>
+          </a:p>
+        </p:txBody>
+      </p:sp>
+      <p:sp>
+        <p:nvSpPr>
+          <p:cNvPr id="17" name="TextBox 16"/>
+          <p:cNvSpPr txBox="1"/>
+          <p:nvPr/>
+        </p:nvSpPr>
+        <p:spPr>
+          <a:xfrm>
+            <a:off x="914400" y="4983480"/>
+            <a:ext cx="9875520" cy="457200"/>
+          </a:xfrm>
+          <a:prstGeom prst="rect">
+            <a:avLst/>
+          </a:prstGeom>
+          <a:noFill/>
+        </p:spPr>
+        <p:txBody>
+          <a:bodyPr wrap="square">
+            <a:noAutofit/>
+          </a:bodyPr>
+          <a:lstStyle/>
+          <a:p>
+            <a:r>
+              <a:rPr sz="1200" b="1">
+                <a:solidFill>
+                  <a:srgbClr val="15201B"/>
+                </a:solidFill>
+                <a:latin typeface="Aptos"/>
+              </a:rPr>
+              <a:t>Access rules based on roles alone cannot express “this person, this field, this purpose, today”. GRAILS can.</a:t>
+            </a:r>
+          </a:p>
+        </p:txBody>
+      </p:sp>
+      <p:sp>
+        <p:nvSpPr>
+          <p:cNvPr id="18" name="TextBox 17"/>
+          <p:cNvSpPr txBox="1"/>
+          <p:nvPr/>
+        </p:nvSpPr>
+        <p:spPr>
+          <a:xfrm>
+            <a:off x="566928" y="6355080"/>
+            <a:ext cx="5669280" cy="274320"/>
+          </a:xfrm>
+          <a:prstGeom prst="rect">
+            <a:avLst/>
+          </a:prstGeom>
+          <a:noFill/>
+        </p:spPr>
+        <p:txBody>
+          <a:bodyPr wrap="square">
+            <a:noAutofit/>
+          </a:bodyPr>
+          <a:lstStyle/>
+          <a:p>
+            <a:r>
+              <a:rPr sz="800" b="0">
+                <a:solidFill>
+                  <a:srgbClr val="53635B"/>
+                </a:solidFill>
+                <a:latin typeface="Aptos"/>
+              </a:rPr>
+              <a:t>Kulkarni &amp; Ramanathan, AIES 2025, IIIT Bangalore / 19</a:t>
+            </a:r>
+          </a:p>
+        </p:txBody>
+      </p:sp>
+    </p:spTree>
+  </p:cSld>
+  <p:clrMapOvr>
+    <a:masterClrMapping/>
+  </p:clrMapOvr>
+</p:sld>
+</file>
+
+<file path=ppt/slides/slide25.xml><?xml version="1.0" encoding="utf-8"?>
+<p:sld xmlns:a="http://schemas.openxmlformats.org/drawingml/2006/main" xmlns:p="http://schemas.openxmlformats.org/presentationml/2006/main" xmlns:r="http://schemas.openxmlformats.org/officeDocument/2006/relationships">
+  <p:cSld>
+    <p:bg>
+      <p:bgPr>
+        <a:solidFill>
+          <a:srgbClr val="F7F3EA"/>
+        </a:solidFill>
+        <a:effectLst/>
+      </p:bgPr>
+    </p:bg>
+    <p:spTree>
+      <p:nvGrpSpPr>
+        <p:cNvPr id="1" name=""/>
+        <p:cNvGrpSpPr/>
+        <p:nvPr/>
+      </p:nvGrpSpPr>
+      <p:grpSpPr/>
+      <p:sp>
+        <p:nvSpPr>
+          <p:cNvPr id="2" name="TextBox 1"/>
+          <p:cNvSpPr txBox="1"/>
+          <p:nvPr/>
+        </p:nvSpPr>
+        <p:spPr>
+          <a:xfrm>
+            <a:off x="548640" y="320040"/>
+            <a:ext cx="2377440" cy="292608"/>
+          </a:xfrm>
+          <a:prstGeom prst="rect">
+            <a:avLst/>
+          </a:prstGeom>
+          <a:noFill/>
+        </p:spPr>
+        <p:txBody>
+          <a:bodyPr wrap="square">
+            <a:noAutofit/>
+          </a:bodyPr>
+          <a:lstStyle/>
+          <a:p>
+            <a:r>
+              <a:rPr sz="1300" b="1">
+                <a:solidFill>
+                  <a:srgbClr val="53635B"/>
+                </a:solidFill>
+                <a:latin typeface="Aptos"/>
+              </a:rPr>
+              <a:t>GRAILS</a:t>
+            </a:r>
+          </a:p>
+        </p:txBody>
+      </p:sp>
+      <p:sp>
+        <p:nvSpPr>
+          <p:cNvPr id="3" name="TextBox 2"/>
+          <p:cNvSpPr txBox="1"/>
+          <p:nvPr/>
+        </p:nvSpPr>
+        <p:spPr>
+          <a:xfrm>
+            <a:off x="548640" y="658368"/>
+            <a:ext cx="10424160" cy="594360"/>
+          </a:xfrm>
+          <a:prstGeom prst="rect">
+            <a:avLst/>
+          </a:prstGeom>
+          <a:noFill/>
+        </p:spPr>
+        <p:txBody>
+          <a:bodyPr wrap="square">
+            <a:noAutofit/>
+          </a:bodyPr>
+          <a:lstStyle/>
+          <a:p>
+            <a:r>
+              <a:rPr sz="2900" b="1">
+                <a:solidFill>
+                  <a:srgbClr val="15201B"/>
+                </a:solidFill>
+                <a:latin typeface="Aptos"/>
+              </a:rPr>
+              <a:t>Three dials decide the answer.</a:t>
+            </a:r>
+          </a:p>
+        </p:txBody>
+      </p:sp>
+      <p:sp>
+        <p:nvSpPr>
+          <p:cNvPr id="4" name="TextBox 3"/>
+          <p:cNvSpPr txBox="1"/>
+          <p:nvPr/>
+        </p:nvSpPr>
+        <p:spPr>
+          <a:xfrm>
+            <a:off x="566928" y="1225296"/>
+            <a:ext cx="9784080" cy="521207"/>
+          </a:xfrm>
+          <a:prstGeom prst="rect">
+            <a:avLst/>
+          </a:prstGeom>
+          <a:noFill/>
+        </p:spPr>
+        <p:txBody>
+          <a:bodyPr wrap="square">
+            <a:noAutofit/>
+          </a:bodyPr>
+          <a:lstStyle/>
+          <a:p>
+            <a:r>
+              <a:rPr sz="1400" b="0">
+                <a:solidFill>
+                  <a:srgbClr val="53635B"/>
+                </a:solidFill>
+                <a:latin typeface="Aptos"/>
+              </a:rPr>
+              <a:t>The same request can get a different answer, depending on where the three dials sit.</a:t>
+            </a:r>
+          </a:p>
+        </p:txBody>
+      </p:sp>
+      <p:sp>
+        <p:nvSpPr>
+          <p:cNvPr id="5" name="Rounded Rectangle 4"/>
+          <p:cNvSpPr/>
+          <p:nvPr/>
+        </p:nvSpPr>
+        <p:spPr>
+          <a:xfrm>
+            <a:off x="777240" y="1874519"/>
+            <a:ext cx="3246120" cy="2651760"/>
+          </a:xfrm>
+          <a:prstGeom prst="roundRect">
+            <a:avLst/>
+          </a:prstGeom>
+          <a:solidFill>
+            <a:srgbClr val="DCEBE1"/>
+          </a:solidFill>
+          <a:ln w="12700">
+            <a:solidFill>
+              <a:srgbClr val="B9C2BB"/>
+            </a:solidFill>
+          </a:ln>
+          <a:effectLst/>
+        </p:spPr>
+        <p:style>
+          <a:lnRef idx="1">
+            <a:schemeClr val="accent1"/>
+          </a:lnRef>
+          <a:fillRef idx="3">
+            <a:schemeClr val="accent1"/>
+          </a:fillRef>
+          <a:effectRef idx="2">
+            <a:schemeClr val="accent1"/>
+          </a:effectRef>
+          <a:fontRef idx="minor">
+            <a:schemeClr val="lt1"/>
+          </a:fontRef>
+        </p:style>
+        <p:txBody>
+          <a:bodyPr rtlCol="0" anchor="ctr"/>
+          <a:lstStyle/>
+          <a:p/>
+        </p:txBody>
+      </p:sp>
+      <p:sp>
+        <p:nvSpPr>
+          <p:cNvPr id="6" name="TextBox 5"/>
+          <p:cNvSpPr txBox="1"/>
+          <p:nvPr/>
+        </p:nvSpPr>
+        <p:spPr>
+          <a:xfrm>
+            <a:off x="941832" y="2020824"/>
+            <a:ext cx="2926079" cy="320040"/>
+          </a:xfrm>
+          <a:prstGeom prst="rect">
+            <a:avLst/>
+          </a:prstGeom>
+          <a:noFill/>
+        </p:spPr>
+        <p:txBody>
+          <a:bodyPr wrap="square">
+            <a:noAutofit/>
+          </a:bodyPr>
+          <a:lstStyle/>
+          <a:p>
+            <a:r>
+              <a:rPr sz="1500" b="1">
+                <a:solidFill>
+                  <a:srgbClr val="15201B"/>
+                </a:solidFill>
+                <a:latin typeface="Aptos"/>
+              </a:rPr>
+              <a:t>HOW SENSITIVE</a:t>
+            </a:r>
+          </a:p>
+        </p:txBody>
+      </p:sp>
+      <p:sp>
+        <p:nvSpPr>
+          <p:cNvPr id="7" name="TextBox 6"/>
+          <p:cNvSpPr txBox="1"/>
+          <p:nvPr/>
+        </p:nvSpPr>
+        <p:spPr>
+          <a:xfrm>
+            <a:off x="941832" y="2404872"/>
+            <a:ext cx="2926079" cy="1993391"/>
+          </a:xfrm>
+          <a:prstGeom prst="rect">
+            <a:avLst/>
+          </a:prstGeom>
+          <a:noFill/>
+        </p:spPr>
+        <p:txBody>
+          <a:bodyPr wrap="square">
+            <a:noAutofit/>
+          </a:bodyPr>
+          <a:lstStyle/>
+          <a:p>
+            <a:r>
+              <a:rPr sz="1200" b="0">
+                <a:solidFill>
+                  <a:srgbClr val="53635B"/>
+                </a:solidFill>
+                <a:latin typeface="Aptos"/>
+              </a:rPr>
+              <a:t>Low, medium, or high. Set from the data itself and the rules that cover it, such as HIPAA. A ward name and a diagnosis are not the same.</a:t>
+            </a:r>
+          </a:p>
+        </p:txBody>
+      </p:sp>
+      <p:sp>
+        <p:nvSpPr>
+          <p:cNvPr id="8" name="TextBox 7"/>
+          <p:cNvSpPr txBox="1"/>
+          <p:nvPr/>
+        </p:nvSpPr>
+        <p:spPr>
+          <a:xfrm>
+            <a:off x="4069079" y="2944368"/>
+            <a:ext cx="320040" cy="521207"/>
+          </a:xfrm>
+          <a:prstGeom prst="rect">
+            <a:avLst/>
+          </a:prstGeom>
+          <a:noFill/>
+        </p:spPr>
+        <p:txBody>
+          <a:bodyPr wrap="square">
+            <a:noAutofit/>
+          </a:bodyPr>
+          <a:lstStyle/>
+          <a:p>
+            <a:r>
+              <a:rPr sz="2800" b="1">
+                <a:solidFill>
+                  <a:srgbClr val="53635B"/>
+                </a:solidFill>
+                <a:latin typeface="Aptos"/>
+              </a:rPr>
+              <a:t>→</a:t>
+            </a:r>
+          </a:p>
+        </p:txBody>
+      </p:sp>
+      <p:sp>
+        <p:nvSpPr>
+          <p:cNvPr id="9" name="Rounded Rectangle 8"/>
+          <p:cNvSpPr/>
+          <p:nvPr/>
+        </p:nvSpPr>
+        <p:spPr>
+          <a:xfrm>
+            <a:off x="4389120" y="1874519"/>
+            <a:ext cx="3246120" cy="2651760"/>
+          </a:xfrm>
+          <a:prstGeom prst="roundRect">
+            <a:avLst/>
+          </a:prstGeom>
+          <a:solidFill>
+            <a:srgbClr val="DCE7F1"/>
+          </a:solidFill>
+          <a:ln w="12700">
+            <a:solidFill>
+              <a:srgbClr val="B9C2BB"/>
+            </a:solidFill>
+          </a:ln>
+          <a:effectLst/>
+        </p:spPr>
+        <p:style>
+          <a:lnRef idx="1">
+            <a:schemeClr val="accent1"/>
+          </a:lnRef>
+          <a:fillRef idx="3">
+            <a:schemeClr val="accent1"/>
+          </a:fillRef>
+          <a:effectRef idx="2">
+            <a:schemeClr val="accent1"/>
+          </a:effectRef>
+          <a:fontRef idx="minor">
+            <a:schemeClr val="lt1"/>
+          </a:fontRef>
+        </p:style>
+        <p:txBody>
+          <a:bodyPr rtlCol="0" anchor="ctr"/>
+          <a:lstStyle/>
+          <a:p/>
+        </p:txBody>
+      </p:sp>
+      <p:sp>
+        <p:nvSpPr>
+          <p:cNvPr id="10" name="TextBox 9"/>
+          <p:cNvSpPr txBox="1"/>
+          <p:nvPr/>
+        </p:nvSpPr>
+        <p:spPr>
+          <a:xfrm>
+            <a:off x="4553712" y="2020824"/>
+            <a:ext cx="2926079" cy="320040"/>
+          </a:xfrm>
+          <a:prstGeom prst="rect">
+            <a:avLst/>
+          </a:prstGeom>
+          <a:noFill/>
+        </p:spPr>
+        <p:txBody>
+          <a:bodyPr wrap="square">
+            <a:noAutofit/>
+          </a:bodyPr>
+          <a:lstStyle/>
+          <a:p>
+            <a:r>
+              <a:rPr sz="1500" b="1">
+                <a:solidFill>
+                  <a:srgbClr val="15201B"/>
+                </a:solidFill>
+                <a:latin typeface="Aptos"/>
+              </a:rPr>
+              <a:t>HOW TRUSTED</a:t>
+            </a:r>
+          </a:p>
+        </p:txBody>
+      </p:sp>
+      <p:sp>
+        <p:nvSpPr>
+          <p:cNvPr id="11" name="TextBox 10"/>
+          <p:cNvSpPr txBox="1"/>
+          <p:nvPr/>
+        </p:nvSpPr>
+        <p:spPr>
+          <a:xfrm>
+            <a:off x="4553712" y="2404872"/>
+            <a:ext cx="2926079" cy="1993391"/>
+          </a:xfrm>
+          <a:prstGeom prst="rect">
+            <a:avLst/>
+          </a:prstGeom>
+          <a:noFill/>
+        </p:spPr>
+        <p:txBody>
+          <a:bodyPr wrap="square">
+            <a:noAutofit/>
+          </a:bodyPr>
+          <a:lstStyle/>
+          <a:p>
+            <a:r>
+              <a:rPr sz="1200" b="0">
+                <a:solidFill>
+                  <a:srgbClr val="53635B"/>
+                </a:solidFill>
+                <a:latin typeface="Aptos"/>
+              </a:rPr>
+              <a:t>The paper calls this a Know Your User score, like a bank checking a customer. Built from verified identity, employer, stated purpose, and past record.</a:t>
+            </a:r>
+          </a:p>
+        </p:txBody>
+      </p:sp>
+      <p:sp>
+        <p:nvSpPr>
+          <p:cNvPr id="12" name="TextBox 11"/>
+          <p:cNvSpPr txBox="1"/>
+          <p:nvPr/>
+        </p:nvSpPr>
+        <p:spPr>
+          <a:xfrm>
+            <a:off x="7680960" y="2944368"/>
+            <a:ext cx="320040" cy="521207"/>
+          </a:xfrm>
+          <a:prstGeom prst="rect">
+            <a:avLst/>
+          </a:prstGeom>
+          <a:noFill/>
+        </p:spPr>
+        <p:txBody>
+          <a:bodyPr wrap="square">
+            <a:noAutofit/>
+          </a:bodyPr>
+          <a:lstStyle/>
+          <a:p>
+            <a:r>
+              <a:rPr sz="2800" b="1">
+                <a:solidFill>
+                  <a:srgbClr val="53635B"/>
+                </a:solidFill>
+                <a:latin typeface="Aptos"/>
+              </a:rPr>
+              <a:t>→</a:t>
+            </a:r>
+          </a:p>
+        </p:txBody>
+      </p:sp>
+      <p:sp>
+        <p:nvSpPr>
+          <p:cNvPr id="13" name="Rounded Rectangle 12"/>
+          <p:cNvSpPr/>
+          <p:nvPr/>
+        </p:nvSpPr>
+        <p:spPr>
+          <a:xfrm>
+            <a:off x="8001000" y="1874519"/>
+            <a:ext cx="3246120" cy="2651760"/>
+          </a:xfrm>
+          <a:prstGeom prst="roundRect">
+            <a:avLst/>
+          </a:prstGeom>
+          <a:solidFill>
+            <a:srgbClr val="F4E8D0"/>
+          </a:solidFill>
+          <a:ln w="12700">
+            <a:solidFill>
+              <a:srgbClr val="B9C2BB"/>
+            </a:solidFill>
+          </a:ln>
+          <a:effectLst/>
+        </p:spPr>
+        <p:style>
+          <a:lnRef idx="1">
+            <a:schemeClr val="accent1"/>
+          </a:lnRef>
+          <a:fillRef idx="3">
+            <a:schemeClr val="accent1"/>
+          </a:fillRef>
+          <a:effectRef idx="2">
+            <a:schemeClr val="accent1"/>
+          </a:effectRef>
+          <a:fontRef idx="minor">
+            <a:schemeClr val="lt1"/>
+          </a:fontRef>
+        </p:style>
+        <p:txBody>
+          <a:bodyPr rtlCol="0" anchor="ctr"/>
+          <a:lstStyle/>
+          <a:p/>
+        </p:txBody>
+      </p:sp>
+      <p:sp>
+        <p:nvSpPr>
+          <p:cNvPr id="14" name="TextBox 13"/>
+          <p:cNvSpPr txBox="1"/>
+          <p:nvPr/>
+        </p:nvSpPr>
+        <p:spPr>
+          <a:xfrm>
+            <a:off x="8165592" y="2020824"/>
+            <a:ext cx="2926079" cy="320040"/>
+          </a:xfrm>
+          <a:prstGeom prst="rect">
+            <a:avLst/>
+          </a:prstGeom>
+          <a:noFill/>
+        </p:spPr>
+        <p:txBody>
+          <a:bodyPr wrap="square">
+            <a:noAutofit/>
+          </a:bodyPr>
+          <a:lstStyle/>
+          <a:p>
+            <a:r>
+              <a:rPr sz="1500" b="1">
+                <a:solidFill>
+                  <a:srgbClr val="15201B"/>
+                </a:solidFill>
+                <a:latin typeface="Aptos"/>
+              </a:rPr>
+              <a:t>HOW MUCH</a:t>
+            </a:r>
+          </a:p>
+        </p:txBody>
+      </p:sp>
+      <p:sp>
+        <p:nvSpPr>
+          <p:cNvPr id="15" name="TextBox 14"/>
+          <p:cNvSpPr txBox="1"/>
+          <p:nvPr/>
+        </p:nvSpPr>
+        <p:spPr>
+          <a:xfrm>
+            <a:off x="8165592" y="2404872"/>
+            <a:ext cx="2926079" cy="1993391"/>
+          </a:xfrm>
+          <a:prstGeom prst="rect">
+            <a:avLst/>
+          </a:prstGeom>
+          <a:noFill/>
+        </p:spPr>
+        <p:txBody>
+          <a:bodyPr wrap="square">
+            <a:noAutofit/>
+          </a:bodyPr>
+          <a:lstStyle/>
+          <a:p>
+            <a:r>
+              <a:rPr sz="1200" b="0">
+                <a:solidFill>
+                  <a:srgbClr val="53635B"/>
+                </a:solidFill>
+                <a:latin typeface="Aptos"/>
+              </a:rPr>
+              <a:t>One value, one patient, one field across everyone, or the whole table. Asking for more should not be as easy as asking for less.</a:t>
+            </a:r>
+          </a:p>
+        </p:txBody>
+      </p:sp>
+      <p:sp>
+        <p:nvSpPr>
+          <p:cNvPr id="16" name="TextBox 15"/>
+          <p:cNvSpPr txBox="1"/>
+          <p:nvPr/>
+        </p:nvSpPr>
+        <p:spPr>
+          <a:xfrm>
+            <a:off x="914400" y="4892040"/>
+            <a:ext cx="9875520" cy="457200"/>
+          </a:xfrm>
+          <a:prstGeom prst="rect">
+            <a:avLst/>
+          </a:prstGeom>
+          <a:noFill/>
+        </p:spPr>
+        <p:txBody>
+          <a:bodyPr wrap="square">
+            <a:noAutofit/>
+          </a:bodyPr>
+          <a:lstStyle/>
+          <a:p>
+            <a:r>
+              <a:rPr sz="1200" b="1">
+                <a:solidFill>
+                  <a:srgbClr val="15201B"/>
+                </a:solidFill>
+                <a:latin typeface="Aptos"/>
+              </a:rPr>
+              <a:t>High sensitivity and low trust means heavy protection. Low sensitivity and high trust means show it as it is.</a:t>
+            </a:r>
+          </a:p>
+        </p:txBody>
+      </p:sp>
+      <p:sp>
+        <p:nvSpPr>
+          <p:cNvPr id="17" name="TextBox 16"/>
+          <p:cNvSpPr txBox="1"/>
+          <p:nvPr/>
+        </p:nvSpPr>
+        <p:spPr>
+          <a:xfrm>
+            <a:off x="566928" y="6355080"/>
+            <a:ext cx="5669280" cy="274320"/>
+          </a:xfrm>
+          <a:prstGeom prst="rect">
+            <a:avLst/>
+          </a:prstGeom>
+          <a:noFill/>
+        </p:spPr>
+        <p:txBody>
+          <a:bodyPr wrap="square">
+            <a:noAutofit/>
+          </a:bodyPr>
+          <a:lstStyle/>
+          <a:p>
+            <a:r>
+              <a:rPr sz="800" b="0">
+                <a:solidFill>
+                  <a:srgbClr val="53635B"/>
+                </a:solidFill>
+                <a:latin typeface="Aptos"/>
+              </a:rPr>
+              <a:t>Sensitivity, trust, and how much is asked for / 20</a:t>
+            </a:r>
+          </a:p>
+        </p:txBody>
+      </p:sp>
+    </p:spTree>
+  </p:cSld>
+  <p:clrMapOvr>
+    <a:masterClrMapping/>
+  </p:clrMapOvr>
+</p:sld>
+</file>
+
+<file path=ppt/slides/slide26.xml><?xml version="1.0" encoding="utf-8"?>
+<p:sld xmlns:a="http://schemas.openxmlformats.org/drawingml/2006/main" xmlns:p="http://schemas.openxmlformats.org/presentationml/2006/main" xmlns:r="http://schemas.openxmlformats.org/officeDocument/2006/relationships">
+  <p:cSld>
+    <p:bg>
+      <p:bgPr>
+        <a:solidFill>
+          <a:srgbClr val="F7F3EA"/>
+        </a:solidFill>
+        <a:effectLst/>
+      </p:bgPr>
+    </p:bg>
+    <p:spTree>
+      <p:nvGrpSpPr>
+        <p:cNvPr id="1" name=""/>
+        <p:cNvGrpSpPr/>
+        <p:nvPr/>
+      </p:nvGrpSpPr>
+      <p:grpSpPr/>
+      <p:sp>
+        <p:nvSpPr>
+          <p:cNvPr id="2" name="TextBox 1"/>
+          <p:cNvSpPr txBox="1"/>
+          <p:nvPr/>
+        </p:nvSpPr>
+        <p:spPr>
+          <a:xfrm>
+            <a:off x="548640" y="320040"/>
+            <a:ext cx="2377440" cy="292608"/>
+          </a:xfrm>
+          <a:prstGeom prst="rect">
+            <a:avLst/>
+          </a:prstGeom>
+          <a:noFill/>
+        </p:spPr>
+        <p:txBody>
+          <a:bodyPr wrap="square">
+            <a:noAutofit/>
+          </a:bodyPr>
+          <a:lstStyle/>
+          <a:p>
+            <a:r>
+              <a:rPr sz="1300" b="1">
+                <a:solidFill>
+                  <a:srgbClr val="53635B"/>
+                </a:solidFill>
+                <a:latin typeface="Aptos"/>
+              </a:rPr>
+              <a:t>GRAILS</a:t>
+            </a:r>
+          </a:p>
+        </p:txBody>
+      </p:sp>
+      <p:sp>
+        <p:nvSpPr>
+          <p:cNvPr id="3" name="TextBox 2"/>
+          <p:cNvSpPr txBox="1"/>
+          <p:nvPr/>
+        </p:nvSpPr>
+        <p:spPr>
+          <a:xfrm>
+            <a:off x="548640" y="658368"/>
+            <a:ext cx="10424160" cy="594360"/>
+          </a:xfrm>
+          <a:prstGeom prst="rect">
+            <a:avLst/>
+          </a:prstGeom>
+          <a:noFill/>
+        </p:spPr>
+        <p:txBody>
+          <a:bodyPr wrap="square">
+            <a:noAutofit/>
+          </a:bodyPr>
+          <a:lstStyle/>
+          <a:p>
+            <a:r>
+              <a:rPr sz="2900" b="1">
+                <a:solidFill>
+                  <a:srgbClr val="15201B"/>
+                </a:solidFill>
+                <a:latin typeface="Aptos"/>
+              </a:rPr>
+              <a:t>The dials point to a specific action.</a:t>
+            </a:r>
+          </a:p>
+        </p:txBody>
+      </p:sp>
+      <p:sp>
+        <p:nvSpPr>
+          <p:cNvPr id="4" name="TextBox 3"/>
+          <p:cNvSpPr txBox="1"/>
+          <p:nvPr/>
+        </p:nvSpPr>
+        <p:spPr>
+          <a:xfrm>
+            <a:off x="566928" y="1225296"/>
+            <a:ext cx="9784080" cy="521207"/>
+          </a:xfrm>
+          <a:prstGeom prst="rect">
+            <a:avLst/>
+          </a:prstGeom>
+          <a:noFill/>
+        </p:spPr>
+        <p:txBody>
+          <a:bodyPr wrap="square">
+            <a:noAutofit/>
+          </a:bodyPr>
+          <a:lstStyle/>
+          <a:p>
+            <a:r>
+              <a:rPr sz="1400" b="0">
+                <a:solidFill>
+                  <a:srgbClr val="53635B"/>
+                </a:solidFill>
+                <a:latin typeface="Aptos"/>
+              </a:rPr>
+              <a:t>A shortened view of the paper's strategy table, written in plain terms.</a:t>
+            </a:r>
+          </a:p>
+        </p:txBody>
+      </p:sp>
+      <p:sp>
+        <p:nvSpPr>
+          <p:cNvPr id="5" name="Rectangle 4"/>
+          <p:cNvSpPr/>
+          <p:nvPr/>
+        </p:nvSpPr>
+        <p:spPr>
+          <a:xfrm>
+            <a:off x="548640" y="1691640"/>
+            <a:ext cx="2743200" cy="731520"/>
+          </a:xfrm>
+          <a:prstGeom prst="rect">
+            <a:avLst/>
+          </a:prstGeom>
+          <a:solidFill>
+            <a:srgbClr val="F4E8D0"/>
+          </a:solidFill>
+          <a:ln w="12700">
+            <a:solidFill>
+              <a:srgbClr val="B9C2BB"/>
+            </a:solidFill>
+          </a:ln>
+          <a:effectLst/>
+        </p:spPr>
+        <p:style>
+          <a:lnRef idx="1">
+            <a:schemeClr val="accent1"/>
+          </a:lnRef>
+          <a:fillRef idx="3">
+            <a:schemeClr val="accent1"/>
+          </a:fillRef>
+          <a:effectRef idx="2">
+            <a:schemeClr val="accent1"/>
+          </a:effectRef>
+          <a:fontRef idx="minor">
+            <a:schemeClr val="lt1"/>
+          </a:fontRef>
+        </p:style>
+        <p:txBody>
+          <a:bodyPr rtlCol="0" anchor="ctr"/>
+          <a:lstStyle/>
+          <a:p/>
+        </p:txBody>
+      </p:sp>
+      <p:sp>
+        <p:nvSpPr>
+          <p:cNvPr id="6" name="TextBox 5"/>
+          <p:cNvSpPr txBox="1"/>
+          <p:nvPr/>
+        </p:nvSpPr>
+        <p:spPr>
+          <a:xfrm>
+            <a:off x="621792" y="1764792"/>
+            <a:ext cx="2596896" cy="585216"/>
+          </a:xfrm>
+          <a:prstGeom prst="rect">
+            <a:avLst/>
+          </a:prstGeom>
+          <a:noFill/>
+        </p:spPr>
+        <p:txBody>
+          <a:bodyPr wrap="square" anchor="ctr">
+            <a:noAutofit/>
+          </a:bodyPr>
+          <a:lstStyle/>
+          <a:p>
+            <a:r>
+              <a:rPr sz="1100" b="1">
+                <a:solidFill>
+                  <a:srgbClr val="15201B"/>
+                </a:solidFill>
+                <a:latin typeface="Aptos"/>
+              </a:rPr>
+              <a:t>How sensitive the field is</a:t>
+            </a:r>
+          </a:p>
+        </p:txBody>
+      </p:sp>
+      <p:sp>
+        <p:nvSpPr>
+          <p:cNvPr id="7" name="Rectangle 6"/>
+          <p:cNvSpPr/>
+          <p:nvPr/>
+        </p:nvSpPr>
+        <p:spPr>
+          <a:xfrm>
+            <a:off x="3291840" y="1691640"/>
+            <a:ext cx="2926080" cy="731520"/>
+          </a:xfrm>
+          <a:prstGeom prst="rect">
+            <a:avLst/>
+          </a:prstGeom>
+          <a:solidFill>
+            <a:srgbClr val="F4E8D0"/>
+          </a:solidFill>
+          <a:ln w="12700">
+            <a:solidFill>
+              <a:srgbClr val="B9C2BB"/>
+            </a:solidFill>
+          </a:ln>
+          <a:effectLst/>
+        </p:spPr>
+        <p:style>
+          <a:lnRef idx="1">
+            <a:schemeClr val="accent1"/>
+          </a:lnRef>
+          <a:fillRef idx="3">
+            <a:schemeClr val="accent1"/>
+          </a:fillRef>
+          <a:effectRef idx="2">
+            <a:schemeClr val="accent1"/>
+          </a:effectRef>
+          <a:fontRef idx="minor">
+            <a:schemeClr val="lt1"/>
+          </a:fontRef>
+        </p:style>
+        <p:txBody>
+          <a:bodyPr rtlCol="0" anchor="ctr"/>
+          <a:lstStyle/>
+          <a:p/>
+        </p:txBody>
+      </p:sp>
+      <p:sp>
+        <p:nvSpPr>
+          <p:cNvPr id="8" name="TextBox 7"/>
+          <p:cNvSpPr txBox="1"/>
+          <p:nvPr/>
+        </p:nvSpPr>
+        <p:spPr>
+          <a:xfrm>
+            <a:off x="3364992" y="1764792"/>
+            <a:ext cx="2779776" cy="585216"/>
+          </a:xfrm>
+          <a:prstGeom prst="rect">
+            <a:avLst/>
+          </a:prstGeom>
+          <a:noFill/>
+        </p:spPr>
+        <p:txBody>
+          <a:bodyPr wrap="square" anchor="ctr">
+            <a:noAutofit/>
+          </a:bodyPr>
+          <a:lstStyle/>
+          <a:p>
+            <a:r>
+              <a:rPr sz="1100" b="1">
+                <a:solidFill>
+                  <a:srgbClr val="15201B"/>
+                </a:solidFill>
+                <a:latin typeface="Aptos"/>
+              </a:rPr>
+              <a:t>Asked by low trust</a:t>
+            </a:r>
+          </a:p>
+        </p:txBody>
+      </p:sp>
+      <p:sp>
+        <p:nvSpPr>
+          <p:cNvPr id="9" name="Rectangle 8"/>
+          <p:cNvSpPr/>
+          <p:nvPr/>
+        </p:nvSpPr>
+        <p:spPr>
+          <a:xfrm>
+            <a:off x="6217920" y="1691640"/>
+            <a:ext cx="2926080" cy="731520"/>
+          </a:xfrm>
+          <a:prstGeom prst="rect">
+            <a:avLst/>
+          </a:prstGeom>
+          <a:solidFill>
+            <a:srgbClr val="F4E8D0"/>
+          </a:solidFill>
+          <a:ln w="12700">
+            <a:solidFill>
+              <a:srgbClr val="B9C2BB"/>
+            </a:solidFill>
+          </a:ln>
+          <a:effectLst/>
+        </p:spPr>
+        <p:style>
+          <a:lnRef idx="1">
+            <a:schemeClr val="accent1"/>
+          </a:lnRef>
+          <a:fillRef idx="3">
+            <a:schemeClr val="accent1"/>
+          </a:fillRef>
+          <a:effectRef idx="2">
+            <a:schemeClr val="accent1"/>
+          </a:effectRef>
+          <a:fontRef idx="minor">
+            <a:schemeClr val="lt1"/>
+          </a:fontRef>
+        </p:style>
+        <p:txBody>
+          <a:bodyPr rtlCol="0" anchor="ctr"/>
+          <a:lstStyle/>
+          <a:p/>
+        </p:txBody>
+      </p:sp>
+      <p:sp>
+        <p:nvSpPr>
+          <p:cNvPr id="10" name="TextBox 9"/>
+          <p:cNvSpPr txBox="1"/>
+          <p:nvPr/>
+        </p:nvSpPr>
+        <p:spPr>
+          <a:xfrm>
+            <a:off x="6291072" y="1764792"/>
+            <a:ext cx="2779776" cy="585216"/>
+          </a:xfrm>
+          <a:prstGeom prst="rect">
+            <a:avLst/>
+          </a:prstGeom>
+          <a:noFill/>
+        </p:spPr>
+        <p:txBody>
+          <a:bodyPr wrap="square" anchor="ctr">
+            <a:noAutofit/>
+          </a:bodyPr>
+          <a:lstStyle/>
+          <a:p>
+            <a:r>
+              <a:rPr sz="1100" b="1">
+                <a:solidFill>
+                  <a:srgbClr val="15201B"/>
+                </a:solidFill>
+                <a:latin typeface="Aptos"/>
+              </a:rPr>
+              <a:t>Asked by medium trust</a:t>
+            </a:r>
+          </a:p>
+        </p:txBody>
+      </p:sp>
+      <p:sp>
+        <p:nvSpPr>
+          <p:cNvPr id="11" name="Rectangle 10"/>
+          <p:cNvSpPr/>
+          <p:nvPr/>
+        </p:nvSpPr>
+        <p:spPr>
+          <a:xfrm>
+            <a:off x="9144000" y="1691640"/>
+            <a:ext cx="2926080" cy="731520"/>
+          </a:xfrm>
+          <a:prstGeom prst="rect">
+            <a:avLst/>
+          </a:prstGeom>
+          <a:solidFill>
+            <a:srgbClr val="F4E8D0"/>
+          </a:solidFill>
+          <a:ln w="12700">
+            <a:solidFill>
+              <a:srgbClr val="B9C2BB"/>
+            </a:solidFill>
+          </a:ln>
+          <a:effectLst/>
+        </p:spPr>
+        <p:style>
+          <a:lnRef idx="1">
+            <a:schemeClr val="accent1"/>
+          </a:lnRef>
+          <a:fillRef idx="3">
+            <a:schemeClr val="accent1"/>
+          </a:fillRef>
+          <a:effectRef idx="2">
+            <a:schemeClr val="accent1"/>
+          </a:effectRef>
+          <a:fontRef idx="minor">
+            <a:schemeClr val="lt1"/>
+          </a:fontRef>
+        </p:style>
+        <p:txBody>
+          <a:bodyPr rtlCol="0" anchor="ctr"/>
+          <a:lstStyle/>
+          <a:p/>
+        </p:txBody>
+      </p:sp>
+      <p:sp>
+        <p:nvSpPr>
+          <p:cNvPr id="12" name="TextBox 11"/>
+          <p:cNvSpPr txBox="1"/>
+          <p:nvPr/>
+        </p:nvSpPr>
+        <p:spPr>
+          <a:xfrm>
+            <a:off x="9217152" y="1764792"/>
+            <a:ext cx="2779776" cy="585216"/>
+          </a:xfrm>
+          <a:prstGeom prst="rect">
+            <a:avLst/>
+          </a:prstGeom>
+          <a:noFill/>
+        </p:spPr>
+        <p:txBody>
+          <a:bodyPr wrap="square" anchor="ctr">
+            <a:noAutofit/>
+          </a:bodyPr>
+          <a:lstStyle/>
+          <a:p>
+            <a:r>
+              <a:rPr sz="1100" b="1">
+                <a:solidFill>
+                  <a:srgbClr val="15201B"/>
+                </a:solidFill>
+                <a:latin typeface="Aptos"/>
+              </a:rPr>
+              <a:t>Asked by high trust</a:t>
+            </a:r>
+          </a:p>
+        </p:txBody>
+      </p:sp>
+      <p:sp>
+        <p:nvSpPr>
+          <p:cNvPr id="13" name="Rectangle 12"/>
+          <p:cNvSpPr/>
+          <p:nvPr/>
+        </p:nvSpPr>
+        <p:spPr>
+          <a:xfrm>
+            <a:off x="548640" y="2423160"/>
+            <a:ext cx="2743200" cy="731520"/>
+          </a:xfrm>
+          <a:prstGeom prst="rect">
+            <a:avLst/>
+          </a:prstGeom>
+          <a:solidFill>
+            <a:srgbClr val="FFFFFF"/>
+          </a:solidFill>
+          <a:ln w="12700">
+            <a:solidFill>
+              <a:srgbClr val="B9C2BB"/>
+            </a:solidFill>
+          </a:ln>
+          <a:effectLst/>
+        </p:spPr>
+        <p:style>
+          <a:lnRef idx="1">
+            <a:schemeClr val="accent1"/>
+          </a:lnRef>
+          <a:fillRef idx="3">
+            <a:schemeClr val="accent1"/>
+          </a:fillRef>
+          <a:effectRef idx="2">
+            <a:schemeClr val="accent1"/>
+          </a:effectRef>
+          <a:fontRef idx="minor">
+            <a:schemeClr val="lt1"/>
+          </a:fontRef>
+        </p:style>
+        <p:txBody>
+          <a:bodyPr rtlCol="0" anchor="ctr"/>
+          <a:lstStyle/>
+          <a:p/>
+        </p:txBody>
+      </p:sp>
+      <p:sp>
+        <p:nvSpPr>
+          <p:cNvPr id="14" name="TextBox 13"/>
+          <p:cNvSpPr txBox="1"/>
+          <p:nvPr/>
+        </p:nvSpPr>
+        <p:spPr>
+          <a:xfrm>
+            <a:off x="621792" y="2496312"/>
+            <a:ext cx="2596896" cy="585216"/>
+          </a:xfrm>
+          <a:prstGeom prst="rect">
+            <a:avLst/>
+          </a:prstGeom>
+          <a:noFill/>
+        </p:spPr>
+        <p:txBody>
+          <a:bodyPr wrap="square" anchor="ctr">
+            <a:noAutofit/>
+          </a:bodyPr>
+          <a:lstStyle/>
+          <a:p>
+            <a:r>
+              <a:rPr sz="1000" b="0">
+                <a:solidFill>
+                  <a:srgbClr val="53635B"/>
+                </a:solidFill>
+                <a:latin typeface="Aptos"/>
+              </a:rPr>
+              <a:t>High</a:t>
+            </a:r>
+          </a:p>
+        </p:txBody>
+      </p:sp>
+      <p:sp>
+        <p:nvSpPr>
+          <p:cNvPr id="15" name="Rectangle 14"/>
+          <p:cNvSpPr/>
+          <p:nvPr/>
+        </p:nvSpPr>
+        <p:spPr>
+          <a:xfrm>
+            <a:off x="3291840" y="2423160"/>
+            <a:ext cx="2926080" cy="731520"/>
+          </a:xfrm>
+          <a:prstGeom prst="rect">
+            <a:avLst/>
+          </a:prstGeom>
+          <a:solidFill>
+            <a:srgbClr val="FFFFFF"/>
+          </a:solidFill>
+          <a:ln w="12700">
+            <a:solidFill>
+              <a:srgbClr val="B9C2BB"/>
+            </a:solidFill>
+          </a:ln>
+          <a:effectLst/>
+        </p:spPr>
+        <p:style>
+          <a:lnRef idx="1">
+            <a:schemeClr val="accent1"/>
+          </a:lnRef>
+          <a:fillRef idx="3">
+            <a:schemeClr val="accent1"/>
+          </a:fillRef>
+          <a:effectRef idx="2">
+            <a:schemeClr val="accent1"/>
+          </a:effectRef>
+          <a:fontRef idx="minor">
+            <a:schemeClr val="lt1"/>
+          </a:fontRef>
+        </p:style>
+        <p:txBody>
+          <a:bodyPr rtlCol="0" anchor="ctr"/>
+          <a:lstStyle/>
+          <a:p/>
+        </p:txBody>
+      </p:sp>
+      <p:sp>
+        <p:nvSpPr>
+          <p:cNvPr id="16" name="TextBox 15"/>
+          <p:cNvSpPr txBox="1"/>
+          <p:nvPr/>
+        </p:nvSpPr>
+        <p:spPr>
+          <a:xfrm>
+            <a:off x="3364992" y="2496312"/>
+            <a:ext cx="2779776" cy="585216"/>
+          </a:xfrm>
+          <a:prstGeom prst="rect">
+            <a:avLst/>
+          </a:prstGeom>
+          <a:noFill/>
+        </p:spPr>
+        <p:txBody>
+          <a:bodyPr wrap="square" anchor="ctr">
+            <a:noAutofit/>
+          </a:bodyPr>
+          <a:lstStyle/>
+          <a:p>
+            <a:r>
+              <a:rPr sz="1000" b="0">
+                <a:solidFill>
+                  <a:srgbClr val="53635B"/>
+                </a:solidFill>
+                <a:latin typeface="Aptos"/>
+              </a:rPr>
+              <a:t>Hide the value, or replace it with noise</a:t>
+            </a:r>
+          </a:p>
+        </p:txBody>
+      </p:sp>
+      <p:sp>
+        <p:nvSpPr>
+          <p:cNvPr id="17" name="Rectangle 16"/>
+          <p:cNvSpPr/>
+          <p:nvPr/>
+        </p:nvSpPr>
+        <p:spPr>
+          <a:xfrm>
+            <a:off x="6217920" y="2423160"/>
+            <a:ext cx="2926080" cy="731520"/>
+          </a:xfrm>
+          <a:prstGeom prst="rect">
+            <a:avLst/>
+          </a:prstGeom>
+          <a:solidFill>
+            <a:srgbClr val="FFFFFF"/>
+          </a:solidFill>
+          <a:ln w="12700">
+            <a:solidFill>
+              <a:srgbClr val="B9C2BB"/>
+            </a:solidFill>
+          </a:ln>
+          <a:effectLst/>
+        </p:spPr>
+        <p:style>
+          <a:lnRef idx="1">
+            <a:schemeClr val="accent1"/>
+          </a:lnRef>
+          <a:fillRef idx="3">
+            <a:schemeClr val="accent1"/>
+          </a:fillRef>
+          <a:effectRef idx="2">
+            <a:schemeClr val="accent1"/>
+          </a:effectRef>
+          <a:fontRef idx="minor">
+            <a:schemeClr val="lt1"/>
+          </a:fontRef>
+        </p:style>
+        <p:txBody>
+          <a:bodyPr rtlCol="0" anchor="ctr"/>
+          <a:lstStyle/>
+          <a:p/>
+        </p:txBody>
+      </p:sp>
+      <p:sp>
+        <p:nvSpPr>
+          <p:cNvPr id="18" name="TextBox 17"/>
+          <p:cNvSpPr txBox="1"/>
+          <p:nvPr/>
+        </p:nvSpPr>
+        <p:spPr>
+          <a:xfrm>
+            <a:off x="6291072" y="2496312"/>
+            <a:ext cx="2779776" cy="585216"/>
+          </a:xfrm>
+          <a:prstGeom prst="rect">
+            <a:avLst/>
+          </a:prstGeom>
+          <a:noFill/>
+        </p:spPr>
+        <p:txBody>
+          <a:bodyPr wrap="square" anchor="ctr">
+            <a:noAutofit/>
+          </a:bodyPr>
+          <a:lstStyle/>
+          <a:p>
+            <a:r>
+              <a:rPr sz="1000" b="0">
+                <a:solidFill>
+                  <a:srgbClr val="53635B"/>
+                </a:solidFill>
+                <a:latin typeface="Aptos"/>
+              </a:rPr>
+              <a:t>Round it off, or report it as a group</a:t>
+            </a:r>
+          </a:p>
+        </p:txBody>
+      </p:sp>
+      <p:sp>
+        <p:nvSpPr>
+          <p:cNvPr id="19" name="Rectangle 18"/>
+          <p:cNvSpPr/>
+          <p:nvPr/>
+        </p:nvSpPr>
+        <p:spPr>
+          <a:xfrm>
+            <a:off x="9144000" y="2423160"/>
+            <a:ext cx="2926080" cy="731520"/>
+          </a:xfrm>
+          <a:prstGeom prst="rect">
+            <a:avLst/>
+          </a:prstGeom>
+          <a:solidFill>
+            <a:srgbClr val="FFFFFF"/>
+          </a:solidFill>
+          <a:ln w="12700">
+            <a:solidFill>
+              <a:srgbClr val="B9C2BB"/>
+            </a:solidFill>
+          </a:ln>
+          <a:effectLst/>
+        </p:spPr>
+        <p:style>
+          <a:lnRef idx="1">
+            <a:schemeClr val="accent1"/>
+          </a:lnRef>
+          <a:fillRef idx="3">
+            <a:schemeClr val="accent1"/>
+          </a:fillRef>
+          <a:effectRef idx="2">
+            <a:schemeClr val="accent1"/>
+          </a:effectRef>
+          <a:fontRef idx="minor">
+            <a:schemeClr val="lt1"/>
+          </a:fontRef>
+        </p:style>
+        <p:txBody>
+          <a:bodyPr rtlCol="0" anchor="ctr"/>
+          <a:lstStyle/>
+          <a:p/>
+        </p:txBody>
+      </p:sp>
+      <p:sp>
+        <p:nvSpPr>
+          <p:cNvPr id="20" name="TextBox 19"/>
+          <p:cNvSpPr txBox="1"/>
+          <p:nvPr/>
+        </p:nvSpPr>
+        <p:spPr>
+          <a:xfrm>
+            <a:off x="9217152" y="2496312"/>
+            <a:ext cx="2779776" cy="585216"/>
+          </a:xfrm>
+          <a:prstGeom prst="rect">
+            <a:avLst/>
+          </a:prstGeom>
+          <a:noFill/>
+        </p:spPr>
+        <p:txBody>
+          <a:bodyPr wrap="square" anchor="ctr">
+            <a:noAutofit/>
+          </a:bodyPr>
+          <a:lstStyle/>
+          <a:p>
+            <a:r>
+              <a:rPr sz="1000" b="0">
+                <a:solidFill>
+                  <a:srgbClr val="53635B"/>
+                </a:solidFill>
+                <a:latin typeface="Aptos"/>
+              </a:rPr>
+              <a:t>Show it with a little noise added</a:t>
+            </a:r>
+          </a:p>
+        </p:txBody>
+      </p:sp>
+      <p:sp>
+        <p:nvSpPr>
+          <p:cNvPr id="21" name="Rectangle 20"/>
+          <p:cNvSpPr/>
+          <p:nvPr/>
+        </p:nvSpPr>
+        <p:spPr>
+          <a:xfrm>
+            <a:off x="548640" y="3154680"/>
+            <a:ext cx="2743200" cy="731520"/>
+          </a:xfrm>
+          <a:prstGeom prst="rect">
+            <a:avLst/>
+          </a:prstGeom>
+          <a:solidFill>
+            <a:srgbClr val="FFFFFF"/>
+          </a:solidFill>
+          <a:ln w="12700">
+            <a:solidFill>
+              <a:srgbClr val="B9C2BB"/>
+            </a:solidFill>
+          </a:ln>
+          <a:effectLst/>
+        </p:spPr>
+        <p:style>
+          <a:lnRef idx="1">
+            <a:schemeClr val="accent1"/>
+          </a:lnRef>
+          <a:fillRef idx="3">
+            <a:schemeClr val="accent1"/>
+          </a:fillRef>
+          <a:effectRef idx="2">
+            <a:schemeClr val="accent1"/>
+          </a:effectRef>
+          <a:fontRef idx="minor">
+            <a:schemeClr val="lt1"/>
+          </a:fontRef>
+        </p:style>
+        <p:txBody>
+          <a:bodyPr rtlCol="0" anchor="ctr"/>
+          <a:lstStyle/>
+          <a:p/>
+        </p:txBody>
+      </p:sp>
+      <p:sp>
+        <p:nvSpPr>
+          <p:cNvPr id="22" name="TextBox 21"/>
+          <p:cNvSpPr txBox="1"/>
+          <p:nvPr/>
+        </p:nvSpPr>
+        <p:spPr>
+          <a:xfrm>
+            <a:off x="621792" y="3227832"/>
+            <a:ext cx="2596896" cy="585216"/>
+          </a:xfrm>
+          <a:prstGeom prst="rect">
+            <a:avLst/>
+          </a:prstGeom>
+          <a:noFill/>
+        </p:spPr>
+        <p:txBody>
+          <a:bodyPr wrap="square" anchor="ctr">
+            <a:noAutofit/>
+          </a:bodyPr>
+          <a:lstStyle/>
+          <a:p>
+            <a:r>
+              <a:rPr sz="1000" b="0">
+                <a:solidFill>
+                  <a:srgbClr val="53635B"/>
+                </a:solidFill>
+                <a:latin typeface="Aptos"/>
+              </a:rPr>
+              <a:t>Medium</a:t>
+            </a:r>
+          </a:p>
+        </p:txBody>
+      </p:sp>
+      <p:sp>
+        <p:nvSpPr>
+          <p:cNvPr id="23" name="Rectangle 22"/>
+          <p:cNvSpPr/>
+          <p:nvPr/>
+        </p:nvSpPr>
+        <p:spPr>
+          <a:xfrm>
+            <a:off x="3291840" y="3154680"/>
+            <a:ext cx="2926080" cy="731520"/>
+          </a:xfrm>
+          <a:prstGeom prst="rect">
+            <a:avLst/>
+          </a:prstGeom>
+          <a:solidFill>
+            <a:srgbClr val="FFFFFF"/>
+          </a:solidFill>
+          <a:ln w="12700">
+            <a:solidFill>
+              <a:srgbClr val="B9C2BB"/>
+            </a:solidFill>
+          </a:ln>
+          <a:effectLst/>
+        </p:spPr>
+        <p:style>
+          <a:lnRef idx="1">
+            <a:schemeClr val="accent1"/>
+          </a:lnRef>
+          <a:fillRef idx="3">
+            <a:schemeClr val="accent1"/>
+          </a:fillRef>
+          <a:effectRef idx="2">
+            <a:schemeClr val="accent1"/>
+          </a:effectRef>
+          <a:fontRef idx="minor">
+            <a:schemeClr val="lt1"/>
+          </a:fontRef>
+        </p:style>
+        <p:txBody>
+          <a:bodyPr rtlCol="0" anchor="ctr"/>
+          <a:lstStyle/>
+          <a:p/>
+        </p:txBody>
+      </p:sp>
+      <p:sp>
+        <p:nvSpPr>
+          <p:cNvPr id="24" name="TextBox 23"/>
+          <p:cNvSpPr txBox="1"/>
+          <p:nvPr/>
+        </p:nvSpPr>
+        <p:spPr>
+          <a:xfrm>
+            <a:off x="3364992" y="3227832"/>
+            <a:ext cx="2779776" cy="585216"/>
+          </a:xfrm>
+          <a:prstGeom prst="rect">
+            <a:avLst/>
+          </a:prstGeom>
+          <a:noFill/>
+        </p:spPr>
+        <p:txBody>
+          <a:bodyPr wrap="square" anchor="ctr">
+            <a:noAutofit/>
+          </a:bodyPr>
+          <a:lstStyle/>
+          <a:p>
+            <a:r>
+              <a:rPr sz="1000" b="0">
+                <a:solidFill>
+                  <a:srgbClr val="53635B"/>
+                </a:solidFill>
+                <a:latin typeface="Aptos"/>
+              </a:rPr>
+              <a:t>Report it as a group only</a:t>
+            </a:r>
+          </a:p>
+        </p:txBody>
+      </p:sp>
+      <p:sp>
+        <p:nvSpPr>
+          <p:cNvPr id="25" name="Rectangle 24"/>
+          <p:cNvSpPr/>
+          <p:nvPr/>
+        </p:nvSpPr>
+        <p:spPr>
+          <a:xfrm>
+            <a:off x="6217920" y="3154680"/>
+            <a:ext cx="2926080" cy="731520"/>
+          </a:xfrm>
+          <a:prstGeom prst="rect">
+            <a:avLst/>
+          </a:prstGeom>
+          <a:solidFill>
+            <a:srgbClr val="FFFFFF"/>
+          </a:solidFill>
+          <a:ln w="12700">
+            <a:solidFill>
+              <a:srgbClr val="B9C2BB"/>
+            </a:solidFill>
+          </a:ln>
+          <a:effectLst/>
+        </p:spPr>
+        <p:style>
+          <a:lnRef idx="1">
+            <a:schemeClr val="accent1"/>
+          </a:lnRef>
+          <a:fillRef idx="3">
+            <a:schemeClr val="accent1"/>
+          </a:fillRef>
+          <a:effectRef idx="2">
+            <a:schemeClr val="accent1"/>
+          </a:effectRef>
+          <a:fontRef idx="minor">
+            <a:schemeClr val="lt1"/>
+          </a:fontRef>
+        </p:style>
+        <p:txBody>
+          <a:bodyPr rtlCol="0" anchor="ctr"/>
+          <a:lstStyle/>
+          <a:p/>
+        </p:txBody>
+      </p:sp>
+      <p:sp>
+        <p:nvSpPr>
+          <p:cNvPr id="26" name="TextBox 25"/>
+          <p:cNvSpPr txBox="1"/>
+          <p:nvPr/>
+        </p:nvSpPr>
+        <p:spPr>
+          <a:xfrm>
+            <a:off x="6291072" y="3227832"/>
+            <a:ext cx="2779776" cy="585216"/>
+          </a:xfrm>
+          <a:prstGeom prst="rect">
+            <a:avLst/>
+          </a:prstGeom>
+          <a:noFill/>
+        </p:spPr>
+        <p:txBody>
+          <a:bodyPr wrap="square" anchor="ctr">
+            <a:noAutofit/>
+          </a:bodyPr>
+          <a:lstStyle/>
+          <a:p>
+            <a:r>
+              <a:rPr sz="1000" b="0">
+                <a:solidFill>
+                  <a:srgbClr val="53635B"/>
+                </a:solidFill>
+                <a:latin typeface="Aptos"/>
+              </a:rPr>
+              <a:t>Show a range, hide the rest</a:t>
+            </a:r>
+          </a:p>
+        </p:txBody>
+      </p:sp>
+      <p:sp>
+        <p:nvSpPr>
+          <p:cNvPr id="27" name="Rectangle 26"/>
+          <p:cNvSpPr/>
+          <p:nvPr/>
+        </p:nvSpPr>
+        <p:spPr>
+          <a:xfrm>
+            <a:off x="9144000" y="3154680"/>
+            <a:ext cx="2926080" cy="731520"/>
+          </a:xfrm>
+          <a:prstGeom prst="rect">
+            <a:avLst/>
+          </a:prstGeom>
+          <a:solidFill>
+            <a:srgbClr val="FFFFFF"/>
+          </a:solidFill>
+          <a:ln w="12700">
+            <a:solidFill>
+              <a:srgbClr val="B9C2BB"/>
+            </a:solidFill>
+          </a:ln>
+          <a:effectLst/>
+        </p:spPr>
+        <p:style>
+          <a:lnRef idx="1">
+            <a:schemeClr val="accent1"/>
+          </a:lnRef>
+          <a:fillRef idx="3">
+            <a:schemeClr val="accent1"/>
+          </a:fillRef>
+          <a:effectRef idx="2">
+            <a:schemeClr val="accent1"/>
+          </a:effectRef>
+          <a:fontRef idx="minor">
+            <a:schemeClr val="lt1"/>
+          </a:fontRef>
+        </p:style>
+        <p:txBody>
+          <a:bodyPr rtlCol="0" anchor="ctr"/>
+          <a:lstStyle/>
+          <a:p/>
+        </p:txBody>
+      </p:sp>
+      <p:sp>
+        <p:nvSpPr>
+          <p:cNvPr id="28" name="TextBox 27"/>
+          <p:cNvSpPr txBox="1"/>
+          <p:nvPr/>
+        </p:nvSpPr>
+        <p:spPr>
+          <a:xfrm>
+            <a:off x="9217152" y="3227832"/>
+            <a:ext cx="2779776" cy="585216"/>
+          </a:xfrm>
+          <a:prstGeom prst="rect">
+            <a:avLst/>
+          </a:prstGeom>
+          <a:noFill/>
+        </p:spPr>
+        <p:txBody>
+          <a:bodyPr wrap="square" anchor="ctr">
+            <a:noAutofit/>
+          </a:bodyPr>
+          <a:lstStyle/>
+          <a:p>
+            <a:r>
+              <a:rPr sz="1000" b="0">
+                <a:solidFill>
+                  <a:srgbClr val="53635B"/>
+                </a:solidFill>
+                <a:latin typeface="Aptos"/>
+              </a:rPr>
+              <a:t>Show it as it is</a:t>
+            </a:r>
+          </a:p>
+        </p:txBody>
+      </p:sp>
+      <p:sp>
+        <p:nvSpPr>
+          <p:cNvPr id="29" name="Rectangle 28"/>
+          <p:cNvSpPr/>
+          <p:nvPr/>
+        </p:nvSpPr>
+        <p:spPr>
+          <a:xfrm>
+            <a:off x="548640" y="3886200"/>
+            <a:ext cx="2743200" cy="731520"/>
+          </a:xfrm>
+          <a:prstGeom prst="rect">
+            <a:avLst/>
+          </a:prstGeom>
+          <a:solidFill>
+            <a:srgbClr val="FFFFFF"/>
+          </a:solidFill>
+          <a:ln w="12700">
+            <a:solidFill>
+              <a:srgbClr val="B9C2BB"/>
+            </a:solidFill>
+          </a:ln>
+          <a:effectLst/>
+        </p:spPr>
+        <p:style>
+          <a:lnRef idx="1">
+            <a:schemeClr val="accent1"/>
+          </a:lnRef>
+          <a:fillRef idx="3">
+            <a:schemeClr val="accent1"/>
+          </a:fillRef>
+          <a:effectRef idx="2">
+            <a:schemeClr val="accent1"/>
+          </a:effectRef>
+          <a:fontRef idx="minor">
+            <a:schemeClr val="lt1"/>
+          </a:fontRef>
+        </p:style>
+        <p:txBody>
+          <a:bodyPr rtlCol="0" anchor="ctr"/>
+          <a:lstStyle/>
+          <a:p/>
+        </p:txBody>
+      </p:sp>
+      <p:sp>
+        <p:nvSpPr>
+          <p:cNvPr id="30" name="TextBox 29"/>
+          <p:cNvSpPr txBox="1"/>
+          <p:nvPr/>
+        </p:nvSpPr>
+        <p:spPr>
+          <a:xfrm>
+            <a:off x="621792" y="3959352"/>
+            <a:ext cx="2596896" cy="585216"/>
+          </a:xfrm>
+          <a:prstGeom prst="rect">
+            <a:avLst/>
+          </a:prstGeom>
+          <a:noFill/>
+        </p:spPr>
+        <p:txBody>
+          <a:bodyPr wrap="square" anchor="ctr">
+            <a:noAutofit/>
+          </a:bodyPr>
+          <a:lstStyle/>
+          <a:p>
+            <a:r>
+              <a:rPr sz="1000" b="0">
+                <a:solidFill>
+                  <a:srgbClr val="53635B"/>
+                </a:solidFill>
+                <a:latin typeface="Aptos"/>
+              </a:rPr>
+              <a:t>Low</a:t>
+            </a:r>
+          </a:p>
+        </p:txBody>
+      </p:sp>
+      <p:sp>
+        <p:nvSpPr>
+          <p:cNvPr id="31" name="Rectangle 30"/>
+          <p:cNvSpPr/>
+          <p:nvPr/>
+        </p:nvSpPr>
+        <p:spPr>
+          <a:xfrm>
+            <a:off x="3291840" y="3886200"/>
+            <a:ext cx="2926080" cy="731520"/>
+          </a:xfrm>
+          <a:prstGeom prst="rect">
+            <a:avLst/>
+          </a:prstGeom>
+          <a:solidFill>
+            <a:srgbClr val="FFFFFF"/>
+          </a:solidFill>
+          <a:ln w="12700">
+            <a:solidFill>
+              <a:srgbClr val="B9C2BB"/>
+            </a:solidFill>
+          </a:ln>
+          <a:effectLst/>
+        </p:spPr>
+        <p:style>
+          <a:lnRef idx="1">
+            <a:schemeClr val="accent1"/>
+          </a:lnRef>
+          <a:fillRef idx="3">
+            <a:schemeClr val="accent1"/>
+          </a:fillRef>
+          <a:effectRef idx="2">
+            <a:schemeClr val="accent1"/>
+          </a:effectRef>
+          <a:fontRef idx="minor">
+            <a:schemeClr val="lt1"/>
+          </a:fontRef>
+        </p:style>
+        <p:txBody>
+          <a:bodyPr rtlCol="0" anchor="ctr"/>
+          <a:lstStyle/>
+          <a:p/>
+        </p:txBody>
+      </p:sp>
+      <p:sp>
+        <p:nvSpPr>
+          <p:cNvPr id="32" name="TextBox 31"/>
+          <p:cNvSpPr txBox="1"/>
+          <p:nvPr/>
+        </p:nvSpPr>
+        <p:spPr>
+          <a:xfrm>
+            <a:off x="3364992" y="3959352"/>
+            <a:ext cx="2779776" cy="585216"/>
+          </a:xfrm>
+          <a:prstGeom prst="rect">
+            <a:avLst/>
+          </a:prstGeom>
+          <a:noFill/>
+        </p:spPr>
+        <p:txBody>
+          <a:bodyPr wrap="square" anchor="ctr">
+            <a:noAutofit/>
+          </a:bodyPr>
+          <a:lstStyle/>
+          <a:p>
+            <a:r>
+              <a:rPr sz="1000" b="0">
+                <a:solidFill>
+                  <a:srgbClr val="53635B"/>
+                </a:solidFill>
+                <a:latin typeface="Aptos"/>
+              </a:rPr>
+              <a:t>Add a little noise</a:t>
+            </a:r>
+          </a:p>
+        </p:txBody>
+      </p:sp>
+      <p:sp>
+        <p:nvSpPr>
+          <p:cNvPr id="33" name="Rectangle 32"/>
+          <p:cNvSpPr/>
+          <p:nvPr/>
+        </p:nvSpPr>
+        <p:spPr>
+          <a:xfrm>
+            <a:off x="6217920" y="3886200"/>
+            <a:ext cx="2926080" cy="731520"/>
+          </a:xfrm>
+          <a:prstGeom prst="rect">
+            <a:avLst/>
+          </a:prstGeom>
+          <a:solidFill>
+            <a:srgbClr val="FFFFFF"/>
+          </a:solidFill>
+          <a:ln w="12700">
+            <a:solidFill>
+              <a:srgbClr val="B9C2BB"/>
+            </a:solidFill>
+          </a:ln>
+          <a:effectLst/>
+        </p:spPr>
+        <p:style>
+          <a:lnRef idx="1">
+            <a:schemeClr val="accent1"/>
+          </a:lnRef>
+          <a:fillRef idx="3">
+            <a:schemeClr val="accent1"/>
+          </a:fillRef>
+          <a:effectRef idx="2">
+            <a:schemeClr val="accent1"/>
+          </a:effectRef>
+          <a:fontRef idx="minor">
+            <a:schemeClr val="lt1"/>
+          </a:fontRef>
+        </p:style>
+        <p:txBody>
+          <a:bodyPr rtlCol="0" anchor="ctr"/>
+          <a:lstStyle/>
+          <a:p/>
+        </p:txBody>
+      </p:sp>
+      <p:sp>
+        <p:nvSpPr>
+          <p:cNvPr id="34" name="TextBox 33"/>
+          <p:cNvSpPr txBox="1"/>
+          <p:nvPr/>
+        </p:nvSpPr>
+        <p:spPr>
+          <a:xfrm>
+            <a:off x="6291072" y="3959352"/>
+            <a:ext cx="2779776" cy="585216"/>
+          </a:xfrm>
+          <a:prstGeom prst="rect">
+            <a:avLst/>
+          </a:prstGeom>
+          <a:noFill/>
+        </p:spPr>
+        <p:txBody>
+          <a:bodyPr wrap="square" anchor="ctr">
+            <a:noAutofit/>
+          </a:bodyPr>
+          <a:lstStyle/>
+          <a:p>
+            <a:r>
+              <a:rPr sz="1000" b="0">
+                <a:solidFill>
+                  <a:srgbClr val="53635B"/>
+                </a:solidFill>
+                <a:latin typeface="Aptos"/>
+              </a:rPr>
+              <a:t>Show it as it is</a:t>
+            </a:r>
+          </a:p>
+        </p:txBody>
+      </p:sp>
+      <p:sp>
+        <p:nvSpPr>
+          <p:cNvPr id="35" name="Rectangle 34"/>
+          <p:cNvSpPr/>
+          <p:nvPr/>
+        </p:nvSpPr>
+        <p:spPr>
+          <a:xfrm>
+            <a:off x="9144000" y="3886200"/>
+            <a:ext cx="2926080" cy="731520"/>
+          </a:xfrm>
+          <a:prstGeom prst="rect">
+            <a:avLst/>
+          </a:prstGeom>
+          <a:solidFill>
+            <a:srgbClr val="FFFFFF"/>
+          </a:solidFill>
+          <a:ln w="12700">
+            <a:solidFill>
+              <a:srgbClr val="B9C2BB"/>
+            </a:solidFill>
+          </a:ln>
+          <a:effectLst/>
+        </p:spPr>
+        <p:style>
+          <a:lnRef idx="1">
+            <a:schemeClr val="accent1"/>
+          </a:lnRef>
+          <a:fillRef idx="3">
+            <a:schemeClr val="accent1"/>
+          </a:fillRef>
+          <a:effectRef idx="2">
+            <a:schemeClr val="accent1"/>
+          </a:effectRef>
+          <a:fontRef idx="minor">
+            <a:schemeClr val="lt1"/>
+          </a:fontRef>
+        </p:style>
+        <p:txBody>
+          <a:bodyPr rtlCol="0" anchor="ctr"/>
+          <a:lstStyle/>
+          <a:p/>
+        </p:txBody>
+      </p:sp>
+      <p:sp>
+        <p:nvSpPr>
+          <p:cNvPr id="36" name="TextBox 35"/>
+          <p:cNvSpPr txBox="1"/>
+          <p:nvPr/>
+        </p:nvSpPr>
+        <p:spPr>
+          <a:xfrm>
+            <a:off x="9217152" y="3959352"/>
+            <a:ext cx="2779776" cy="585216"/>
+          </a:xfrm>
+          <a:prstGeom prst="rect">
+            <a:avLst/>
+          </a:prstGeom>
+          <a:noFill/>
+        </p:spPr>
+        <p:txBody>
+          <a:bodyPr wrap="square" anchor="ctr">
+            <a:noAutofit/>
+          </a:bodyPr>
+          <a:lstStyle/>
+          <a:p>
+            <a:r>
+              <a:rPr sz="1000" b="0">
+                <a:solidFill>
+                  <a:srgbClr val="53635B"/>
+                </a:solidFill>
+                <a:latin typeface="Aptos"/>
+              </a:rPr>
+              <a:t>Show it as it is</a:t>
+            </a:r>
+          </a:p>
+        </p:txBody>
+      </p:sp>
+      <p:sp>
+        <p:nvSpPr>
+          <p:cNvPr id="37" name="TextBox 36"/>
+          <p:cNvSpPr txBox="1"/>
+          <p:nvPr/>
+        </p:nvSpPr>
+        <p:spPr>
+          <a:xfrm>
+            <a:off x="914400" y="4892040"/>
+            <a:ext cx="9875520" cy="457200"/>
+          </a:xfrm>
+          <a:prstGeom prst="rect">
+            <a:avLst/>
+          </a:prstGeom>
+          <a:noFill/>
+        </p:spPr>
+        <p:txBody>
+          <a:bodyPr wrap="square">
+            <a:noAutofit/>
+          </a:bodyPr>
+          <a:lstStyle/>
+          <a:p>
+            <a:r>
+              <a:rPr sz="1200" b="1">
+                <a:solidFill>
+                  <a:srgbClr val="15201B"/>
+                </a:solidFill>
+                <a:latin typeface="Aptos"/>
+              </a:rPr>
+              <a:t>The point is not the exact technique. The point is that the answer is looked up from a table, not decided inside application code.</a:t>
+            </a:r>
+          </a:p>
+        </p:txBody>
+      </p:sp>
+      <p:sp>
+        <p:nvSpPr>
+          <p:cNvPr id="38" name="TextBox 37"/>
+          <p:cNvSpPr txBox="1"/>
+          <p:nvPr/>
+        </p:nvSpPr>
+        <p:spPr>
+          <a:xfrm>
+            <a:off x="566928" y="6355080"/>
+            <a:ext cx="5669280" cy="274320"/>
+          </a:xfrm>
+          <a:prstGeom prst="rect">
+            <a:avLst/>
+          </a:prstGeom>
+          <a:noFill/>
+        </p:spPr>
+        <p:txBody>
+          <a:bodyPr wrap="square">
+            <a:noAutofit/>
+          </a:bodyPr>
+          <a:lstStyle/>
+          <a:p>
+            <a:r>
+              <a:rPr sz="800" b="0">
+                <a:solidFill>
+                  <a:srgbClr val="53635B"/>
+                </a:solidFill>
+                <a:latin typeface="Aptos"/>
+              </a:rPr>
+              <a:t>Filtering strategies, simplified from the paper / 21</a:t>
+            </a:r>
+          </a:p>
+        </p:txBody>
+      </p:sp>
+    </p:spTree>
+  </p:cSld>
+  <p:clrMapOvr>
+    <a:masterClrMapping/>
+  </p:clrMapOvr>
+</p:sld>
+</file>
+
+<file path=ppt/slides/slide27.xml><?xml version="1.0" encoding="utf-8"?>
+<p:sld xmlns:a="http://schemas.openxmlformats.org/drawingml/2006/main" xmlns:p="http://schemas.openxmlformats.org/presentationml/2006/main" xmlns:r="http://schemas.openxmlformats.org/officeDocument/2006/relationships">
+  <p:cSld>
+    <p:bg>
+      <p:bgPr>
+        <a:solidFill>
+          <a:srgbClr val="F7F3EA"/>
+        </a:solidFill>
+        <a:effectLst/>
+      </p:bgPr>
+    </p:bg>
+    <p:spTree>
+      <p:nvGrpSpPr>
+        <p:cNvPr id="1" name=""/>
+        <p:cNvGrpSpPr/>
+        <p:nvPr/>
+      </p:nvGrpSpPr>
+      <p:grpSpPr/>
+      <p:sp>
+        <p:nvSpPr>
+          <p:cNvPr id="2" name="TextBox 1"/>
+          <p:cNvSpPr txBox="1"/>
+          <p:nvPr/>
+        </p:nvSpPr>
+        <p:spPr>
+          <a:xfrm>
+            <a:off x="548640" y="320040"/>
+            <a:ext cx="2377440" cy="292608"/>
+          </a:xfrm>
+          <a:prstGeom prst="rect">
+            <a:avLst/>
+          </a:prstGeom>
+          <a:noFill/>
+        </p:spPr>
+        <p:txBody>
+          <a:bodyPr wrap="square">
+            <a:noAutofit/>
+          </a:bodyPr>
+          <a:lstStyle/>
+          <a:p>
+            <a:r>
+              <a:rPr sz="1300" b="1">
+                <a:solidFill>
+                  <a:srgbClr val="53635B"/>
+                </a:solidFill>
+                <a:latin typeface="Aptos"/>
+              </a:rPr>
+              <a:t>GRAILS + DAGENTS</a:t>
+            </a:r>
+          </a:p>
+        </p:txBody>
+      </p:sp>
+      <p:sp>
+        <p:nvSpPr>
+          <p:cNvPr id="3" name="TextBox 2"/>
+          <p:cNvSpPr txBox="1"/>
+          <p:nvPr/>
+        </p:nvSpPr>
+        <p:spPr>
+          <a:xfrm>
+            <a:off x="548640" y="658368"/>
+            <a:ext cx="10424160" cy="594360"/>
+          </a:xfrm>
+          <a:prstGeom prst="rect">
+            <a:avLst/>
+          </a:prstGeom>
+          <a:noFill/>
+        </p:spPr>
+        <p:txBody>
+          <a:bodyPr wrap="square">
+            <a:noAutofit/>
+          </a:bodyPr>
+          <a:lstStyle/>
+          <a:p>
+            <a:r>
+              <a:rPr sz="2900" b="1">
+                <a:solidFill>
+                  <a:srgbClr val="15201B"/>
+                </a:solidFill>
+                <a:latin typeface="Aptos"/>
+              </a:rPr>
+              <a:t>GRAILS splits the same way Dagents already splits.</a:t>
+            </a:r>
+          </a:p>
+        </p:txBody>
+      </p:sp>
+      <p:sp>
+        <p:nvSpPr>
+          <p:cNvPr id="4" name="TextBox 3"/>
+          <p:cNvSpPr txBox="1"/>
+          <p:nvPr/>
+        </p:nvSpPr>
+        <p:spPr>
+          <a:xfrm>
+            <a:off x="566928" y="1225296"/>
+            <a:ext cx="9784080" cy="521207"/>
+          </a:xfrm>
+          <a:prstGeom prst="rect">
+            <a:avLst/>
+          </a:prstGeom>
+          <a:noFill/>
+        </p:spPr>
+        <p:txBody>
+          <a:bodyPr wrap="square">
+            <a:noAutofit/>
+          </a:bodyPr>
+          <a:lstStyle/>
+          <a:p>
+            <a:r>
+              <a:rPr sz="1400" b="0">
+                <a:solidFill>
+                  <a:srgbClr val="53635B"/>
+                </a:solidFill>
+                <a:latin typeface="Aptos"/>
+              </a:rPr>
+              <a:t>The Rails are planning. The Guard is runtime. That line is the one Dagents is built on.</a:t>
+            </a:r>
+          </a:p>
+        </p:txBody>
+      </p:sp>
+      <p:sp>
+        <p:nvSpPr>
+          <p:cNvPr id="5" name="Rounded Rectangle 4"/>
+          <p:cNvSpPr/>
+          <p:nvPr/>
+        </p:nvSpPr>
+        <p:spPr>
+          <a:xfrm>
+            <a:off x="777240" y="1691640"/>
+            <a:ext cx="4892040" cy="1463040"/>
+          </a:xfrm>
+          <a:prstGeom prst="roundRect">
+            <a:avLst/>
+          </a:prstGeom>
+          <a:solidFill>
+            <a:srgbClr val="E9E1FA"/>
+          </a:solidFill>
+          <a:ln w="12700">
+            <a:solidFill>
+              <a:srgbClr val="B9C2BB"/>
+            </a:solidFill>
+          </a:ln>
+          <a:effectLst/>
+        </p:spPr>
+        <p:style>
+          <a:lnRef idx="1">
+            <a:schemeClr val="accent1"/>
+          </a:lnRef>
+          <a:fillRef idx="3">
+            <a:schemeClr val="accent1"/>
+          </a:fillRef>
+          <a:effectRef idx="2">
+            <a:schemeClr val="accent1"/>
+          </a:effectRef>
+          <a:fontRef idx="minor">
+            <a:schemeClr val="lt1"/>
+          </a:fontRef>
+        </p:style>
+        <p:txBody>
+          <a:bodyPr rtlCol="0" anchor="ctr"/>
+          <a:lstStyle/>
+          <a:p/>
+        </p:txBody>
+      </p:sp>
+      <p:sp>
+        <p:nvSpPr>
+          <p:cNvPr id="6" name="TextBox 5"/>
+          <p:cNvSpPr txBox="1"/>
+          <p:nvPr/>
+        </p:nvSpPr>
+        <p:spPr>
+          <a:xfrm>
+            <a:off x="941832" y="1837944"/>
+            <a:ext cx="4572000" cy="320040"/>
+          </a:xfrm>
+          <a:prstGeom prst="rect">
+            <a:avLst/>
+          </a:prstGeom>
+          <a:noFill/>
+        </p:spPr>
+        <p:txBody>
+          <a:bodyPr wrap="square">
+            <a:noAutofit/>
+          </a:bodyPr>
+          <a:lstStyle/>
+          <a:p>
+            <a:r>
+              <a:rPr sz="1500" b="1">
+                <a:solidFill>
+                  <a:srgbClr val="15201B"/>
+                </a:solidFill>
+                <a:latin typeface="Aptos"/>
+              </a:rPr>
+              <a:t>Rails = planning</a:t>
+            </a:r>
+          </a:p>
+        </p:txBody>
+      </p:sp>
+      <p:sp>
+        <p:nvSpPr>
+          <p:cNvPr id="7" name="TextBox 6"/>
+          <p:cNvSpPr txBox="1"/>
+          <p:nvPr/>
+        </p:nvSpPr>
+        <p:spPr>
+          <a:xfrm>
+            <a:off x="941832" y="2221992"/>
+            <a:ext cx="4572000" cy="804672"/>
+          </a:xfrm>
+          <a:prstGeom prst="rect">
+            <a:avLst/>
+          </a:prstGeom>
+          <a:noFill/>
+        </p:spPr>
+        <p:txBody>
+          <a:bodyPr wrap="square">
+            <a:noAutofit/>
+          </a:bodyPr>
+          <a:lstStyle/>
+          <a:p>
+            <a:r>
+              <a:rPr sz="1200" b="0">
+                <a:solidFill>
+                  <a:srgbClr val="53635B"/>
+                </a:solidFill>
+                <a:latin typeface="Aptos"/>
+              </a:rPr>
+              <a:t>Work out the protection plan. Pure, typed, repeatable, and no input or output. This belongs in the OCaml layer, beside the dataset and model planners.</a:t>
+            </a:r>
+          </a:p>
+        </p:txBody>
+      </p:sp>
+      <p:sp>
+        <p:nvSpPr>
+          <p:cNvPr id="8" name="Rounded Rectangle 7"/>
+          <p:cNvSpPr/>
+          <p:nvPr/>
+        </p:nvSpPr>
+        <p:spPr>
+          <a:xfrm>
+            <a:off x="6217920" y="1691640"/>
+            <a:ext cx="4892040" cy="1463040"/>
+          </a:xfrm>
+          <a:prstGeom prst="roundRect">
+            <a:avLst/>
+          </a:prstGeom>
+          <a:solidFill>
+            <a:srgbClr val="DCE7F1"/>
+          </a:solidFill>
+          <a:ln w="12700">
+            <a:solidFill>
+              <a:srgbClr val="B9C2BB"/>
+            </a:solidFill>
+          </a:ln>
+          <a:effectLst/>
+        </p:spPr>
+        <p:style>
+          <a:lnRef idx="1">
+            <a:schemeClr val="accent1"/>
+          </a:lnRef>
+          <a:fillRef idx="3">
+            <a:schemeClr val="accent1"/>
+          </a:fillRef>
+          <a:effectRef idx="2">
+            <a:schemeClr val="accent1"/>
+          </a:effectRef>
+          <a:fontRef idx="minor">
+            <a:schemeClr val="lt1"/>
+          </a:fontRef>
+        </p:style>
+        <p:txBody>
+          <a:bodyPr rtlCol="0" anchor="ctr"/>
+          <a:lstStyle/>
+          <a:p/>
+        </p:txBody>
+      </p:sp>
+      <p:sp>
+        <p:nvSpPr>
+          <p:cNvPr id="9" name="TextBox 8"/>
+          <p:cNvSpPr txBox="1"/>
+          <p:nvPr/>
+        </p:nvSpPr>
+        <p:spPr>
+          <a:xfrm>
+            <a:off x="6382512" y="1837944"/>
+            <a:ext cx="4572000" cy="320040"/>
+          </a:xfrm>
+          <a:prstGeom prst="rect">
+            <a:avLst/>
+          </a:prstGeom>
+          <a:noFill/>
+        </p:spPr>
+        <p:txBody>
+          <a:bodyPr wrap="square">
+            <a:noAutofit/>
+          </a:bodyPr>
+          <a:lstStyle/>
+          <a:p>
+            <a:r>
+              <a:rPr sz="1500" b="1">
+                <a:solidFill>
+                  <a:srgbClr val="15201B"/>
+                </a:solidFill>
+                <a:latin typeface="Aptos"/>
+              </a:rPr>
+              <a:t>Guard = runtime</a:t>
+            </a:r>
+          </a:p>
+        </p:txBody>
+      </p:sp>
+      <p:sp>
+        <p:nvSpPr>
+          <p:cNvPr id="10" name="TextBox 9"/>
+          <p:cNvSpPr txBox="1"/>
+          <p:nvPr/>
+        </p:nvSpPr>
+        <p:spPr>
+          <a:xfrm>
+            <a:off x="6382512" y="2221992"/>
+            <a:ext cx="4572000" cy="804672"/>
+          </a:xfrm>
+          <a:prstGeom prst="rect">
+            <a:avLst/>
+          </a:prstGeom>
+          <a:noFill/>
+        </p:spPr>
+        <p:txBody>
+          <a:bodyPr wrap="square">
+            <a:noAutofit/>
+          </a:bodyPr>
+          <a:lstStyle/>
+          <a:p>
+            <a:r>
+              <a:rPr sz="1200" b="0">
+                <a:solidFill>
+                  <a:srgbClr val="53635B"/>
+                </a:solidFill>
+                <a:latin typeface="Aptos"/>
+              </a:rPr>
+              <a:t>Apply the plan to real data and record what was decided. This belongs in the LMA and GMA, where the side effects already are.</a:t>
+            </a:r>
+          </a:p>
+        </p:txBody>
+      </p:sp>
+      <p:sp>
+        <p:nvSpPr>
+          <p:cNvPr id="11" name="Rectangle 10"/>
+          <p:cNvSpPr/>
+          <p:nvPr/>
+        </p:nvSpPr>
+        <p:spPr>
+          <a:xfrm>
+            <a:off x="548640" y="3310128"/>
+            <a:ext cx="2560320" cy="658368"/>
+          </a:xfrm>
+          <a:prstGeom prst="rect">
+            <a:avLst/>
+          </a:prstGeom>
+          <a:solidFill>
+            <a:srgbClr val="F4E8D0"/>
+          </a:solidFill>
+          <a:ln w="12700">
+            <a:solidFill>
+              <a:srgbClr val="B9C2BB"/>
+            </a:solidFill>
+          </a:ln>
+          <a:effectLst/>
+        </p:spPr>
+        <p:style>
+          <a:lnRef idx="1">
+            <a:schemeClr val="accent1"/>
+          </a:lnRef>
+          <a:fillRef idx="3">
+            <a:schemeClr val="accent1"/>
+          </a:fillRef>
+          <a:effectRef idx="2">
+            <a:schemeClr val="accent1"/>
+          </a:effectRef>
+          <a:fontRef idx="minor">
+            <a:schemeClr val="lt1"/>
+          </a:fontRef>
+        </p:style>
+        <p:txBody>
+          <a:bodyPr rtlCol="0" anchor="ctr"/>
+          <a:lstStyle/>
+          <a:p/>
+        </p:txBody>
+      </p:sp>
+      <p:sp>
+        <p:nvSpPr>
+          <p:cNvPr id="12" name="TextBox 11"/>
+          <p:cNvSpPr txBox="1"/>
+          <p:nvPr/>
+        </p:nvSpPr>
+        <p:spPr>
+          <a:xfrm>
+            <a:off x="621792" y="3383280"/>
+            <a:ext cx="2414015" cy="512063"/>
+          </a:xfrm>
+          <a:prstGeom prst="rect">
+            <a:avLst/>
+          </a:prstGeom>
+          <a:noFill/>
+        </p:spPr>
+        <p:txBody>
+          <a:bodyPr wrap="square" anchor="ctr">
+            <a:noAutofit/>
+          </a:bodyPr>
+          <a:lstStyle/>
+          <a:p>
+            <a:r>
+              <a:rPr sz="1100" b="1">
+                <a:solidFill>
+                  <a:srgbClr val="15201B"/>
+                </a:solidFill>
+                <a:latin typeface="Aptos"/>
+              </a:rPr>
+              <a:t>GRAILS part</a:t>
+            </a:r>
+          </a:p>
+        </p:txBody>
+      </p:sp>
+      <p:sp>
+        <p:nvSpPr>
+          <p:cNvPr id="13" name="Rectangle 12"/>
+          <p:cNvSpPr/>
+          <p:nvPr/>
+        </p:nvSpPr>
+        <p:spPr>
+          <a:xfrm>
+            <a:off x="3108960" y="3310128"/>
+            <a:ext cx="3108960" cy="658368"/>
+          </a:xfrm>
+          <a:prstGeom prst="rect">
+            <a:avLst/>
+          </a:prstGeom>
+          <a:solidFill>
+            <a:srgbClr val="F4E8D0"/>
+          </a:solidFill>
+          <a:ln w="12700">
+            <a:solidFill>
+              <a:srgbClr val="B9C2BB"/>
+            </a:solidFill>
+          </a:ln>
+          <a:effectLst/>
+        </p:spPr>
+        <p:style>
+          <a:lnRef idx="1">
+            <a:schemeClr val="accent1"/>
+          </a:lnRef>
+          <a:fillRef idx="3">
+            <a:schemeClr val="accent1"/>
+          </a:fillRef>
+          <a:effectRef idx="2">
+            <a:schemeClr val="accent1"/>
+          </a:effectRef>
+          <a:fontRef idx="minor">
+            <a:schemeClr val="lt1"/>
+          </a:fontRef>
+        </p:style>
+        <p:txBody>
+          <a:bodyPr rtlCol="0" anchor="ctr"/>
+          <a:lstStyle/>
+          <a:p/>
+        </p:txBody>
+      </p:sp>
+      <p:sp>
+        <p:nvSpPr>
+          <p:cNvPr id="14" name="TextBox 13"/>
+          <p:cNvSpPr txBox="1"/>
+          <p:nvPr/>
+        </p:nvSpPr>
+        <p:spPr>
+          <a:xfrm>
+            <a:off x="3182112" y="3383280"/>
+            <a:ext cx="2962656" cy="512063"/>
+          </a:xfrm>
+          <a:prstGeom prst="rect">
+            <a:avLst/>
+          </a:prstGeom>
+          <a:noFill/>
+        </p:spPr>
+        <p:txBody>
+          <a:bodyPr wrap="square" anchor="ctr">
+            <a:noAutofit/>
+          </a:bodyPr>
+          <a:lstStyle/>
+          <a:p>
+            <a:r>
+              <a:rPr sz="1100" b="1">
+                <a:solidFill>
+                  <a:srgbClr val="15201B"/>
+                </a:solidFill>
+                <a:latin typeface="Aptos"/>
+              </a:rPr>
+              <a:t>Where it goes in Dagents</a:t>
+            </a:r>
+          </a:p>
+        </p:txBody>
+      </p:sp>
+      <p:sp>
+        <p:nvSpPr>
+          <p:cNvPr id="15" name="Rectangle 14"/>
+          <p:cNvSpPr/>
+          <p:nvPr/>
+        </p:nvSpPr>
+        <p:spPr>
+          <a:xfrm>
+            <a:off x="6217920" y="3310128"/>
+            <a:ext cx="5303520" cy="658368"/>
+          </a:xfrm>
+          <a:prstGeom prst="rect">
+            <a:avLst/>
+          </a:prstGeom>
+          <a:solidFill>
+            <a:srgbClr val="F4E8D0"/>
+          </a:solidFill>
+          <a:ln w="12700">
+            <a:solidFill>
+              <a:srgbClr val="B9C2BB"/>
+            </a:solidFill>
+          </a:ln>
+          <a:effectLst/>
+        </p:spPr>
+        <p:style>
+          <a:lnRef idx="1">
+            <a:schemeClr val="accent1"/>
+          </a:lnRef>
+          <a:fillRef idx="3">
+            <a:schemeClr val="accent1"/>
+          </a:fillRef>
+          <a:effectRef idx="2">
+            <a:schemeClr val="accent1"/>
+          </a:effectRef>
+          <a:fontRef idx="minor">
+            <a:schemeClr val="lt1"/>
+          </a:fontRef>
+        </p:style>
+        <p:txBody>
+          <a:bodyPr rtlCol="0" anchor="ctr"/>
+          <a:lstStyle/>
+          <a:p/>
+        </p:txBody>
+      </p:sp>
+      <p:sp>
+        <p:nvSpPr>
+          <p:cNvPr id="16" name="TextBox 15"/>
+          <p:cNvSpPr txBox="1"/>
+          <p:nvPr/>
+        </p:nvSpPr>
+        <p:spPr>
+          <a:xfrm>
+            <a:off x="6291072" y="3383280"/>
+            <a:ext cx="5157216" cy="512063"/>
+          </a:xfrm>
+          <a:prstGeom prst="rect">
+            <a:avLst/>
+          </a:prstGeom>
+          <a:noFill/>
+        </p:spPr>
+        <p:txBody>
+          <a:bodyPr wrap="square" anchor="ctr">
+            <a:noAutofit/>
+          </a:bodyPr>
+          <a:lstStyle/>
+          <a:p>
+            <a:r>
+              <a:rPr sz="1100" b="1">
+                <a:solidFill>
+                  <a:srgbClr val="15201B"/>
+                </a:solidFill>
+                <a:latin typeface="Aptos"/>
+              </a:rPr>
+              <a:t>Why there</a:t>
+            </a:r>
+          </a:p>
+        </p:txBody>
+      </p:sp>
+      <p:sp>
+        <p:nvSpPr>
+          <p:cNvPr id="17" name="Rectangle 16"/>
+          <p:cNvSpPr/>
+          <p:nvPr/>
+        </p:nvSpPr>
+        <p:spPr>
+          <a:xfrm>
+            <a:off x="548640" y="3968496"/>
+            <a:ext cx="2560320" cy="658368"/>
+          </a:xfrm>
+          <a:prstGeom prst="rect">
+            <a:avLst/>
+          </a:prstGeom>
+          <a:solidFill>
+            <a:srgbClr val="FFFFFF"/>
+          </a:solidFill>
+          <a:ln w="12700">
+            <a:solidFill>
+              <a:srgbClr val="B9C2BB"/>
+            </a:solidFill>
+          </a:ln>
+          <a:effectLst/>
+        </p:spPr>
+        <p:style>
+          <a:lnRef idx="1">
+            <a:schemeClr val="accent1"/>
+          </a:lnRef>
+          <a:fillRef idx="3">
+            <a:schemeClr val="accent1"/>
+          </a:fillRef>
+          <a:effectRef idx="2">
+            <a:schemeClr val="accent1"/>
+          </a:effectRef>
+          <a:fontRef idx="minor">
+            <a:schemeClr val="lt1"/>
+          </a:fontRef>
+        </p:style>
+        <p:txBody>
+          <a:bodyPr rtlCol="0" anchor="ctr"/>
+          <a:lstStyle/>
+          <a:p/>
+        </p:txBody>
+      </p:sp>
+      <p:sp>
+        <p:nvSpPr>
+          <p:cNvPr id="18" name="TextBox 17"/>
+          <p:cNvSpPr txBox="1"/>
+          <p:nvPr/>
+        </p:nvSpPr>
+        <p:spPr>
+          <a:xfrm>
+            <a:off x="621792" y="4041648"/>
+            <a:ext cx="2414015" cy="512063"/>
+          </a:xfrm>
+          <a:prstGeom prst="rect">
+            <a:avLst/>
+          </a:prstGeom>
+          <a:noFill/>
+        </p:spPr>
+        <p:txBody>
+          <a:bodyPr wrap="square" anchor="ctr">
+            <a:noAutofit/>
+          </a:bodyPr>
+          <a:lstStyle/>
+          <a:p>
+            <a:r>
+              <a:rPr sz="1000" b="0">
+                <a:solidFill>
+                  <a:srgbClr val="53635B"/>
+                </a:solidFill>
+                <a:latin typeface="Aptos"/>
+              </a:rPr>
+              <a:t>Restriction Planner</a:t>
+            </a:r>
+          </a:p>
+        </p:txBody>
+      </p:sp>
+      <p:sp>
+        <p:nvSpPr>
+          <p:cNvPr id="19" name="Rectangle 18"/>
+          <p:cNvSpPr/>
+          <p:nvPr/>
+        </p:nvSpPr>
+        <p:spPr>
+          <a:xfrm>
+            <a:off x="3108960" y="3968496"/>
+            <a:ext cx="3108960" cy="658368"/>
+          </a:xfrm>
+          <a:prstGeom prst="rect">
+            <a:avLst/>
+          </a:prstGeom>
+          <a:solidFill>
+            <a:srgbClr val="FFFFFF"/>
+          </a:solidFill>
+          <a:ln w="12700">
+            <a:solidFill>
+              <a:srgbClr val="B9C2BB"/>
+            </a:solidFill>
+          </a:ln>
+          <a:effectLst/>
+        </p:spPr>
+        <p:style>
+          <a:lnRef idx="1">
+            <a:schemeClr val="accent1"/>
+          </a:lnRef>
+          <a:fillRef idx="3">
+            <a:schemeClr val="accent1"/>
+          </a:fillRef>
+          <a:effectRef idx="2">
+            <a:schemeClr val="accent1"/>
+          </a:effectRef>
+          <a:fontRef idx="minor">
+            <a:schemeClr val="lt1"/>
+          </a:fontRef>
+        </p:style>
+        <p:txBody>
+          <a:bodyPr rtlCol="0" anchor="ctr"/>
+          <a:lstStyle/>
+          <a:p/>
+        </p:txBody>
+      </p:sp>
+      <p:sp>
+        <p:nvSpPr>
+          <p:cNvPr id="20" name="TextBox 19"/>
+          <p:cNvSpPr txBox="1"/>
+          <p:nvPr/>
+        </p:nvSpPr>
+        <p:spPr>
+          <a:xfrm>
+            <a:off x="3182112" y="4041648"/>
+            <a:ext cx="2962656" cy="512063"/>
+          </a:xfrm>
+          <a:prstGeom prst="rect">
+            <a:avLst/>
+          </a:prstGeom>
+          <a:noFill/>
+        </p:spPr>
+        <p:txBody>
+          <a:bodyPr wrap="square" anchor="ctr">
+            <a:noAutofit/>
+          </a:bodyPr>
+          <a:lstStyle/>
+          <a:p>
+            <a:r>
+              <a:rPr sz="1000" b="0">
+                <a:solidFill>
+                  <a:srgbClr val="53635B"/>
+                </a:solidFill>
+                <a:latin typeface="Aptos"/>
+              </a:rPr>
+              <a:t>OCaml planner module</a:t>
+            </a:r>
+          </a:p>
+        </p:txBody>
+      </p:sp>
+      <p:sp>
+        <p:nvSpPr>
+          <p:cNvPr id="21" name="Rectangle 20"/>
+          <p:cNvSpPr/>
+          <p:nvPr/>
+        </p:nvSpPr>
+        <p:spPr>
+          <a:xfrm>
+            <a:off x="6217920" y="3968496"/>
+            <a:ext cx="5303520" cy="658368"/>
+          </a:xfrm>
+          <a:prstGeom prst="rect">
+            <a:avLst/>
+          </a:prstGeom>
+          <a:solidFill>
+            <a:srgbClr val="FFFFFF"/>
+          </a:solidFill>
+          <a:ln w="12700">
+            <a:solidFill>
+              <a:srgbClr val="B9C2BB"/>
+            </a:solidFill>
+          </a:ln>
+          <a:effectLst/>
+        </p:spPr>
+        <p:style>
+          <a:lnRef idx="1">
+            <a:schemeClr val="accent1"/>
+          </a:lnRef>
+          <a:fillRef idx="3">
+            <a:schemeClr val="accent1"/>
+          </a:fillRef>
+          <a:effectRef idx="2">
+            <a:schemeClr val="accent1"/>
+          </a:effectRef>
+          <a:fontRef idx="minor">
+            <a:schemeClr val="lt1"/>
+          </a:fontRef>
+        </p:style>
+        <p:txBody>
+          <a:bodyPr rtlCol="0" anchor="ctr"/>
+          <a:lstStyle/>
+          <a:p/>
+        </p:txBody>
+      </p:sp>
+      <p:sp>
+        <p:nvSpPr>
+          <p:cNvPr id="22" name="TextBox 21"/>
+          <p:cNvSpPr txBox="1"/>
+          <p:nvPr/>
+        </p:nvSpPr>
+        <p:spPr>
+          <a:xfrm>
+            <a:off x="6291072" y="4041648"/>
+            <a:ext cx="5157216" cy="512063"/>
+          </a:xfrm>
+          <a:prstGeom prst="rect">
+            <a:avLst/>
+          </a:prstGeom>
+          <a:noFill/>
+        </p:spPr>
+        <p:txBody>
+          <a:bodyPr wrap="square" anchor="ctr">
+            <a:noAutofit/>
+          </a:bodyPr>
+          <a:lstStyle/>
+          <a:p>
+            <a:r>
+              <a:rPr sz="1000" b="0">
+                <a:solidFill>
+                  <a:srgbClr val="53635B"/>
+                </a:solidFill>
+                <a:latin typeface="Aptos"/>
+              </a:rPr>
+              <a:t>The paper compares it to a database query planner. Dagents already has that layer.</a:t>
+            </a:r>
+          </a:p>
+        </p:txBody>
+      </p:sp>
+      <p:sp>
+        <p:nvSpPr>
+          <p:cNvPr id="23" name="Rectangle 22"/>
+          <p:cNvSpPr/>
+          <p:nvPr/>
+        </p:nvSpPr>
+        <p:spPr>
+          <a:xfrm>
+            <a:off x="548640" y="4626864"/>
+            <a:ext cx="2560320" cy="658368"/>
+          </a:xfrm>
+          <a:prstGeom prst="rect">
+            <a:avLst/>
+          </a:prstGeom>
+          <a:solidFill>
+            <a:srgbClr val="FFFFFF"/>
+          </a:solidFill>
+          <a:ln w="12700">
+            <a:solidFill>
+              <a:srgbClr val="B9C2BB"/>
+            </a:solidFill>
+          </a:ln>
+          <a:effectLst/>
+        </p:spPr>
+        <p:style>
+          <a:lnRef idx="1">
+            <a:schemeClr val="accent1"/>
+          </a:lnRef>
+          <a:fillRef idx="3">
+            <a:schemeClr val="accent1"/>
+          </a:fillRef>
+          <a:effectRef idx="2">
+            <a:schemeClr val="accent1"/>
+          </a:effectRef>
+          <a:fontRef idx="minor">
+            <a:schemeClr val="lt1"/>
+          </a:fontRef>
+        </p:style>
+        <p:txBody>
+          <a:bodyPr rtlCol="0" anchor="ctr"/>
+          <a:lstStyle/>
+          <a:p/>
+        </p:txBody>
+      </p:sp>
+      <p:sp>
+        <p:nvSpPr>
+          <p:cNvPr id="24" name="TextBox 23"/>
+          <p:cNvSpPr txBox="1"/>
+          <p:nvPr/>
+        </p:nvSpPr>
+        <p:spPr>
+          <a:xfrm>
+            <a:off x="621792" y="4700016"/>
+            <a:ext cx="2414015" cy="512063"/>
+          </a:xfrm>
+          <a:prstGeom prst="rect">
+            <a:avLst/>
+          </a:prstGeom>
+          <a:noFill/>
+        </p:spPr>
+        <p:txBody>
+          <a:bodyPr wrap="square" anchor="ctr">
+            <a:noAutofit/>
+          </a:bodyPr>
+          <a:lstStyle/>
+          <a:p>
+            <a:r>
+              <a:rPr sz="1000" b="0">
+                <a:solidFill>
+                  <a:srgbClr val="53635B"/>
+                </a:solidFill>
+                <a:latin typeface="Aptos"/>
+              </a:rPr>
+              <a:t>Ethical Guard</a:t>
+            </a:r>
+          </a:p>
+        </p:txBody>
+      </p:sp>
+      <p:sp>
+        <p:nvSpPr>
+          <p:cNvPr id="25" name="Rectangle 24"/>
+          <p:cNvSpPr/>
+          <p:nvPr/>
+        </p:nvSpPr>
+        <p:spPr>
+          <a:xfrm>
+            <a:off x="3108960" y="4626864"/>
+            <a:ext cx="3108960" cy="658368"/>
+          </a:xfrm>
+          <a:prstGeom prst="rect">
+            <a:avLst/>
+          </a:prstGeom>
+          <a:solidFill>
+            <a:srgbClr val="FFFFFF"/>
+          </a:solidFill>
+          <a:ln w="12700">
+            <a:solidFill>
+              <a:srgbClr val="B9C2BB"/>
+            </a:solidFill>
+          </a:ln>
+          <a:effectLst/>
+        </p:spPr>
+        <p:style>
+          <a:lnRef idx="1">
+            <a:schemeClr val="accent1"/>
+          </a:lnRef>
+          <a:fillRef idx="3">
+            <a:schemeClr val="accent1"/>
+          </a:fillRef>
+          <a:effectRef idx="2">
+            <a:schemeClr val="accent1"/>
+          </a:effectRef>
+          <a:fontRef idx="minor">
+            <a:schemeClr val="lt1"/>
+          </a:fontRef>
+        </p:style>
+        <p:txBody>
+          <a:bodyPr rtlCol="0" anchor="ctr"/>
+          <a:lstStyle/>
+          <a:p/>
+        </p:txBody>
+      </p:sp>
+      <p:sp>
+        <p:nvSpPr>
+          <p:cNvPr id="26" name="TextBox 25"/>
+          <p:cNvSpPr txBox="1"/>
+          <p:nvPr/>
+        </p:nvSpPr>
+        <p:spPr>
+          <a:xfrm>
+            <a:off x="3182112" y="4700016"/>
+            <a:ext cx="2962656" cy="512063"/>
+          </a:xfrm>
+          <a:prstGeom prst="rect">
+            <a:avLst/>
+          </a:prstGeom>
+          <a:noFill/>
+        </p:spPr>
+        <p:txBody>
+          <a:bodyPr wrap="square" anchor="ctr">
+            <a:noAutofit/>
+          </a:bodyPr>
+          <a:lstStyle/>
+          <a:p>
+            <a:r>
+              <a:rPr sz="1000" b="0">
+                <a:solidFill>
+                  <a:srgbClr val="53635B"/>
+                </a:solidFill>
+                <a:latin typeface="Aptos"/>
+              </a:rPr>
+              <a:t>LMA and GMA request path</a:t>
+            </a:r>
+          </a:p>
+        </p:txBody>
+      </p:sp>
+      <p:sp>
+        <p:nvSpPr>
+          <p:cNvPr id="27" name="Rectangle 26"/>
+          <p:cNvSpPr/>
+          <p:nvPr/>
+        </p:nvSpPr>
+        <p:spPr>
+          <a:xfrm>
+            <a:off x="6217920" y="4626864"/>
+            <a:ext cx="5303520" cy="658368"/>
+          </a:xfrm>
+          <a:prstGeom prst="rect">
+            <a:avLst/>
+          </a:prstGeom>
+          <a:solidFill>
+            <a:srgbClr val="FFFFFF"/>
+          </a:solidFill>
+          <a:ln w="12700">
+            <a:solidFill>
+              <a:srgbClr val="B9C2BB"/>
+            </a:solidFill>
+          </a:ln>
+          <a:effectLst/>
+        </p:spPr>
+        <p:style>
+          <a:lnRef idx="1">
+            <a:schemeClr val="accent1"/>
+          </a:lnRef>
+          <a:fillRef idx="3">
+            <a:schemeClr val="accent1"/>
+          </a:fillRef>
+          <a:effectRef idx="2">
+            <a:schemeClr val="accent1"/>
+          </a:effectRef>
+          <a:fontRef idx="minor">
+            <a:schemeClr val="lt1"/>
+          </a:fontRef>
+        </p:style>
+        <p:txBody>
+          <a:bodyPr rtlCol="0" anchor="ctr"/>
+          <a:lstStyle/>
+          <a:p/>
+        </p:txBody>
+      </p:sp>
+      <p:sp>
+        <p:nvSpPr>
+          <p:cNvPr id="28" name="TextBox 27"/>
+          <p:cNvSpPr txBox="1"/>
+          <p:nvPr/>
+        </p:nvSpPr>
+        <p:spPr>
+          <a:xfrm>
+            <a:off x="6291072" y="4700016"/>
+            <a:ext cx="5157216" cy="512063"/>
+          </a:xfrm>
+          <a:prstGeom prst="rect">
+            <a:avLst/>
+          </a:prstGeom>
+          <a:noFill/>
+        </p:spPr>
+        <p:txBody>
+          <a:bodyPr wrap="square" anchor="ctr">
+            <a:noAutofit/>
+          </a:bodyPr>
+          <a:lstStyle/>
+          <a:p>
+            <a:r>
+              <a:rPr sz="1000" b="0">
+                <a:solidFill>
+                  <a:srgbClr val="53635B"/>
+                </a:solidFill>
+                <a:latin typeface="Aptos"/>
+              </a:rPr>
+              <a:t>Enforcement needs real data, real users, and an audit log.</a:t>
+            </a:r>
+          </a:p>
+        </p:txBody>
+      </p:sp>
+      <p:sp>
+        <p:nvSpPr>
+          <p:cNvPr id="29" name="Rectangle 28"/>
+          <p:cNvSpPr/>
+          <p:nvPr/>
+        </p:nvSpPr>
+        <p:spPr>
+          <a:xfrm>
+            <a:off x="548640" y="5285232"/>
+            <a:ext cx="2560320" cy="658368"/>
+          </a:xfrm>
+          <a:prstGeom prst="rect">
+            <a:avLst/>
+          </a:prstGeom>
+          <a:solidFill>
+            <a:srgbClr val="FFFFFF"/>
+          </a:solidFill>
+          <a:ln w="12700">
+            <a:solidFill>
+              <a:srgbClr val="B9C2BB"/>
+            </a:solidFill>
+          </a:ln>
+          <a:effectLst/>
+        </p:spPr>
+        <p:style>
+          <a:lnRef idx="1">
+            <a:schemeClr val="accent1"/>
+          </a:lnRef>
+          <a:fillRef idx="3">
+            <a:schemeClr val="accent1"/>
+          </a:fillRef>
+          <a:effectRef idx="2">
+            <a:schemeClr val="accent1"/>
+          </a:effectRef>
+          <a:fontRef idx="minor">
+            <a:schemeClr val="lt1"/>
+          </a:fontRef>
+        </p:style>
+        <p:txBody>
+          <a:bodyPr rtlCol="0" anchor="ctr"/>
+          <a:lstStyle/>
+          <a:p/>
+        </p:txBody>
+      </p:sp>
+      <p:sp>
+        <p:nvSpPr>
+          <p:cNvPr id="30" name="TextBox 29"/>
+          <p:cNvSpPr txBox="1"/>
+          <p:nvPr/>
+        </p:nvSpPr>
+        <p:spPr>
+          <a:xfrm>
+            <a:off x="621792" y="5358384"/>
+            <a:ext cx="2414015" cy="512063"/>
+          </a:xfrm>
+          <a:prstGeom prst="rect">
+            <a:avLst/>
+          </a:prstGeom>
+          <a:noFill/>
+        </p:spPr>
+        <p:txBody>
+          <a:bodyPr wrap="square" anchor="ctr">
+            <a:noAutofit/>
+          </a:bodyPr>
+          <a:lstStyle/>
+          <a:p>
+            <a:r>
+              <a:rPr sz="1000" b="0">
+                <a:solidFill>
+                  <a:srgbClr val="53635B"/>
+                </a:solidFill>
+                <a:latin typeface="Aptos"/>
+              </a:rPr>
+              <a:t>Rules and regulations</a:t>
+            </a:r>
+          </a:p>
+        </p:txBody>
+      </p:sp>
+      <p:sp>
+        <p:nvSpPr>
+          <p:cNvPr id="31" name="Rectangle 30"/>
+          <p:cNvSpPr/>
+          <p:nvPr/>
+        </p:nvSpPr>
+        <p:spPr>
+          <a:xfrm>
+            <a:off x="3108960" y="5285232"/>
+            <a:ext cx="3108960" cy="658368"/>
+          </a:xfrm>
+          <a:prstGeom prst="rect">
+            <a:avLst/>
+          </a:prstGeom>
+          <a:solidFill>
+            <a:srgbClr val="FFFFFF"/>
+          </a:solidFill>
+          <a:ln w="12700">
+            <a:solidFill>
+              <a:srgbClr val="B9C2BB"/>
+            </a:solidFill>
+          </a:ln>
+          <a:effectLst/>
+        </p:spPr>
+        <p:style>
+          <a:lnRef idx="1">
+            <a:schemeClr val="accent1"/>
+          </a:lnRef>
+          <a:fillRef idx="3">
+            <a:schemeClr val="accent1"/>
+          </a:fillRef>
+          <a:effectRef idx="2">
+            <a:schemeClr val="accent1"/>
+          </a:effectRef>
+          <a:fontRef idx="minor">
+            <a:schemeClr val="lt1"/>
+          </a:fontRef>
+        </p:style>
+        <p:txBody>
+          <a:bodyPr rtlCol="0" anchor="ctr"/>
+          <a:lstStyle/>
+          <a:p/>
+        </p:txBody>
+      </p:sp>
+      <p:sp>
+        <p:nvSpPr>
+          <p:cNvPr id="32" name="TextBox 31"/>
+          <p:cNvSpPr txBox="1"/>
+          <p:nvPr/>
+        </p:nvSpPr>
+        <p:spPr>
+          <a:xfrm>
+            <a:off x="3182112" y="5358384"/>
+            <a:ext cx="2962656" cy="512063"/>
+          </a:xfrm>
+          <a:prstGeom prst="rect">
+            <a:avLst/>
+          </a:prstGeom>
+          <a:noFill/>
+        </p:spPr>
+        <p:txBody>
+          <a:bodyPr wrap="square" anchor="ctr">
+            <a:noAutofit/>
+          </a:bodyPr>
+          <a:lstStyle/>
+          <a:p>
+            <a:r>
+              <a:rPr sz="1000" b="0">
+                <a:solidFill>
+                  <a:srgbClr val="53635B"/>
+                </a:solidFill>
+                <a:latin typeface="Aptos"/>
+              </a:rPr>
+              <a:t>Configuration, not code</a:t>
+            </a:r>
+          </a:p>
+        </p:txBody>
+      </p:sp>
+      <p:sp>
+        <p:nvSpPr>
+          <p:cNvPr id="33" name="Rectangle 32"/>
+          <p:cNvSpPr/>
+          <p:nvPr/>
+        </p:nvSpPr>
+        <p:spPr>
+          <a:xfrm>
+            <a:off x="6217920" y="5285232"/>
+            <a:ext cx="5303520" cy="658368"/>
+          </a:xfrm>
+          <a:prstGeom prst="rect">
+            <a:avLst/>
+          </a:prstGeom>
+          <a:solidFill>
+            <a:srgbClr val="FFFFFF"/>
+          </a:solidFill>
+          <a:ln w="12700">
+            <a:solidFill>
+              <a:srgbClr val="B9C2BB"/>
+            </a:solidFill>
+          </a:ln>
+          <a:effectLst/>
+        </p:spPr>
+        <p:style>
+          <a:lnRef idx="1">
+            <a:schemeClr val="accent1"/>
+          </a:lnRef>
+          <a:fillRef idx="3">
+            <a:schemeClr val="accent1"/>
+          </a:fillRef>
+          <a:effectRef idx="2">
+            <a:schemeClr val="accent1"/>
+          </a:effectRef>
+          <a:fontRef idx="minor">
+            <a:schemeClr val="lt1"/>
+          </a:fontRef>
+        </p:style>
+        <p:txBody>
+          <a:bodyPr rtlCol="0" anchor="ctr"/>
+          <a:lstStyle/>
+          <a:p/>
+        </p:txBody>
+      </p:sp>
+      <p:sp>
+        <p:nvSpPr>
+          <p:cNvPr id="34" name="TextBox 33"/>
+          <p:cNvSpPr txBox="1"/>
+          <p:nvPr/>
+        </p:nvSpPr>
+        <p:spPr>
+          <a:xfrm>
+            <a:off x="6291072" y="5358384"/>
+            <a:ext cx="5157216" cy="512063"/>
+          </a:xfrm>
+          <a:prstGeom prst="rect">
+            <a:avLst/>
+          </a:prstGeom>
+          <a:noFill/>
+        </p:spPr>
+        <p:txBody>
+          <a:bodyPr wrap="square" anchor="ctr">
+            <a:noAutofit/>
+          </a:bodyPr>
+          <a:lstStyle/>
+          <a:p>
+            <a:r>
+              <a:rPr sz="1000" b="0">
+                <a:solidFill>
+                  <a:srgbClr val="53635B"/>
+                </a:solidFill>
+                <a:latin typeface="Aptos"/>
+              </a:rPr>
+              <a:t>Policy changes far more often than the framework does.</a:t>
+            </a:r>
+          </a:p>
+        </p:txBody>
+      </p:sp>
+      <p:sp>
+        <p:nvSpPr>
+          <p:cNvPr id="35" name="TextBox 34"/>
+          <p:cNvSpPr txBox="1"/>
+          <p:nvPr/>
+        </p:nvSpPr>
+        <p:spPr>
+          <a:xfrm>
+            <a:off x="566928" y="6355080"/>
+            <a:ext cx="5669280" cy="274320"/>
+          </a:xfrm>
+          <a:prstGeom prst="rect">
+            <a:avLst/>
+          </a:prstGeom>
+          <a:noFill/>
+        </p:spPr>
+        <p:txBody>
+          <a:bodyPr wrap="square">
+            <a:noAutofit/>
+          </a:bodyPr>
+          <a:lstStyle/>
+          <a:p>
+            <a:r>
+              <a:rPr sz="800" b="0">
+                <a:solidFill>
+                  <a:srgbClr val="53635B"/>
+                </a:solidFill>
+                <a:latin typeface="Aptos"/>
+              </a:rPr>
+              <a:t>Plan first, then enforce / 22</a:t>
+            </a:r>
+          </a:p>
+        </p:txBody>
+      </p:sp>
+    </p:spTree>
+  </p:cSld>
+  <p:clrMapOvr>
+    <a:masterClrMapping/>
+  </p:clrMapOvr>
+</p:sld>
+</file>
+
+<file path=ppt/slides/slide28.xml><?xml version="1.0" encoding="utf-8"?>
+<p:sld xmlns:a="http://schemas.openxmlformats.org/drawingml/2006/main" xmlns:p="http://schemas.openxmlformats.org/presentationml/2006/main" xmlns:r="http://schemas.openxmlformats.org/officeDocument/2006/relationships">
+  <p:cSld>
+    <p:bg>
+      <p:bgPr>
+        <a:solidFill>
+          <a:srgbClr val="F7F3EA"/>
+        </a:solidFill>
+        <a:effectLst/>
+      </p:bgPr>
+    </p:bg>
+    <p:spTree>
+      <p:nvGrpSpPr>
+        <p:cNvPr id="1" name=""/>
+        <p:cNvGrpSpPr/>
+        <p:nvPr/>
+      </p:nvGrpSpPr>
+      <p:grpSpPr/>
+      <p:sp>
+        <p:nvSpPr>
+          <p:cNvPr id="2" name="TextBox 1"/>
+          <p:cNvSpPr txBox="1"/>
+          <p:nvPr/>
+        </p:nvSpPr>
+        <p:spPr>
+          <a:xfrm>
+            <a:off x="548640" y="320040"/>
+            <a:ext cx="2377440" cy="292608"/>
+          </a:xfrm>
+          <a:prstGeom prst="rect">
+            <a:avLst/>
+          </a:prstGeom>
+          <a:noFill/>
+        </p:spPr>
+        <p:txBody>
+          <a:bodyPr wrap="square">
+            <a:noAutofit/>
+          </a:bodyPr>
+          <a:lstStyle/>
+          <a:p>
+            <a:r>
+              <a:rPr sz="1300" b="1">
+                <a:solidFill>
+                  <a:srgbClr val="53635B"/>
+                </a:solidFill>
+                <a:latin typeface="Aptos"/>
+              </a:rPr>
+              <a:t>GRAILS + DAGENTS</a:t>
+            </a:r>
+          </a:p>
+        </p:txBody>
+      </p:sp>
+      <p:sp>
+        <p:nvSpPr>
+          <p:cNvPr id="3" name="TextBox 2"/>
+          <p:cNvSpPr txBox="1"/>
+          <p:nvPr/>
+        </p:nvSpPr>
+        <p:spPr>
+          <a:xfrm>
+            <a:off x="548640" y="658368"/>
+            <a:ext cx="10424160" cy="594360"/>
+          </a:xfrm>
+          <a:prstGeom prst="rect">
+            <a:avLst/>
+          </a:prstGeom>
+          <a:noFill/>
+        </p:spPr>
+        <p:txBody>
+          <a:bodyPr wrap="square">
+            <a:noAutofit/>
+          </a:bodyPr>
+          <a:lstStyle/>
+          <a:p>
+            <a:r>
+              <a:rPr sz="2900" b="1">
+                <a:solidFill>
+                  <a:srgbClr val="15201B"/>
+                </a:solidFill>
+                <a:latin typeface="Aptos"/>
+              </a:rPr>
+              <a:t>Four places the guard has to stand.</a:t>
+            </a:r>
+          </a:p>
+        </p:txBody>
+      </p:sp>
+      <p:sp>
+        <p:nvSpPr>
+          <p:cNvPr id="4" name="TextBox 3"/>
+          <p:cNvSpPr txBox="1"/>
+          <p:nvPr/>
+        </p:nvSpPr>
+        <p:spPr>
+          <a:xfrm>
+            <a:off x="566928" y="1225296"/>
+            <a:ext cx="9784080" cy="521207"/>
+          </a:xfrm>
+          <a:prstGeom prst="rect">
+            <a:avLst/>
+          </a:prstGeom>
+          <a:noFill/>
+        </p:spPr>
+        <p:txBody>
+          <a:bodyPr wrap="square">
+            <a:noAutofit/>
+          </a:bodyPr>
+          <a:lstStyle/>
+          <a:p>
+            <a:r>
+              <a:rPr sz="1400" b="0">
+                <a:solidFill>
+                  <a:srgbClr val="53635B"/>
+                </a:solidFill>
+                <a:latin typeface="Aptos"/>
+              </a:rPr>
+              <a:t>A check at the edge only is a warning label. A check at every boundary is a control.</a:t>
+            </a:r>
+          </a:p>
+        </p:txBody>
+      </p:sp>
+      <p:sp>
+        <p:nvSpPr>
+          <p:cNvPr id="5" name="Rounded Rectangle 4"/>
+          <p:cNvSpPr/>
+          <p:nvPr/>
+        </p:nvSpPr>
+        <p:spPr>
+          <a:xfrm>
+            <a:off x="685800" y="1874519"/>
+            <a:ext cx="2423160" cy="2560320"/>
+          </a:xfrm>
+          <a:prstGeom prst="roundRect">
+            <a:avLst/>
+          </a:prstGeom>
+          <a:solidFill>
+            <a:srgbClr val="DCEBE1"/>
+          </a:solidFill>
+          <a:ln w="12700">
+            <a:solidFill>
+              <a:srgbClr val="B9C2BB"/>
+            </a:solidFill>
+          </a:ln>
+          <a:effectLst/>
+        </p:spPr>
+        <p:style>
+          <a:lnRef idx="1">
+            <a:schemeClr val="accent1"/>
+          </a:lnRef>
+          <a:fillRef idx="3">
+            <a:schemeClr val="accent1"/>
+          </a:fillRef>
+          <a:effectRef idx="2">
+            <a:schemeClr val="accent1"/>
+          </a:effectRef>
+          <a:fontRef idx="minor">
+            <a:schemeClr val="lt1"/>
+          </a:fontRef>
+        </p:style>
+        <p:txBody>
+          <a:bodyPr rtlCol="0" anchor="ctr"/>
+          <a:lstStyle/>
+          <a:p/>
+        </p:txBody>
+      </p:sp>
+      <p:sp>
+        <p:nvSpPr>
+          <p:cNvPr id="6" name="TextBox 5"/>
+          <p:cNvSpPr txBox="1"/>
+          <p:nvPr/>
+        </p:nvSpPr>
+        <p:spPr>
+          <a:xfrm>
+            <a:off x="850392" y="2020824"/>
+            <a:ext cx="2103120" cy="320040"/>
+          </a:xfrm>
+          <a:prstGeom prst="rect">
+            <a:avLst/>
+          </a:prstGeom>
+          <a:noFill/>
+        </p:spPr>
+        <p:txBody>
+          <a:bodyPr wrap="square">
+            <a:noAutofit/>
+          </a:bodyPr>
+          <a:lstStyle/>
+          <a:p>
+            <a:r>
+              <a:rPr sz="1500" b="1">
+                <a:solidFill>
+                  <a:srgbClr val="15201B"/>
+                </a:solidFill>
+                <a:latin typeface="Aptos"/>
+              </a:rPr>
+              <a:t>BEFORE READING</a:t>
+            </a:r>
+          </a:p>
+        </p:txBody>
+      </p:sp>
+      <p:sp>
+        <p:nvSpPr>
+          <p:cNvPr id="7" name="TextBox 6"/>
+          <p:cNvSpPr txBox="1"/>
+          <p:nvPr/>
+        </p:nvSpPr>
+        <p:spPr>
+          <a:xfrm>
+            <a:off x="850392" y="2404872"/>
+            <a:ext cx="2103120" cy="1901951"/>
+          </a:xfrm>
+          <a:prstGeom prst="rect">
+            <a:avLst/>
+          </a:prstGeom>
+          <a:noFill/>
+        </p:spPr>
+        <p:txBody>
+          <a:bodyPr wrap="square">
+            <a:noAutofit/>
+          </a:bodyPr>
+          <a:lstStyle/>
+          <a:p>
+            <a:r>
+              <a:rPr sz="1200" b="0">
+                <a:solidFill>
+                  <a:srgbClr val="53635B"/>
+                </a:solidFill>
+                <a:latin typeface="Aptos"/>
+              </a:rPr>
+              <a:t>The LMA checks the job before it touches a single hospital field. An unapproved job stops here.</a:t>
+            </a:r>
+          </a:p>
+        </p:txBody>
+      </p:sp>
+      <p:sp>
+        <p:nvSpPr>
+          <p:cNvPr id="8" name="TextBox 7"/>
+          <p:cNvSpPr txBox="1"/>
+          <p:nvPr/>
+        </p:nvSpPr>
+        <p:spPr>
+          <a:xfrm>
+            <a:off x="3154679" y="2898648"/>
+            <a:ext cx="320040" cy="521207"/>
+          </a:xfrm>
+          <a:prstGeom prst="rect">
+            <a:avLst/>
+          </a:prstGeom>
+          <a:noFill/>
+        </p:spPr>
+        <p:txBody>
+          <a:bodyPr wrap="square">
+            <a:noAutofit/>
+          </a:bodyPr>
+          <a:lstStyle/>
+          <a:p>
+            <a:r>
+              <a:rPr sz="2800" b="1">
+                <a:solidFill>
+                  <a:srgbClr val="53635B"/>
+                </a:solidFill>
+                <a:latin typeface="Aptos"/>
+              </a:rPr>
+              <a:t>→</a:t>
+            </a:r>
+          </a:p>
+        </p:txBody>
+      </p:sp>
+      <p:sp>
+        <p:nvSpPr>
+          <p:cNvPr id="9" name="Rounded Rectangle 8"/>
+          <p:cNvSpPr/>
+          <p:nvPr/>
+        </p:nvSpPr>
+        <p:spPr>
+          <a:xfrm>
+            <a:off x="3474720" y="1874519"/>
+            <a:ext cx="2423160" cy="2560320"/>
+          </a:xfrm>
+          <a:prstGeom prst="roundRect">
+            <a:avLst/>
+          </a:prstGeom>
+          <a:solidFill>
+            <a:srgbClr val="DCE7F1"/>
+          </a:solidFill>
+          <a:ln w="12700">
+            <a:solidFill>
+              <a:srgbClr val="B9C2BB"/>
+            </a:solidFill>
+          </a:ln>
+          <a:effectLst/>
+        </p:spPr>
+        <p:style>
+          <a:lnRef idx="1">
+            <a:schemeClr val="accent1"/>
+          </a:lnRef>
+          <a:fillRef idx="3">
+            <a:schemeClr val="accent1"/>
+          </a:fillRef>
+          <a:effectRef idx="2">
+            <a:schemeClr val="accent1"/>
+          </a:effectRef>
+          <a:fontRef idx="minor">
+            <a:schemeClr val="lt1"/>
+          </a:fontRef>
+        </p:style>
+        <p:txBody>
+          <a:bodyPr rtlCol="0" anchor="ctr"/>
+          <a:lstStyle/>
+          <a:p/>
+        </p:txBody>
+      </p:sp>
+      <p:sp>
+        <p:nvSpPr>
+          <p:cNvPr id="10" name="TextBox 9"/>
+          <p:cNvSpPr txBox="1"/>
+          <p:nvPr/>
+        </p:nvSpPr>
+        <p:spPr>
+          <a:xfrm>
+            <a:off x="3639312" y="2020824"/>
+            <a:ext cx="2103120" cy="320040"/>
+          </a:xfrm>
+          <a:prstGeom prst="rect">
+            <a:avLst/>
+          </a:prstGeom>
+          <a:noFill/>
+        </p:spPr>
+        <p:txBody>
+          <a:bodyPr wrap="square">
+            <a:noAutofit/>
+          </a:bodyPr>
+          <a:lstStyle/>
+          <a:p>
+            <a:r>
+              <a:rPr sz="1500" b="1">
+                <a:solidFill>
+                  <a:srgbClr val="15201B"/>
+                </a:solidFill>
+                <a:latin typeface="Aptos"/>
+              </a:rPr>
+              <a:t>BEFORE TRAINING</a:t>
+            </a:r>
+          </a:p>
+        </p:txBody>
+      </p:sp>
+      <p:sp>
+        <p:nvSpPr>
+          <p:cNvPr id="11" name="TextBox 10"/>
+          <p:cNvSpPr txBox="1"/>
+          <p:nvPr/>
+        </p:nvSpPr>
+        <p:spPr>
+          <a:xfrm>
+            <a:off x="3639312" y="2404872"/>
+            <a:ext cx="2103120" cy="1901951"/>
+          </a:xfrm>
+          <a:prstGeom prst="rect">
+            <a:avLst/>
+          </a:prstGeom>
+          <a:noFill/>
+        </p:spPr>
+        <p:txBody>
+          <a:bodyPr wrap="square">
+            <a:noAutofit/>
+          </a:bodyPr>
+          <a:lstStyle/>
+          <a:p>
+            <a:r>
+              <a:rPr sz="1200" b="0">
+                <a:solidFill>
+                  <a:srgbClr val="53635B"/>
+                </a:solidFill>
+                <a:latin typeface="Aptos"/>
+              </a:rPr>
+              <a:t>Check the group of patients is large enough and that every field used is on the approved list.</a:t>
+            </a:r>
+          </a:p>
+        </p:txBody>
+      </p:sp>
+      <p:sp>
+        <p:nvSpPr>
+          <p:cNvPr id="12" name="TextBox 11"/>
+          <p:cNvSpPr txBox="1"/>
+          <p:nvPr/>
+        </p:nvSpPr>
+        <p:spPr>
+          <a:xfrm>
+            <a:off x="5943599" y="2898648"/>
+            <a:ext cx="320040" cy="521207"/>
+          </a:xfrm>
+          <a:prstGeom prst="rect">
+            <a:avLst/>
+          </a:prstGeom>
+          <a:noFill/>
+        </p:spPr>
+        <p:txBody>
+          <a:bodyPr wrap="square">
+            <a:noAutofit/>
+          </a:bodyPr>
+          <a:lstStyle/>
+          <a:p>
+            <a:r>
+              <a:rPr sz="2800" b="1">
+                <a:solidFill>
+                  <a:srgbClr val="53635B"/>
+                </a:solidFill>
+                <a:latin typeface="Aptos"/>
+              </a:rPr>
+              <a:t>→</a:t>
+            </a:r>
+          </a:p>
+        </p:txBody>
+      </p:sp>
+      <p:sp>
+        <p:nvSpPr>
+          <p:cNvPr id="13" name="Rounded Rectangle 12"/>
+          <p:cNvSpPr/>
+          <p:nvPr/>
+        </p:nvSpPr>
+        <p:spPr>
+          <a:xfrm>
+            <a:off x="6263640" y="1874519"/>
+            <a:ext cx="2423160" cy="2560320"/>
+          </a:xfrm>
+          <a:prstGeom prst="roundRect">
+            <a:avLst/>
+          </a:prstGeom>
+          <a:solidFill>
+            <a:srgbClr val="F4E8D0"/>
+          </a:solidFill>
+          <a:ln w="12700">
+            <a:solidFill>
+              <a:srgbClr val="B9C2BB"/>
+            </a:solidFill>
+          </a:ln>
+          <a:effectLst/>
+        </p:spPr>
+        <p:style>
+          <a:lnRef idx="1">
+            <a:schemeClr val="accent1"/>
+          </a:lnRef>
+          <a:fillRef idx="3">
+            <a:schemeClr val="accent1"/>
+          </a:fillRef>
+          <a:effectRef idx="2">
+            <a:schemeClr val="accent1"/>
+          </a:effectRef>
+          <a:fontRef idx="minor">
+            <a:schemeClr val="lt1"/>
+          </a:fontRef>
+        </p:style>
+        <p:txBody>
+          <a:bodyPr rtlCol="0" anchor="ctr"/>
+          <a:lstStyle/>
+          <a:p/>
+        </p:txBody>
+      </p:sp>
+      <p:sp>
+        <p:nvSpPr>
+          <p:cNvPr id="14" name="TextBox 13"/>
+          <p:cNvSpPr txBox="1"/>
+          <p:nvPr/>
+        </p:nvSpPr>
+        <p:spPr>
+          <a:xfrm>
+            <a:off x="6428231" y="2020824"/>
+            <a:ext cx="2103120" cy="320040"/>
+          </a:xfrm>
+          <a:prstGeom prst="rect">
+            <a:avLst/>
+          </a:prstGeom>
+          <a:noFill/>
+        </p:spPr>
+        <p:txBody>
+          <a:bodyPr wrap="square">
+            <a:noAutofit/>
+          </a:bodyPr>
+          <a:lstStyle/>
+          <a:p>
+            <a:r>
+              <a:rPr sz="1500" b="1">
+                <a:solidFill>
+                  <a:srgbClr val="15201B"/>
+                </a:solidFill>
+                <a:latin typeface="Aptos"/>
+              </a:rPr>
+              <a:t>BEFORE SENDING</a:t>
+            </a:r>
+          </a:p>
+        </p:txBody>
+      </p:sp>
+      <p:sp>
+        <p:nvSpPr>
+          <p:cNvPr id="15" name="TextBox 14"/>
+          <p:cNvSpPr txBox="1"/>
+          <p:nvPr/>
+        </p:nvSpPr>
+        <p:spPr>
+          <a:xfrm>
+            <a:off x="6428231" y="2404872"/>
+            <a:ext cx="2103120" cy="1901951"/>
+          </a:xfrm>
+          <a:prstGeom prst="rect">
+            <a:avLst/>
+          </a:prstGeom>
+          <a:noFill/>
+        </p:spPr>
+        <p:txBody>
+          <a:bodyPr wrap="square">
+            <a:noAutofit/>
+          </a:bodyPr>
+          <a:lstStyle/>
+          <a:p>
+            <a:r>
+              <a:rPr sz="1200" b="0">
+                <a:solidFill>
+                  <a:srgbClr val="53635B"/>
+                </a:solidFill>
+                <a:latin typeface="Aptos"/>
+              </a:rPr>
+              <a:t>The update and the counts are checked before anything leaves the hospital network.</a:t>
+            </a:r>
+          </a:p>
+        </p:txBody>
+      </p:sp>
+      <p:sp>
+        <p:nvSpPr>
+          <p:cNvPr id="16" name="TextBox 15"/>
+          <p:cNvSpPr txBox="1"/>
+          <p:nvPr/>
+        </p:nvSpPr>
+        <p:spPr>
+          <a:xfrm>
+            <a:off x="8732520" y="2898648"/>
+            <a:ext cx="320040" cy="521207"/>
+          </a:xfrm>
+          <a:prstGeom prst="rect">
+            <a:avLst/>
+          </a:prstGeom>
+          <a:noFill/>
+        </p:spPr>
+        <p:txBody>
+          <a:bodyPr wrap="square">
+            <a:noAutofit/>
+          </a:bodyPr>
+          <a:lstStyle/>
+          <a:p>
+            <a:r>
+              <a:rPr sz="2800" b="1">
+                <a:solidFill>
+                  <a:srgbClr val="53635B"/>
+                </a:solidFill>
+                <a:latin typeface="Aptos"/>
+              </a:rPr>
+              <a:t>→</a:t>
+            </a:r>
+          </a:p>
+        </p:txBody>
+      </p:sp>
+      <p:sp>
+        <p:nvSpPr>
+          <p:cNvPr id="17" name="Rounded Rectangle 16"/>
+          <p:cNvSpPr/>
+          <p:nvPr/>
+        </p:nvSpPr>
+        <p:spPr>
+          <a:xfrm>
+            <a:off x="9052559" y="1874519"/>
+            <a:ext cx="2423160" cy="2560320"/>
+          </a:xfrm>
+          <a:prstGeom prst="roundRect">
+            <a:avLst/>
+          </a:prstGeom>
+          <a:solidFill>
+            <a:srgbClr val="E9E1FA"/>
+          </a:solidFill>
+          <a:ln w="12700">
+            <a:solidFill>
+              <a:srgbClr val="B9C2BB"/>
+            </a:solidFill>
+          </a:ln>
+          <a:effectLst/>
+        </p:spPr>
+        <p:style>
+          <a:lnRef idx="1">
+            <a:schemeClr val="accent1"/>
+          </a:lnRef>
+          <a:fillRef idx="3">
+            <a:schemeClr val="accent1"/>
+          </a:fillRef>
+          <a:effectRef idx="2">
+            <a:schemeClr val="accent1"/>
+          </a:effectRef>
+          <a:fontRef idx="minor">
+            <a:schemeClr val="lt1"/>
+          </a:fontRef>
+        </p:style>
+        <p:txBody>
+          <a:bodyPr rtlCol="0" anchor="ctr"/>
+          <a:lstStyle/>
+          <a:p/>
+        </p:txBody>
+      </p:sp>
+      <p:sp>
+        <p:nvSpPr>
+          <p:cNvPr id="18" name="TextBox 17"/>
+          <p:cNvSpPr txBox="1"/>
+          <p:nvPr/>
+        </p:nvSpPr>
+        <p:spPr>
+          <a:xfrm>
+            <a:off x="9217151" y="2020824"/>
+            <a:ext cx="2103120" cy="320040"/>
+          </a:xfrm>
+          <a:prstGeom prst="rect">
+            <a:avLst/>
+          </a:prstGeom>
+          <a:noFill/>
+        </p:spPr>
+        <p:txBody>
+          <a:bodyPr wrap="square">
+            <a:noAutofit/>
+          </a:bodyPr>
+          <a:lstStyle/>
+          <a:p>
+            <a:r>
+              <a:rPr sz="1500" b="1">
+                <a:solidFill>
+                  <a:srgbClr val="15201B"/>
+                </a:solidFill>
+                <a:latin typeface="Aptos"/>
+              </a:rPr>
+              <a:t>BEFORE RELEASE</a:t>
+            </a:r>
+          </a:p>
+        </p:txBody>
+      </p:sp>
+      <p:sp>
+        <p:nvSpPr>
+          <p:cNvPr id="19" name="TextBox 18"/>
+          <p:cNvSpPr txBox="1"/>
+          <p:nvPr/>
+        </p:nvSpPr>
+        <p:spPr>
+          <a:xfrm>
+            <a:off x="9217151" y="2404872"/>
+            <a:ext cx="2103120" cy="1901951"/>
+          </a:xfrm>
+          <a:prstGeom prst="rect">
+            <a:avLst/>
+          </a:prstGeom>
+          <a:noFill/>
+        </p:spPr>
+        <p:txBody>
+          <a:bodyPr wrap="square">
+            <a:noAutofit/>
+          </a:bodyPr>
+          <a:lstStyle/>
+          <a:p>
+            <a:r>
+              <a:rPr sz="1200" b="0">
+                <a:solidFill>
+                  <a:srgbClr val="53635B"/>
+                </a:solidFill>
+                <a:latin typeface="Aptos"/>
+              </a:rPr>
+              <a:t>The GMA checks the candidate model and its evidence before it signs anything as released.</a:t>
+            </a:r>
+          </a:p>
+        </p:txBody>
+      </p:sp>
+      <p:sp>
+        <p:nvSpPr>
+          <p:cNvPr id="20" name="TextBox 19"/>
+          <p:cNvSpPr txBox="1"/>
+          <p:nvPr/>
+        </p:nvSpPr>
+        <p:spPr>
+          <a:xfrm>
+            <a:off x="914400" y="4800600"/>
+            <a:ext cx="9875520" cy="457200"/>
+          </a:xfrm>
+          <a:prstGeom prst="rect">
+            <a:avLst/>
+          </a:prstGeom>
+          <a:noFill/>
+        </p:spPr>
+        <p:txBody>
+          <a:bodyPr wrap="square">
+            <a:noAutofit/>
+          </a:bodyPr>
+          <a:lstStyle/>
+          <a:p>
+            <a:r>
+              <a:rPr sz="1200" b="1">
+                <a:solidFill>
+                  <a:srgbClr val="15201B"/>
+                </a:solidFill>
+                <a:latin typeface="Aptos"/>
+              </a:rPr>
+              <a:t>Every check writes down what it decided, why, and which round it belonged to.</a:t>
+            </a:r>
+          </a:p>
+        </p:txBody>
+      </p:sp>
+      <p:sp>
+        <p:nvSpPr>
+          <p:cNvPr id="21" name="TextBox 20"/>
+          <p:cNvSpPr txBox="1"/>
+          <p:nvPr/>
+        </p:nvSpPr>
+        <p:spPr>
+          <a:xfrm>
+            <a:off x="566928" y="6355080"/>
+            <a:ext cx="5669280" cy="274320"/>
+          </a:xfrm>
+          <a:prstGeom prst="rect">
+            <a:avLst/>
+          </a:prstGeom>
+          <a:noFill/>
+        </p:spPr>
+        <p:txBody>
+          <a:bodyPr wrap="square">
+            <a:noAutofit/>
+          </a:bodyPr>
+          <a:lstStyle/>
+          <a:p>
+            <a:r>
+              <a:rPr sz="800" b="0">
+                <a:solidFill>
+                  <a:srgbClr val="53635B"/>
+                </a:solidFill>
+                <a:latin typeface="Aptos"/>
+              </a:rPr>
+              <a:t>Where the guard sits / 23</a:t>
+            </a:r>
+          </a:p>
+        </p:txBody>
+      </p:sp>
+    </p:spTree>
+  </p:cSld>
+  <p:clrMapOvr>
+    <a:masterClrMapping/>
+  </p:clrMapOvr>
+</p:sld>
+</file>
+
+<file path=ppt/slides/slide29.xml><?xml version="1.0" encoding="utf-8"?>
+<p:sld xmlns:a="http://schemas.openxmlformats.org/drawingml/2006/main" xmlns:p="http://schemas.openxmlformats.org/presentationml/2006/main" xmlns:r="http://schemas.openxmlformats.org/officeDocument/2006/relationships">
+  <p:cSld>
+    <p:bg>
+      <p:bgPr>
+        <a:solidFill>
+          <a:srgbClr val="F7F3EA"/>
+        </a:solidFill>
+        <a:effectLst/>
+      </p:bgPr>
+    </p:bg>
+    <p:spTree>
+      <p:nvGrpSpPr>
+        <p:cNvPr id="1" name=""/>
+        <p:cNvGrpSpPr/>
+        <p:nvPr/>
+      </p:nvGrpSpPr>
+      <p:grpSpPr/>
+      <p:sp>
+        <p:nvSpPr>
+          <p:cNvPr id="2" name="TextBox 1"/>
+          <p:cNvSpPr txBox="1"/>
+          <p:nvPr/>
+        </p:nvSpPr>
+        <p:spPr>
+          <a:xfrm>
+            <a:off x="548640" y="320040"/>
+            <a:ext cx="2377440" cy="292608"/>
+          </a:xfrm>
+          <a:prstGeom prst="rect">
+            <a:avLst/>
+          </a:prstGeom>
+          <a:noFill/>
+        </p:spPr>
+        <p:txBody>
+          <a:bodyPr wrap="square">
+            <a:noAutofit/>
+          </a:bodyPr>
+          <a:lstStyle/>
+          <a:p>
+            <a:r>
+              <a:rPr sz="1300" b="1">
+                <a:solidFill>
+                  <a:srgbClr val="53635B"/>
+                </a:solidFill>
+                <a:latin typeface="Aptos"/>
+              </a:rPr>
+              <a:t>GRAILS + FEDERATION</a:t>
+            </a:r>
+          </a:p>
+        </p:txBody>
+      </p:sp>
+      <p:sp>
+        <p:nvSpPr>
+          <p:cNvPr id="3" name="TextBox 2"/>
+          <p:cNvSpPr txBox="1"/>
+          <p:nvPr/>
+        </p:nvSpPr>
+        <p:spPr>
+          <a:xfrm>
+            <a:off x="548640" y="658368"/>
+            <a:ext cx="10424160" cy="594360"/>
+          </a:xfrm>
+          <a:prstGeom prst="rect">
+            <a:avLst/>
+          </a:prstGeom>
+          <a:noFill/>
+        </p:spPr>
+        <p:txBody>
+          <a:bodyPr wrap="square">
+            <a:noAutofit/>
+          </a:bodyPr>
+          <a:lstStyle/>
+          <a:p>
+            <a:r>
+              <a:rPr sz="2900" b="1">
+                <a:solidFill>
+                  <a:srgbClr val="15201B"/>
+                </a:solidFill>
+                <a:latin typeface="Aptos"/>
+              </a:rPr>
+              <a:t>GRAILS protects rows. Federation sends updates.</a:t>
+            </a:r>
+          </a:p>
+        </p:txBody>
+      </p:sp>
+      <p:sp>
+        <p:nvSpPr>
+          <p:cNvPr id="4" name="TextBox 3"/>
+          <p:cNvSpPr txBox="1"/>
+          <p:nvPr/>
+        </p:nvSpPr>
+        <p:spPr>
+          <a:xfrm>
+            <a:off x="566928" y="1225296"/>
+            <a:ext cx="9784080" cy="521207"/>
+          </a:xfrm>
+          <a:prstGeom prst="rect">
+            <a:avLst/>
+          </a:prstGeom>
+          <a:noFill/>
+        </p:spPr>
+        <p:txBody>
+          <a:bodyPr wrap="square">
+            <a:noAutofit/>
+          </a:bodyPr>
+          <a:lstStyle/>
+          <a:p>
+            <a:r>
+              <a:rPr sz="1400" b="0">
+                <a:solidFill>
+                  <a:srgbClr val="53635B"/>
+                </a:solidFill>
+                <a:latin typeface="Aptos"/>
+              </a:rPr>
+              <a:t>This is the one place the framework has to be extended for this use case, and it is the contribution this project can make.</a:t>
+            </a:r>
+          </a:p>
+        </p:txBody>
+      </p:sp>
+      <p:sp>
+        <p:nvSpPr>
+          <p:cNvPr id="5" name="Rounded Rectangle 4"/>
+          <p:cNvSpPr/>
+          <p:nvPr/>
+        </p:nvSpPr>
+        <p:spPr>
+          <a:xfrm>
+            <a:off x="777240" y="1691640"/>
+            <a:ext cx="4892040" cy="1325880"/>
+          </a:xfrm>
+          <a:prstGeom prst="roundRect">
+            <a:avLst/>
+          </a:prstGeom>
+          <a:solidFill>
+            <a:srgbClr val="DCEBE1"/>
+          </a:solidFill>
+          <a:ln w="12700">
+            <a:solidFill>
+              <a:srgbClr val="B9C2BB"/>
+            </a:solidFill>
+          </a:ln>
+          <a:effectLst/>
+        </p:spPr>
+        <p:style>
+          <a:lnRef idx="1">
+            <a:schemeClr val="accent1"/>
+          </a:lnRef>
+          <a:fillRef idx="3">
+            <a:schemeClr val="accent1"/>
+          </a:fillRef>
+          <a:effectRef idx="2">
+            <a:schemeClr val="accent1"/>
+          </a:effectRef>
+          <a:fontRef idx="minor">
+            <a:schemeClr val="lt1"/>
+          </a:fontRef>
+        </p:style>
+        <p:txBody>
+          <a:bodyPr rtlCol="0" anchor="ctr"/>
+          <a:lstStyle/>
+          <a:p/>
+        </p:txBody>
+      </p:sp>
+      <p:sp>
+        <p:nvSpPr>
+          <p:cNvPr id="6" name="TextBox 5"/>
+          <p:cNvSpPr txBox="1"/>
+          <p:nvPr/>
+        </p:nvSpPr>
+        <p:spPr>
+          <a:xfrm>
+            <a:off x="941832" y="1837944"/>
+            <a:ext cx="4572000" cy="320040"/>
+          </a:xfrm>
+          <a:prstGeom prst="rect">
+            <a:avLst/>
+          </a:prstGeom>
+          <a:noFill/>
+        </p:spPr>
+        <p:txBody>
+          <a:bodyPr wrap="square">
+            <a:noAutofit/>
+          </a:bodyPr>
+          <a:lstStyle/>
+          <a:p>
+            <a:r>
+              <a:rPr sz="1500" b="1">
+                <a:solidFill>
+                  <a:srgbClr val="15201B"/>
+                </a:solidFill>
+                <a:latin typeface="Aptos"/>
+              </a:rPr>
+              <a:t>What it covers today</a:t>
+            </a:r>
+          </a:p>
+        </p:txBody>
+      </p:sp>
+      <p:sp>
+        <p:nvSpPr>
+          <p:cNvPr id="7" name="TextBox 6"/>
+          <p:cNvSpPr txBox="1"/>
+          <p:nvPr/>
+        </p:nvSpPr>
+        <p:spPr>
+          <a:xfrm>
+            <a:off x="941832" y="2221992"/>
+            <a:ext cx="4572000" cy="667511"/>
+          </a:xfrm>
+          <a:prstGeom prst="rect">
+            <a:avLst/>
+          </a:prstGeom>
+          <a:noFill/>
+        </p:spPr>
+        <p:txBody>
+          <a:bodyPr wrap="square">
+            <a:noAutofit/>
+          </a:bodyPr>
+          <a:lstStyle/>
+          <a:p>
+            <a:r>
+              <a:rPr sz="1200" b="0">
+                <a:solidFill>
+                  <a:srgbClr val="53635B"/>
+                </a:solidFill>
+                <a:latin typeface="Aptos"/>
+              </a:rPr>
+              <a:t>One value, one row, one column, or a whole table. All of them are data you can point at and read.</a:t>
+            </a:r>
+          </a:p>
+        </p:txBody>
+      </p:sp>
+      <p:sp>
+        <p:nvSpPr>
+          <p:cNvPr id="8" name="Rounded Rectangle 7"/>
+          <p:cNvSpPr/>
+          <p:nvPr/>
+        </p:nvSpPr>
+        <p:spPr>
+          <a:xfrm>
+            <a:off x="6217920" y="1691640"/>
+            <a:ext cx="4892040" cy="1325880"/>
+          </a:xfrm>
+          <a:prstGeom prst="roundRect">
+            <a:avLst/>
+          </a:prstGeom>
+          <a:solidFill>
+            <a:srgbClr val="F4E8D0"/>
+          </a:solidFill>
+          <a:ln w="12700">
+            <a:solidFill>
+              <a:srgbClr val="B9C2BB"/>
+            </a:solidFill>
+          </a:ln>
+          <a:effectLst/>
+        </p:spPr>
+        <p:style>
+          <a:lnRef idx="1">
+            <a:schemeClr val="accent1"/>
+          </a:lnRef>
+          <a:fillRef idx="3">
+            <a:schemeClr val="accent1"/>
+          </a:fillRef>
+          <a:effectRef idx="2">
+            <a:schemeClr val="accent1"/>
+          </a:effectRef>
+          <a:fontRef idx="minor">
+            <a:schemeClr val="lt1"/>
+          </a:fontRef>
+        </p:style>
+        <p:txBody>
+          <a:bodyPr rtlCol="0" anchor="ctr"/>
+          <a:lstStyle/>
+          <a:p/>
+        </p:txBody>
+      </p:sp>
+      <p:sp>
+        <p:nvSpPr>
+          <p:cNvPr id="9" name="TextBox 8"/>
+          <p:cNvSpPr txBox="1"/>
+          <p:nvPr/>
+        </p:nvSpPr>
+        <p:spPr>
+          <a:xfrm>
+            <a:off x="6382512" y="1837944"/>
+            <a:ext cx="4572000" cy="320040"/>
+          </a:xfrm>
+          <a:prstGeom prst="rect">
+            <a:avLst/>
+          </a:prstGeom>
+          <a:noFill/>
+        </p:spPr>
+        <p:txBody>
+          <a:bodyPr wrap="square">
+            <a:noAutofit/>
+          </a:bodyPr>
+          <a:lstStyle/>
+          <a:p>
+            <a:r>
+              <a:rPr sz="1500" b="1">
+                <a:solidFill>
+                  <a:srgbClr val="15201B"/>
+                </a:solidFill>
+                <a:latin typeface="Aptos"/>
+              </a:rPr>
+              <a:t>What federation adds</a:t>
+            </a:r>
+          </a:p>
+        </p:txBody>
+      </p:sp>
+      <p:sp>
+        <p:nvSpPr>
+          <p:cNvPr id="10" name="TextBox 9"/>
+          <p:cNvSpPr txBox="1"/>
+          <p:nvPr/>
+        </p:nvSpPr>
+        <p:spPr>
+          <a:xfrm>
+            <a:off x="6382512" y="2221992"/>
+            <a:ext cx="4572000" cy="667511"/>
+          </a:xfrm>
+          <a:prstGeom prst="rect">
+            <a:avLst/>
+          </a:prstGeom>
+          <a:noFill/>
+        </p:spPr>
+        <p:txBody>
+          <a:bodyPr wrap="square">
+            <a:noAutofit/>
+          </a:bodyPr>
+          <a:lstStyle/>
+          <a:p>
+            <a:r>
+              <a:rPr sz="1200" b="0">
+                <a:solidFill>
+                  <a:srgbClr val="53635B"/>
+                </a:solidFill>
+                <a:latin typeface="Aptos"/>
+              </a:rPr>
+              <a:t>A model update is not a row, but it still carries patient signal. It needs to become a fifth thing the rules cover.</a:t>
+            </a:r>
+          </a:p>
+        </p:txBody>
+      </p:sp>
+      <p:sp>
+        <p:nvSpPr>
+          <p:cNvPr id="11" name="Rounded Rectangle 10"/>
+          <p:cNvSpPr/>
+          <p:nvPr/>
+        </p:nvSpPr>
+        <p:spPr>
+          <a:xfrm>
+            <a:off x="777240" y="3246120"/>
+            <a:ext cx="3429000" cy="1417320"/>
+          </a:xfrm>
+          <a:prstGeom prst="roundRect">
+            <a:avLst/>
+          </a:prstGeom>
+          <a:solidFill>
+            <a:srgbClr val="E9E1FA"/>
+          </a:solidFill>
+          <a:ln w="12700">
+            <a:solidFill>
+              <a:srgbClr val="B9C2BB"/>
+            </a:solidFill>
+          </a:ln>
+          <a:effectLst/>
+        </p:spPr>
+        <p:style>
+          <a:lnRef idx="1">
+            <a:schemeClr val="accent1"/>
+          </a:lnRef>
+          <a:fillRef idx="3">
+            <a:schemeClr val="accent1"/>
+          </a:fillRef>
+          <a:effectRef idx="2">
+            <a:schemeClr val="accent1"/>
+          </a:effectRef>
+          <a:fontRef idx="minor">
+            <a:schemeClr val="lt1"/>
+          </a:fontRef>
+        </p:style>
+        <p:txBody>
+          <a:bodyPr rtlCol="0" anchor="ctr"/>
+          <a:lstStyle/>
+          <a:p/>
+        </p:txBody>
+      </p:sp>
+      <p:sp>
+        <p:nvSpPr>
+          <p:cNvPr id="12" name="TextBox 11"/>
+          <p:cNvSpPr txBox="1"/>
+          <p:nvPr/>
+        </p:nvSpPr>
+        <p:spPr>
+          <a:xfrm>
+            <a:off x="941832" y="3392424"/>
+            <a:ext cx="3108960" cy="320040"/>
+          </a:xfrm>
+          <a:prstGeom prst="rect">
+            <a:avLst/>
+          </a:prstGeom>
+          <a:noFill/>
+        </p:spPr>
+        <p:txBody>
+          <a:bodyPr wrap="square">
+            <a:noAutofit/>
+          </a:bodyPr>
+          <a:lstStyle/>
+          <a:p>
+            <a:r>
+              <a:rPr sz="1500" b="1">
+                <a:solidFill>
+                  <a:srgbClr val="15201B"/>
+                </a:solidFill>
+                <a:latin typeface="Aptos"/>
+              </a:rPr>
+              <a:t>Sensitivity becomes</a:t>
+            </a:r>
+          </a:p>
+        </p:txBody>
+      </p:sp>
+      <p:sp>
+        <p:nvSpPr>
+          <p:cNvPr id="13" name="TextBox 12"/>
+          <p:cNvSpPr txBox="1"/>
+          <p:nvPr/>
+        </p:nvSpPr>
+        <p:spPr>
+          <a:xfrm>
+            <a:off x="941832" y="3776472"/>
+            <a:ext cx="3108960" cy="758952"/>
+          </a:xfrm>
+          <a:prstGeom prst="rect">
+            <a:avLst/>
+          </a:prstGeom>
+          <a:noFill/>
+        </p:spPr>
+        <p:txBody>
+          <a:bodyPr wrap="square">
+            <a:noAutofit/>
+          </a:bodyPr>
+          <a:lstStyle/>
+          <a:p>
+            <a:r>
+              <a:rPr sz="1200" b="0">
+                <a:solidFill>
+                  <a:srgbClr val="53635B"/>
+                </a:solidFill>
+                <a:latin typeface="Aptos"/>
+              </a:rPr>
+              <a:t>How much patient signal an update can carry out of the hospital.</a:t>
+            </a:r>
+          </a:p>
+        </p:txBody>
+      </p:sp>
+      <p:sp>
+        <p:nvSpPr>
+          <p:cNvPr id="14" name="Rounded Rectangle 13"/>
+          <p:cNvSpPr/>
+          <p:nvPr/>
+        </p:nvSpPr>
+        <p:spPr>
+          <a:xfrm>
+            <a:off x="4434840" y="3246120"/>
+            <a:ext cx="3429000" cy="1417320"/>
+          </a:xfrm>
+          <a:prstGeom prst="roundRect">
+            <a:avLst/>
+          </a:prstGeom>
+          <a:solidFill>
+            <a:srgbClr val="DCE7F1"/>
+          </a:solidFill>
+          <a:ln w="12700">
+            <a:solidFill>
+              <a:srgbClr val="B9C2BB"/>
+            </a:solidFill>
+          </a:ln>
+          <a:effectLst/>
+        </p:spPr>
+        <p:style>
+          <a:lnRef idx="1">
+            <a:schemeClr val="accent1"/>
+          </a:lnRef>
+          <a:fillRef idx="3">
+            <a:schemeClr val="accent1"/>
+          </a:fillRef>
+          <a:effectRef idx="2">
+            <a:schemeClr val="accent1"/>
+          </a:effectRef>
+          <a:fontRef idx="minor">
+            <a:schemeClr val="lt1"/>
+          </a:fontRef>
+        </p:style>
+        <p:txBody>
+          <a:bodyPr rtlCol="0" anchor="ctr"/>
+          <a:lstStyle/>
+          <a:p/>
+        </p:txBody>
+      </p:sp>
+      <p:sp>
+        <p:nvSpPr>
+          <p:cNvPr id="15" name="TextBox 14"/>
+          <p:cNvSpPr txBox="1"/>
+          <p:nvPr/>
+        </p:nvSpPr>
+        <p:spPr>
+          <a:xfrm>
+            <a:off x="4599431" y="3392424"/>
+            <a:ext cx="3108960" cy="320040"/>
+          </a:xfrm>
+          <a:prstGeom prst="rect">
+            <a:avLst/>
+          </a:prstGeom>
+          <a:noFill/>
+        </p:spPr>
+        <p:txBody>
+          <a:bodyPr wrap="square">
+            <a:noAutofit/>
+          </a:bodyPr>
+          <a:lstStyle/>
+          <a:p>
+            <a:r>
+              <a:rPr sz="1500" b="1">
+                <a:solidFill>
+                  <a:srgbClr val="15201B"/>
+                </a:solidFill>
+                <a:latin typeface="Aptos"/>
+              </a:rPr>
+              <a:t>Trust becomes</a:t>
+            </a:r>
+          </a:p>
+        </p:txBody>
+      </p:sp>
+      <p:sp>
+        <p:nvSpPr>
+          <p:cNvPr id="16" name="TextBox 15"/>
+          <p:cNvSpPr txBox="1"/>
+          <p:nvPr/>
+        </p:nvSpPr>
+        <p:spPr>
+          <a:xfrm>
+            <a:off x="4599431" y="3776472"/>
+            <a:ext cx="3108960" cy="758952"/>
+          </a:xfrm>
+          <a:prstGeom prst="rect">
+            <a:avLst/>
+          </a:prstGeom>
+          <a:noFill/>
+        </p:spPr>
+        <p:txBody>
+          <a:bodyPr wrap="square">
+            <a:noAutofit/>
+          </a:bodyPr>
+          <a:lstStyle/>
+          <a:p>
+            <a:r>
+              <a:rPr sz="1200" b="0">
+                <a:solidFill>
+                  <a:srgbClr val="53635B"/>
+                </a:solidFill>
+                <a:latin typeface="Aptos"/>
+              </a:rPr>
+              <a:t>The receiving site and the coordinator, not only a named person.</a:t>
+            </a:r>
+          </a:p>
+        </p:txBody>
+      </p:sp>
+      <p:sp>
+        <p:nvSpPr>
+          <p:cNvPr id="17" name="Rounded Rectangle 16"/>
+          <p:cNvSpPr/>
+          <p:nvPr/>
+        </p:nvSpPr>
+        <p:spPr>
+          <a:xfrm>
+            <a:off x="8092440" y="3246120"/>
+            <a:ext cx="3017520" cy="1417320"/>
+          </a:xfrm>
+          <a:prstGeom prst="roundRect">
+            <a:avLst/>
+          </a:prstGeom>
+          <a:solidFill>
+            <a:srgbClr val="DCEBE1"/>
+          </a:solidFill>
+          <a:ln w="12700">
+            <a:solidFill>
+              <a:srgbClr val="B9C2BB"/>
+            </a:solidFill>
+          </a:ln>
+          <a:effectLst/>
+        </p:spPr>
+        <p:style>
+          <a:lnRef idx="1">
+            <a:schemeClr val="accent1"/>
+          </a:lnRef>
+          <a:fillRef idx="3">
+            <a:schemeClr val="accent1"/>
+          </a:fillRef>
+          <a:effectRef idx="2">
+            <a:schemeClr val="accent1"/>
+          </a:effectRef>
+          <a:fontRef idx="minor">
+            <a:schemeClr val="lt1"/>
+          </a:fontRef>
+        </p:style>
+        <p:txBody>
+          <a:bodyPr rtlCol="0" anchor="ctr"/>
+          <a:lstStyle/>
+          <a:p/>
+        </p:txBody>
+      </p:sp>
+      <p:sp>
+        <p:nvSpPr>
+          <p:cNvPr id="18" name="TextBox 17"/>
+          <p:cNvSpPr txBox="1"/>
+          <p:nvPr/>
+        </p:nvSpPr>
+        <p:spPr>
+          <a:xfrm>
+            <a:off x="8257031" y="3392424"/>
+            <a:ext cx="2697479" cy="320040"/>
+          </a:xfrm>
+          <a:prstGeom prst="rect">
+            <a:avLst/>
+          </a:prstGeom>
+          <a:noFill/>
+        </p:spPr>
+        <p:txBody>
+          <a:bodyPr wrap="square">
+            <a:noAutofit/>
+          </a:bodyPr>
+          <a:lstStyle/>
+          <a:p>
+            <a:r>
+              <a:rPr sz="1500" b="1">
+                <a:solidFill>
+                  <a:srgbClr val="15201B"/>
+                </a:solidFill>
+                <a:latin typeface="Aptos"/>
+              </a:rPr>
+              <a:t>Action becomes</a:t>
+            </a:r>
+          </a:p>
+        </p:txBody>
+      </p:sp>
+      <p:sp>
+        <p:nvSpPr>
+          <p:cNvPr id="19" name="TextBox 18"/>
+          <p:cNvSpPr txBox="1"/>
+          <p:nvPr/>
+        </p:nvSpPr>
+        <p:spPr>
+          <a:xfrm>
+            <a:off x="8257031" y="3776472"/>
+            <a:ext cx="2697479" cy="758952"/>
+          </a:xfrm>
+          <a:prstGeom prst="rect">
+            <a:avLst/>
+          </a:prstGeom>
+          <a:noFill/>
+        </p:spPr>
+        <p:txBody>
+          <a:bodyPr wrap="square">
+            <a:noAutofit/>
+          </a:bodyPr>
+          <a:lstStyle/>
+          <a:p>
+            <a:r>
+              <a:rPr sz="1200" b="0">
+                <a:solidFill>
+                  <a:srgbClr val="53635B"/>
+                </a:solidFill>
+                <a:latin typeface="Aptos"/>
+              </a:rPr>
+              <a:t>Limit the contribution, require enough sites, add noise, or refuse to send.</a:t>
+            </a:r>
+          </a:p>
+        </p:txBody>
+      </p:sp>
+      <p:sp>
+        <p:nvSpPr>
+          <p:cNvPr id="20" name="TextBox 19"/>
+          <p:cNvSpPr txBox="1"/>
+          <p:nvPr/>
+        </p:nvSpPr>
+        <p:spPr>
+          <a:xfrm>
+            <a:off x="914400" y="4892040"/>
+            <a:ext cx="9875520" cy="457200"/>
+          </a:xfrm>
+          <a:prstGeom prst="rect">
+            <a:avLst/>
+          </a:prstGeom>
+          <a:noFill/>
+        </p:spPr>
+        <p:txBody>
+          <a:bodyPr wrap="square">
+            <a:noAutofit/>
+          </a:bodyPr>
+          <a:lstStyle/>
+          <a:p>
+            <a:r>
+              <a:rPr sz="1200" b="1">
+                <a:solidFill>
+                  <a:srgbClr val="15201B"/>
+                </a:solidFill>
+                <a:latin typeface="Aptos"/>
+              </a:rPr>
+              <a:t>This is a real extension, not a restatement of the paper.</a:t>
+            </a:r>
+          </a:p>
+        </p:txBody>
+      </p:sp>
+      <p:sp>
+        <p:nvSpPr>
+          <p:cNvPr id="21" name="TextBox 20"/>
+          <p:cNvSpPr txBox="1"/>
+          <p:nvPr/>
+        </p:nvSpPr>
+        <p:spPr>
+          <a:xfrm>
+            <a:off x="566928" y="6355080"/>
+            <a:ext cx="5669280" cy="274320"/>
+          </a:xfrm>
+          <a:prstGeom prst="rect">
+            <a:avLst/>
+          </a:prstGeom>
+          <a:noFill/>
+        </p:spPr>
+        <p:txBody>
+          <a:bodyPr wrap="square">
+            <a:noAutofit/>
+          </a:bodyPr>
+          <a:lstStyle/>
+          <a:p>
+            <a:r>
+              <a:rPr sz="800" b="0">
+                <a:solidFill>
+                  <a:srgbClr val="53635B"/>
+                </a:solidFill>
+                <a:latin typeface="Aptos"/>
+              </a:rPr>
+              <a:t>Extending the rules to model updates / 24</a:t>
+            </a:r>
+          </a:p>
+        </p:txBody>
+      </p:sp>
+    </p:spTree>
   </p:cSld>
   <p:clrMapOvr>
     <a:masterClrMapping/>
@@ -20496,6 +27190,752 @@
 </p:sld>
 </file>
 
+<file path=ppt/slides/slide30.xml><?xml version="1.0" encoding="utf-8"?>
+<p:sld xmlns:a="http://schemas.openxmlformats.org/drawingml/2006/main" xmlns:p="http://schemas.openxmlformats.org/presentationml/2006/main" xmlns:r="http://schemas.openxmlformats.org/officeDocument/2006/relationships">
+  <p:cSld>
+    <p:bg>
+      <p:bgPr>
+        <a:solidFill>
+          <a:srgbClr val="F7F3EA"/>
+        </a:solidFill>
+        <a:effectLst/>
+      </p:bgPr>
+    </p:bg>
+    <p:spTree>
+      <p:nvGrpSpPr>
+        <p:cNvPr id="1" name=""/>
+        <p:cNvGrpSpPr/>
+        <p:nvPr/>
+      </p:nvGrpSpPr>
+      <p:grpSpPr/>
+      <p:sp>
+        <p:nvSpPr>
+          <p:cNvPr id="2" name="TextBox 1"/>
+          <p:cNvSpPr txBox="1"/>
+          <p:nvPr/>
+        </p:nvSpPr>
+        <p:spPr>
+          <a:xfrm>
+            <a:off x="548640" y="320040"/>
+            <a:ext cx="2377440" cy="292608"/>
+          </a:xfrm>
+          <a:prstGeom prst="rect">
+            <a:avLst/>
+          </a:prstGeom>
+          <a:noFill/>
+        </p:spPr>
+        <p:txBody>
+          <a:bodyPr wrap="square">
+            <a:noAutofit/>
+          </a:bodyPr>
+          <a:lstStyle/>
+          <a:p>
+            <a:r>
+              <a:rPr sz="1300" b="1">
+                <a:solidFill>
+                  <a:srgbClr val="53635B"/>
+                </a:solidFill>
+                <a:latin typeface="Aptos"/>
+              </a:rPr>
+              <a:t>GRAILS</a:t>
+            </a:r>
+          </a:p>
+        </p:txBody>
+      </p:sp>
+      <p:sp>
+        <p:nvSpPr>
+          <p:cNvPr id="3" name="TextBox 2"/>
+          <p:cNvSpPr txBox="1"/>
+          <p:nvPr/>
+        </p:nvSpPr>
+        <p:spPr>
+          <a:xfrm>
+            <a:off x="548640" y="658368"/>
+            <a:ext cx="10424160" cy="594360"/>
+          </a:xfrm>
+          <a:prstGeom prst="rect">
+            <a:avLst/>
+          </a:prstGeom>
+          <a:noFill/>
+        </p:spPr>
+        <p:txBody>
+          <a:bodyPr wrap="square">
+            <a:noAutofit/>
+          </a:bodyPr>
+          <a:lstStyle/>
+          <a:p>
+            <a:r>
+              <a:rPr sz="2900" b="1">
+                <a:solidFill>
+                  <a:srgbClr val="15201B"/>
+                </a:solidFill>
+                <a:latin typeface="Aptos"/>
+              </a:rPr>
+              <a:t>One request, from start to finish.</a:t>
+            </a:r>
+          </a:p>
+        </p:txBody>
+      </p:sp>
+      <p:sp>
+        <p:nvSpPr>
+          <p:cNvPr id="4" name="TextBox 3"/>
+          <p:cNvSpPr txBox="1"/>
+          <p:nvPr/>
+        </p:nvSpPr>
+        <p:spPr>
+          <a:xfrm>
+            <a:off x="566928" y="1225296"/>
+            <a:ext cx="9784080" cy="521207"/>
+          </a:xfrm>
+          <a:prstGeom prst="rect">
+            <a:avLst/>
+          </a:prstGeom>
+          <a:noFill/>
+        </p:spPr>
+        <p:txBody>
+          <a:bodyPr wrap="square">
+            <a:noAutofit/>
+          </a:bodyPr>
+          <a:lstStyle/>
+          <a:p>
+            <a:r>
+              <a:rPr sz="1400" b="0">
+                <a:solidFill>
+                  <a:srgbClr val="53635B"/>
+                </a:solidFill>
+                <a:latin typeface="Aptos"/>
+              </a:rPr>
+              <a:t>A researcher at one hospital asks for stroke cases so they can check a model.</a:t>
+            </a:r>
+          </a:p>
+        </p:txBody>
+      </p:sp>
+      <p:sp>
+        <p:nvSpPr>
+          <p:cNvPr id="5" name="Rounded Rectangle 4"/>
+          <p:cNvSpPr/>
+          <p:nvPr/>
+        </p:nvSpPr>
+        <p:spPr>
+          <a:xfrm>
+            <a:off x="685800" y="1874519"/>
+            <a:ext cx="2423160" cy="2560320"/>
+          </a:xfrm>
+          <a:prstGeom prst="roundRect">
+            <a:avLst/>
+          </a:prstGeom>
+          <a:solidFill>
+            <a:srgbClr val="DCEBE1"/>
+          </a:solidFill>
+          <a:ln w="12700">
+            <a:solidFill>
+              <a:srgbClr val="B9C2BB"/>
+            </a:solidFill>
+          </a:ln>
+          <a:effectLst/>
+        </p:spPr>
+        <p:style>
+          <a:lnRef idx="1">
+            <a:schemeClr val="accent1"/>
+          </a:lnRef>
+          <a:fillRef idx="3">
+            <a:schemeClr val="accent1"/>
+          </a:fillRef>
+          <a:effectRef idx="2">
+            <a:schemeClr val="accent1"/>
+          </a:effectRef>
+          <a:fontRef idx="minor">
+            <a:schemeClr val="lt1"/>
+          </a:fontRef>
+        </p:style>
+        <p:txBody>
+          <a:bodyPr rtlCol="0" anchor="ctr"/>
+          <a:lstStyle/>
+          <a:p/>
+        </p:txBody>
+      </p:sp>
+      <p:sp>
+        <p:nvSpPr>
+          <p:cNvPr id="6" name="TextBox 5"/>
+          <p:cNvSpPr txBox="1"/>
+          <p:nvPr/>
+        </p:nvSpPr>
+        <p:spPr>
+          <a:xfrm>
+            <a:off x="850392" y="2020824"/>
+            <a:ext cx="2103120" cy="320040"/>
+          </a:xfrm>
+          <a:prstGeom prst="rect">
+            <a:avLst/>
+          </a:prstGeom>
+          <a:noFill/>
+        </p:spPr>
+        <p:txBody>
+          <a:bodyPr wrap="square">
+            <a:noAutofit/>
+          </a:bodyPr>
+          <a:lstStyle/>
+          <a:p>
+            <a:r>
+              <a:rPr sz="1500" b="1">
+                <a:solidFill>
+                  <a:srgbClr val="15201B"/>
+                </a:solidFill>
+                <a:latin typeface="Aptos"/>
+              </a:rPr>
+              <a:t>WHO IS ASKING</a:t>
+            </a:r>
+          </a:p>
+        </p:txBody>
+      </p:sp>
+      <p:sp>
+        <p:nvSpPr>
+          <p:cNvPr id="7" name="TextBox 6"/>
+          <p:cNvSpPr txBox="1"/>
+          <p:nvPr/>
+        </p:nvSpPr>
+        <p:spPr>
+          <a:xfrm>
+            <a:off x="850392" y="2404872"/>
+            <a:ext cx="2103120" cy="1901951"/>
+          </a:xfrm>
+          <a:prstGeom prst="rect">
+            <a:avLst/>
+          </a:prstGeom>
+          <a:noFill/>
+        </p:spPr>
+        <p:txBody>
+          <a:bodyPr wrap="square">
+            <a:noAutofit/>
+          </a:bodyPr>
+          <a:lstStyle/>
+          <a:p>
+            <a:r>
+              <a:rPr sz="1200" b="0">
+                <a:solidFill>
+                  <a:srgbClr val="53635B"/>
+                </a:solidFill>
+                <a:latin typeface="Aptos"/>
+              </a:rPr>
+              <a:t>A verified staff account, a named study, an approved purpose, and a clean record. Trust comes out as medium.</a:t>
+            </a:r>
+          </a:p>
+        </p:txBody>
+      </p:sp>
+      <p:sp>
+        <p:nvSpPr>
+          <p:cNvPr id="8" name="TextBox 7"/>
+          <p:cNvSpPr txBox="1"/>
+          <p:nvPr/>
+        </p:nvSpPr>
+        <p:spPr>
+          <a:xfrm>
+            <a:off x="3154679" y="2898648"/>
+            <a:ext cx="320040" cy="521207"/>
+          </a:xfrm>
+          <a:prstGeom prst="rect">
+            <a:avLst/>
+          </a:prstGeom>
+          <a:noFill/>
+        </p:spPr>
+        <p:txBody>
+          <a:bodyPr wrap="square">
+            <a:noAutofit/>
+          </a:bodyPr>
+          <a:lstStyle/>
+          <a:p>
+            <a:r>
+              <a:rPr sz="2800" b="1">
+                <a:solidFill>
+                  <a:srgbClr val="53635B"/>
+                </a:solidFill>
+                <a:latin typeface="Aptos"/>
+              </a:rPr>
+              <a:t>→</a:t>
+            </a:r>
+          </a:p>
+        </p:txBody>
+      </p:sp>
+      <p:sp>
+        <p:nvSpPr>
+          <p:cNvPr id="9" name="Rounded Rectangle 8"/>
+          <p:cNvSpPr/>
+          <p:nvPr/>
+        </p:nvSpPr>
+        <p:spPr>
+          <a:xfrm>
+            <a:off x="3474720" y="1874519"/>
+            <a:ext cx="2423160" cy="2560320"/>
+          </a:xfrm>
+          <a:prstGeom prst="roundRect">
+            <a:avLst/>
+          </a:prstGeom>
+          <a:solidFill>
+            <a:srgbClr val="DCE7F1"/>
+          </a:solidFill>
+          <a:ln w="12700">
+            <a:solidFill>
+              <a:srgbClr val="B9C2BB"/>
+            </a:solidFill>
+          </a:ln>
+          <a:effectLst/>
+        </p:spPr>
+        <p:style>
+          <a:lnRef idx="1">
+            <a:schemeClr val="accent1"/>
+          </a:lnRef>
+          <a:fillRef idx="3">
+            <a:schemeClr val="accent1"/>
+          </a:fillRef>
+          <a:effectRef idx="2">
+            <a:schemeClr val="accent1"/>
+          </a:effectRef>
+          <a:fontRef idx="minor">
+            <a:schemeClr val="lt1"/>
+          </a:fontRef>
+        </p:style>
+        <p:txBody>
+          <a:bodyPr rtlCol="0" anchor="ctr"/>
+          <a:lstStyle/>
+          <a:p/>
+        </p:txBody>
+      </p:sp>
+      <p:sp>
+        <p:nvSpPr>
+          <p:cNvPr id="10" name="TextBox 9"/>
+          <p:cNvSpPr txBox="1"/>
+          <p:nvPr/>
+        </p:nvSpPr>
+        <p:spPr>
+          <a:xfrm>
+            <a:off x="3639312" y="2020824"/>
+            <a:ext cx="2103120" cy="320040"/>
+          </a:xfrm>
+          <a:prstGeom prst="rect">
+            <a:avLst/>
+          </a:prstGeom>
+          <a:noFill/>
+        </p:spPr>
+        <p:txBody>
+          <a:bodyPr wrap="square">
+            <a:noAutofit/>
+          </a:bodyPr>
+          <a:lstStyle/>
+          <a:p>
+            <a:r>
+              <a:rPr sz="1500" b="1">
+                <a:solidFill>
+                  <a:srgbClr val="15201B"/>
+                </a:solidFill>
+                <a:latin typeface="Aptos"/>
+              </a:rPr>
+              <a:t>WHAT THEY WANT</a:t>
+            </a:r>
+          </a:p>
+        </p:txBody>
+      </p:sp>
+      <p:sp>
+        <p:nvSpPr>
+          <p:cNvPr id="11" name="TextBox 10"/>
+          <p:cNvSpPr txBox="1"/>
+          <p:nvPr/>
+        </p:nvSpPr>
+        <p:spPr>
+          <a:xfrm>
+            <a:off x="3639312" y="2404872"/>
+            <a:ext cx="2103120" cy="1901951"/>
+          </a:xfrm>
+          <a:prstGeom prst="rect">
+            <a:avLst/>
+          </a:prstGeom>
+          <a:noFill/>
+        </p:spPr>
+        <p:txBody>
+          <a:bodyPr wrap="square">
+            <a:noAutofit/>
+          </a:bodyPr>
+          <a:lstStyle/>
+          <a:p>
+            <a:r>
+              <a:rPr sz="1200" b="0">
+                <a:solidFill>
+                  <a:srgbClr val="53635B"/>
+                </a:solidFill>
+                <a:latin typeface="Aptos"/>
+              </a:rPr>
+              <a:t>Arrival time, age, and outcome for stroke patients. That is one field across many patients, not one patient.</a:t>
+            </a:r>
+          </a:p>
+        </p:txBody>
+      </p:sp>
+      <p:sp>
+        <p:nvSpPr>
+          <p:cNvPr id="12" name="TextBox 11"/>
+          <p:cNvSpPr txBox="1"/>
+          <p:nvPr/>
+        </p:nvSpPr>
+        <p:spPr>
+          <a:xfrm>
+            <a:off x="5943599" y="2898648"/>
+            <a:ext cx="320040" cy="521207"/>
+          </a:xfrm>
+          <a:prstGeom prst="rect">
+            <a:avLst/>
+          </a:prstGeom>
+          <a:noFill/>
+        </p:spPr>
+        <p:txBody>
+          <a:bodyPr wrap="square">
+            <a:noAutofit/>
+          </a:bodyPr>
+          <a:lstStyle/>
+          <a:p>
+            <a:r>
+              <a:rPr sz="2800" b="1">
+                <a:solidFill>
+                  <a:srgbClr val="53635B"/>
+                </a:solidFill>
+                <a:latin typeface="Aptos"/>
+              </a:rPr>
+              <a:t>→</a:t>
+            </a:r>
+          </a:p>
+        </p:txBody>
+      </p:sp>
+      <p:sp>
+        <p:nvSpPr>
+          <p:cNvPr id="13" name="Rounded Rectangle 12"/>
+          <p:cNvSpPr/>
+          <p:nvPr/>
+        </p:nvSpPr>
+        <p:spPr>
+          <a:xfrm>
+            <a:off x="6263640" y="1874519"/>
+            <a:ext cx="2423160" cy="2560320"/>
+          </a:xfrm>
+          <a:prstGeom prst="roundRect">
+            <a:avLst/>
+          </a:prstGeom>
+          <a:solidFill>
+            <a:srgbClr val="F4E8D0"/>
+          </a:solidFill>
+          <a:ln w="12700">
+            <a:solidFill>
+              <a:srgbClr val="B9C2BB"/>
+            </a:solidFill>
+          </a:ln>
+          <a:effectLst/>
+        </p:spPr>
+        <p:style>
+          <a:lnRef idx="1">
+            <a:schemeClr val="accent1"/>
+          </a:lnRef>
+          <a:fillRef idx="3">
+            <a:schemeClr val="accent1"/>
+          </a:fillRef>
+          <a:effectRef idx="2">
+            <a:schemeClr val="accent1"/>
+          </a:effectRef>
+          <a:fontRef idx="minor">
+            <a:schemeClr val="lt1"/>
+          </a:fontRef>
+        </p:style>
+        <p:txBody>
+          <a:bodyPr rtlCol="0" anchor="ctr"/>
+          <a:lstStyle/>
+          <a:p/>
+        </p:txBody>
+      </p:sp>
+      <p:sp>
+        <p:nvSpPr>
+          <p:cNvPr id="14" name="TextBox 13"/>
+          <p:cNvSpPr txBox="1"/>
+          <p:nvPr/>
+        </p:nvSpPr>
+        <p:spPr>
+          <a:xfrm>
+            <a:off x="6428231" y="2020824"/>
+            <a:ext cx="2103120" cy="320040"/>
+          </a:xfrm>
+          <a:prstGeom prst="rect">
+            <a:avLst/>
+          </a:prstGeom>
+          <a:noFill/>
+        </p:spPr>
+        <p:txBody>
+          <a:bodyPr wrap="square">
+            <a:noAutofit/>
+          </a:bodyPr>
+          <a:lstStyle/>
+          <a:p>
+            <a:r>
+              <a:rPr sz="1500" b="1">
+                <a:solidFill>
+                  <a:srgbClr val="15201B"/>
+                </a:solidFill>
+                <a:latin typeface="Aptos"/>
+              </a:rPr>
+              <a:t>WHAT THE RULES SAY</a:t>
+            </a:r>
+          </a:p>
+        </p:txBody>
+      </p:sp>
+      <p:sp>
+        <p:nvSpPr>
+          <p:cNvPr id="15" name="TextBox 14"/>
+          <p:cNvSpPr txBox="1"/>
+          <p:nvPr/>
+        </p:nvSpPr>
+        <p:spPr>
+          <a:xfrm>
+            <a:off x="6428231" y="2404872"/>
+            <a:ext cx="2103120" cy="1901951"/>
+          </a:xfrm>
+          <a:prstGeom prst="rect">
+            <a:avLst/>
+          </a:prstGeom>
+          <a:noFill/>
+        </p:spPr>
+        <p:txBody>
+          <a:bodyPr wrap="square">
+            <a:noAutofit/>
+          </a:bodyPr>
+          <a:lstStyle/>
+          <a:p>
+            <a:r>
+              <a:rPr sz="1200" b="0">
+                <a:solidFill>
+                  <a:srgbClr val="53635B"/>
+                </a:solidFill>
+                <a:latin typeface="Aptos"/>
+              </a:rPr>
+              <a:t>Outcome is a high sensitivity field. Medium trust, asked for across a whole column, so group it and hide part of it.</a:t>
+            </a:r>
+          </a:p>
+        </p:txBody>
+      </p:sp>
+      <p:sp>
+        <p:nvSpPr>
+          <p:cNvPr id="16" name="TextBox 15"/>
+          <p:cNvSpPr txBox="1"/>
+          <p:nvPr/>
+        </p:nvSpPr>
+        <p:spPr>
+          <a:xfrm>
+            <a:off x="8732520" y="2898648"/>
+            <a:ext cx="320040" cy="521207"/>
+          </a:xfrm>
+          <a:prstGeom prst="rect">
+            <a:avLst/>
+          </a:prstGeom>
+          <a:noFill/>
+        </p:spPr>
+        <p:txBody>
+          <a:bodyPr wrap="square">
+            <a:noAutofit/>
+          </a:bodyPr>
+          <a:lstStyle/>
+          <a:p>
+            <a:r>
+              <a:rPr sz="2800" b="1">
+                <a:solidFill>
+                  <a:srgbClr val="53635B"/>
+                </a:solidFill>
+                <a:latin typeface="Aptos"/>
+              </a:rPr>
+              <a:t>→</a:t>
+            </a:r>
+          </a:p>
+        </p:txBody>
+      </p:sp>
+      <p:sp>
+        <p:nvSpPr>
+          <p:cNvPr id="17" name="Rounded Rectangle 16"/>
+          <p:cNvSpPr/>
+          <p:nvPr/>
+        </p:nvSpPr>
+        <p:spPr>
+          <a:xfrm>
+            <a:off x="9052559" y="1874519"/>
+            <a:ext cx="2423160" cy="2560320"/>
+          </a:xfrm>
+          <a:prstGeom prst="roundRect">
+            <a:avLst/>
+          </a:prstGeom>
+          <a:solidFill>
+            <a:srgbClr val="E9E1FA"/>
+          </a:solidFill>
+          <a:ln w="12700">
+            <a:solidFill>
+              <a:srgbClr val="B9C2BB"/>
+            </a:solidFill>
+          </a:ln>
+          <a:effectLst/>
+        </p:spPr>
+        <p:style>
+          <a:lnRef idx="1">
+            <a:schemeClr val="accent1"/>
+          </a:lnRef>
+          <a:fillRef idx="3">
+            <a:schemeClr val="accent1"/>
+          </a:fillRef>
+          <a:effectRef idx="2">
+            <a:schemeClr val="accent1"/>
+          </a:effectRef>
+          <a:fontRef idx="minor">
+            <a:schemeClr val="lt1"/>
+          </a:fontRef>
+        </p:style>
+        <p:txBody>
+          <a:bodyPr rtlCol="0" anchor="ctr"/>
+          <a:lstStyle/>
+          <a:p/>
+        </p:txBody>
+      </p:sp>
+      <p:sp>
+        <p:nvSpPr>
+          <p:cNvPr id="18" name="TextBox 17"/>
+          <p:cNvSpPr txBox="1"/>
+          <p:nvPr/>
+        </p:nvSpPr>
+        <p:spPr>
+          <a:xfrm>
+            <a:off x="9217151" y="2020824"/>
+            <a:ext cx="2103120" cy="320040"/>
+          </a:xfrm>
+          <a:prstGeom prst="rect">
+            <a:avLst/>
+          </a:prstGeom>
+          <a:noFill/>
+        </p:spPr>
+        <p:txBody>
+          <a:bodyPr wrap="square">
+            <a:noAutofit/>
+          </a:bodyPr>
+          <a:lstStyle/>
+          <a:p>
+            <a:r>
+              <a:rPr sz="1500" b="1">
+                <a:solidFill>
+                  <a:srgbClr val="15201B"/>
+                </a:solidFill>
+                <a:latin typeface="Aptos"/>
+              </a:rPr>
+              <a:t>WHAT THEY GET</a:t>
+            </a:r>
+          </a:p>
+        </p:txBody>
+      </p:sp>
+      <p:sp>
+        <p:nvSpPr>
+          <p:cNvPr id="19" name="TextBox 18"/>
+          <p:cNvSpPr txBox="1"/>
+          <p:nvPr/>
+        </p:nvSpPr>
+        <p:spPr>
+          <a:xfrm>
+            <a:off x="9217151" y="2404872"/>
+            <a:ext cx="2103120" cy="1901951"/>
+          </a:xfrm>
+          <a:prstGeom prst="rect">
+            <a:avLst/>
+          </a:prstGeom>
+          <a:noFill/>
+        </p:spPr>
+        <p:txBody>
+          <a:bodyPr wrap="square">
+            <a:noAutofit/>
+          </a:bodyPr>
+          <a:lstStyle/>
+          <a:p>
+            <a:r>
+              <a:rPr sz="1200" b="0">
+                <a:solidFill>
+                  <a:srgbClr val="53635B"/>
+                </a:solidFill>
+                <a:latin typeface="Aptos"/>
+              </a:rPr>
+              <a:t>Age bands instead of ages, grouped outcomes, and a written reason. Enough to check the model, not enough to identify anyone.</a:t>
+            </a:r>
+          </a:p>
+        </p:txBody>
+      </p:sp>
+      <p:sp>
+        <p:nvSpPr>
+          <p:cNvPr id="20" name="TextBox 19"/>
+          <p:cNvSpPr txBox="1"/>
+          <p:nvPr/>
+        </p:nvSpPr>
+        <p:spPr>
+          <a:xfrm>
+            <a:off x="914400" y="4800600"/>
+            <a:ext cx="9875520" cy="457200"/>
+          </a:xfrm>
+          <a:prstGeom prst="rect">
+            <a:avLst/>
+          </a:prstGeom>
+          <a:noFill/>
+        </p:spPr>
+        <p:txBody>
+          <a:bodyPr wrap="square">
+            <a:noAutofit/>
+          </a:bodyPr>
+          <a:lstStyle/>
+          <a:p>
+            <a:r>
+              <a:rPr sz="1200" b="1">
+                <a:solidFill>
+                  <a:srgbClr val="15201B"/>
+                </a:solidFill>
+                <a:latin typeface="Aptos"/>
+              </a:rPr>
+              <a:t>Nobody wrote code for this specific request. The plan came from the three dials.</a:t>
+            </a:r>
+          </a:p>
+        </p:txBody>
+      </p:sp>
+      <p:sp>
+        <p:nvSpPr>
+          <p:cNvPr id="21" name="TextBox 20"/>
+          <p:cNvSpPr txBox="1"/>
+          <p:nvPr/>
+        </p:nvSpPr>
+        <p:spPr>
+          <a:xfrm>
+            <a:off x="566928" y="6355080"/>
+            <a:ext cx="5669280" cy="274320"/>
+          </a:xfrm>
+          <a:prstGeom prst="rect">
+            <a:avLst/>
+          </a:prstGeom>
+          <a:noFill/>
+        </p:spPr>
+        <p:txBody>
+          <a:bodyPr wrap="square">
+            <a:noAutofit/>
+          </a:bodyPr>
+          <a:lstStyle/>
+          <a:p>
+            <a:r>
+              <a:rPr sz="800" b="0">
+                <a:solidFill>
+                  <a:srgbClr val="53635B"/>
+                </a:solidFill>
+                <a:latin typeface="Aptos"/>
+              </a:rPr>
+              <a:t>A worked request / 25</a:t>
+            </a:r>
+          </a:p>
+        </p:txBody>
+      </p:sp>
+    </p:spTree>
+  </p:cSld>
+  <p:clrMapOvr>
+    <a:masterClrMapping/>
+  </p:clrMapOvr>
+</p:sld>
+</file>
+
 <file path=ppt/slides/slide4.xml><?xml version="1.0" encoding="utf-8"?>
 <p:sld xmlns:a="http://schemas.openxmlformats.org/drawingml/2006/main" xmlns:r="http://schemas.openxmlformats.org/officeDocument/2006/relationships" xmlns:p="http://schemas.openxmlformats.org/presentationml/2006/main">
   <p:cSld>
@@ -21623,7 +29063,7 @@
                 <a:ea typeface="Aptos"/>
                 <a:cs typeface="Aptos"/>
               </a:rPr>
-              <a:t>Federated control and data boundaries / 05</a:t>
+              <a:t>Federated control and data boundaries / 07</a:t>
             </a:r>
           </a:p>
         </p:txBody>
@@ -22637,7 +30077,7 @@
                 <a:ea typeface="Aptos"/>
                 <a:cs typeface="Aptos"/>
               </a:rPr>
-              <a:t>Federated round sequence / 06</a:t>
+              <a:t>Federated round sequence / 08</a:t>
             </a:r>
           </a:p>
         </p:txBody>
@@ -23651,7 +31091,7 @@
                 <a:ea typeface="Aptos"/>
                 <a:cs typeface="Aptos"/>
               </a:rPr>
-              <a:t>Versioned release lifecycle / 07</a:t>
+              <a:t>Versioned release lifecycle / 09</a:t>
             </a:r>
           </a:p>
         </p:txBody>
@@ -24665,7 +32105,7 @@
                 <a:ea typeface="Aptos"/>
                 <a:cs typeface="Aptos"/>
               </a:rPr>
-              <a:t>Hospital-local execution boundary / 08</a:t>
+              <a:t>Hospital-local execution boundary / 10</a:t>
             </a:r>
           </a:p>
         </p:txBody>
@@ -25679,7 +33119,7 @@
                 <a:ea typeface="Aptos"/>
                 <a:cs typeface="Aptos"/>
               </a:rPr>
-              <a:t>Federated control plane / 09</a:t>
+              <a:t>Federated control plane / 11</a:t>
             </a:r>
           </a:p>
         </p:txBody>

--- a/docs/presentation/healthcare-case-study/federated-healthcare-use-case/dagents-federated-healthcare-use-case.pptx
+++ b/docs/presentation/healthcare-case-study/federated-healthcare-use-case/dagents-federated-healthcare-use-case.pptx
@@ -21415,7 +21415,7 @@
                 </a:solidFill>
                 <a:latin typeface="Aptos"/>
               </a:rPr>
-              <a:t>Privacy is the worked example in the paper. The same shape is meant to extend to fairness, transparency, and security.</a:t>
+              <a:t>Privacy is the paper's worked example. The same shape extends to fairness, transparency, and security.</a:t>
             </a:r>
           </a:p>
         </p:txBody>
